--- a/assets/slides/Engineering Data Science.pptx
+++ b/assets/slides/Engineering Data Science.pptx
@@ -239,7 +239,7 @@
           <a:p>
             <a:fld id="{D6F60BA2-1DFE-4286-AB71-68BFEBE24C91}" type="datetimeFigureOut">
               <a:rPr lang="en-GB" smtClean="0"/>
-              <a:t>05/11/2024</a:t>
+              <a:t>07/04/2025</a:t>
             </a:fld>
             <a:endParaRPr lang="en-GB"/>
           </a:p>
@@ -1820,7 +1820,7 @@
           <a:p>
             <a:fld id="{1A77EDC3-57CA-43CF-8E2C-C9B9AF002A04}" type="datetimeFigureOut">
               <a:rPr lang="en-GB" smtClean="0"/>
-              <a:t>05/11/2024</a:t>
+              <a:t>07/04/2025</a:t>
             </a:fld>
             <a:endParaRPr lang="en-GB"/>
           </a:p>
@@ -2020,7 +2020,7 @@
           <a:p>
             <a:fld id="{1A77EDC3-57CA-43CF-8E2C-C9B9AF002A04}" type="datetimeFigureOut">
               <a:rPr lang="en-GB" smtClean="0"/>
-              <a:t>05/11/2024</a:t>
+              <a:t>07/04/2025</a:t>
             </a:fld>
             <a:endParaRPr lang="en-GB"/>
           </a:p>
@@ -2230,7 +2230,7 @@
           <a:p>
             <a:fld id="{1A77EDC3-57CA-43CF-8E2C-C9B9AF002A04}" type="datetimeFigureOut">
               <a:rPr lang="en-GB" smtClean="0"/>
-              <a:t>05/11/2024</a:t>
+              <a:t>07/04/2025</a:t>
             </a:fld>
             <a:endParaRPr lang="en-GB"/>
           </a:p>
@@ -2430,7 +2430,7 @@
           <a:p>
             <a:fld id="{1A77EDC3-57CA-43CF-8E2C-C9B9AF002A04}" type="datetimeFigureOut">
               <a:rPr lang="en-GB" smtClean="0"/>
-              <a:t>05/11/2024</a:t>
+              <a:t>07/04/2025</a:t>
             </a:fld>
             <a:endParaRPr lang="en-GB"/>
           </a:p>
@@ -2706,7 +2706,7 @@
           <a:p>
             <a:fld id="{1A77EDC3-57CA-43CF-8E2C-C9B9AF002A04}" type="datetimeFigureOut">
               <a:rPr lang="en-GB" smtClean="0"/>
-              <a:t>05/11/2024</a:t>
+              <a:t>07/04/2025</a:t>
             </a:fld>
             <a:endParaRPr lang="en-GB"/>
           </a:p>
@@ -2974,7 +2974,7 @@
           <a:p>
             <a:fld id="{1A77EDC3-57CA-43CF-8E2C-C9B9AF002A04}" type="datetimeFigureOut">
               <a:rPr lang="en-GB" smtClean="0"/>
-              <a:t>05/11/2024</a:t>
+              <a:t>07/04/2025</a:t>
             </a:fld>
             <a:endParaRPr lang="en-GB"/>
           </a:p>
@@ -3389,7 +3389,7 @@
           <a:p>
             <a:fld id="{1A77EDC3-57CA-43CF-8E2C-C9B9AF002A04}" type="datetimeFigureOut">
               <a:rPr lang="en-GB" smtClean="0"/>
-              <a:t>05/11/2024</a:t>
+              <a:t>07/04/2025</a:t>
             </a:fld>
             <a:endParaRPr lang="en-GB"/>
           </a:p>
@@ -3531,7 +3531,7 @@
           <a:p>
             <a:fld id="{1A77EDC3-57CA-43CF-8E2C-C9B9AF002A04}" type="datetimeFigureOut">
               <a:rPr lang="en-GB" smtClean="0"/>
-              <a:t>05/11/2024</a:t>
+              <a:t>07/04/2025</a:t>
             </a:fld>
             <a:endParaRPr lang="en-GB"/>
           </a:p>
@@ -3644,7 +3644,7 @@
           <a:p>
             <a:fld id="{1A77EDC3-57CA-43CF-8E2C-C9B9AF002A04}" type="datetimeFigureOut">
               <a:rPr lang="en-GB" smtClean="0"/>
-              <a:t>05/11/2024</a:t>
+              <a:t>07/04/2025</a:t>
             </a:fld>
             <a:endParaRPr lang="en-GB"/>
           </a:p>
@@ -3957,7 +3957,7 @@
           <a:p>
             <a:fld id="{1A77EDC3-57CA-43CF-8E2C-C9B9AF002A04}" type="datetimeFigureOut">
               <a:rPr lang="en-GB" smtClean="0"/>
-              <a:t>05/11/2024</a:t>
+              <a:t>07/04/2025</a:t>
             </a:fld>
             <a:endParaRPr lang="en-GB"/>
           </a:p>
@@ -4246,7 +4246,7 @@
           <a:p>
             <a:fld id="{1A77EDC3-57CA-43CF-8E2C-C9B9AF002A04}" type="datetimeFigureOut">
               <a:rPr lang="en-GB" smtClean="0"/>
-              <a:t>05/11/2024</a:t>
+              <a:t>07/04/2025</a:t>
             </a:fld>
             <a:endParaRPr lang="en-GB"/>
           </a:p>
@@ -4489,7 +4489,7 @@
           <a:p>
             <a:fld id="{1A77EDC3-57CA-43CF-8E2C-C9B9AF002A04}" type="datetimeFigureOut">
               <a:rPr lang="en-GB" smtClean="0"/>
-              <a:t>05/11/2024</a:t>
+              <a:t>07/04/2025</a:t>
             </a:fld>
             <a:endParaRPr lang="en-GB"/>
           </a:p>

--- a/assets/slides/Engineering Data Science.pptx
+++ b/assets/slides/Engineering Data Science.pptx
@@ -239,7 +239,7 @@
           <a:p>
             <a:fld id="{D6F60BA2-1DFE-4286-AB71-68BFEBE24C91}" type="datetimeFigureOut">
               <a:rPr lang="en-GB" smtClean="0"/>
-              <a:t>07/04/2025</a:t>
+              <a:t>21/05/2025</a:t>
             </a:fld>
             <a:endParaRPr lang="en-GB"/>
           </a:p>
@@ -639,14 +639,6 @@
           <a:bodyPr/>
           <a:lstStyle/>
           <a:p>
-            <a:r>
-              <a:rPr lang="en-US" dirty="0"/>
-              <a:t>We use these principles implicitly in our daily activities. But we need an explicit application of such principles and that is one of the goals of the systems </a:t>
-            </a:r>
-            <a:r>
-              <a:rPr lang="en-US"/>
-              <a:t>engineering approach.</a:t>
-            </a:r>
             <a:endParaRPr lang="en-GB" dirty="0"/>
           </a:p>
         </p:txBody>
@@ -668,6 +660,98 @@
           <a:p>
             <a:fld id="{5243359B-EED2-4AF7-B237-505FDBE4FBE9}" type="slidenum">
               <a:rPr lang="en-GB" smtClean="0"/>
+              <a:t>18</a:t>
+            </a:fld>
+            <a:endParaRPr lang="en-GB"/>
+          </a:p>
+        </p:txBody>
+      </p:sp>
+    </p:spTree>
+    <p:extLst>
+      <p:ext uri="{BB962C8B-B14F-4D97-AF65-F5344CB8AC3E}">
+        <p14:creationId xmlns:p14="http://schemas.microsoft.com/office/powerpoint/2010/main" val="1645238488"/>
+      </p:ext>
+    </p:extLst>
+  </p:cSld>
+  <p:clrMapOvr>
+    <a:masterClrMapping/>
+  </p:clrMapOvr>
+</p:notes>
+</file>
+
+<file path=ppt/notesSlides/notesSlide11.xml><?xml version="1.0" encoding="utf-8"?>
+<p:notes xmlns:a="http://schemas.openxmlformats.org/drawingml/2006/main" xmlns:r="http://schemas.openxmlformats.org/officeDocument/2006/relationships" xmlns:p="http://schemas.openxmlformats.org/presentationml/2006/main">
+  <p:cSld>
+    <p:spTree>
+      <p:nvGrpSpPr>
+        <p:cNvPr id="1" name=""/>
+        <p:cNvGrpSpPr/>
+        <p:nvPr/>
+      </p:nvGrpSpPr>
+      <p:grpSpPr>
+        <a:xfrm>
+          <a:off x="0" y="0"/>
+          <a:ext cx="0" cy="0"/>
+          <a:chOff x="0" y="0"/>
+          <a:chExt cx="0" cy="0"/>
+        </a:xfrm>
+      </p:grpSpPr>
+      <p:sp>
+        <p:nvSpPr>
+          <p:cNvPr id="2" name="Slide Image Placeholder 1"/>
+          <p:cNvSpPr>
+            <a:spLocks noGrp="1" noRot="1" noChangeAspect="1"/>
+          </p:cNvSpPr>
+          <p:nvPr>
+            <p:ph type="sldImg"/>
+          </p:nvPr>
+        </p:nvSpPr>
+        <p:spPr/>
+      </p:sp>
+      <p:sp>
+        <p:nvSpPr>
+          <p:cNvPr id="3" name="Notes Placeholder 2"/>
+          <p:cNvSpPr>
+            <a:spLocks noGrp="1"/>
+          </p:cNvSpPr>
+          <p:nvPr>
+            <p:ph type="body" idx="1"/>
+          </p:nvPr>
+        </p:nvSpPr>
+        <p:spPr/>
+        <p:txBody>
+          <a:bodyPr/>
+          <a:lstStyle/>
+          <a:p>
+            <a:r>
+              <a:rPr lang="en-US" dirty="0"/>
+              <a:t>We use these principles implicitly in our daily activities. But we need an explicit application of such principles and that is one of the goals of the systems </a:t>
+            </a:r>
+            <a:r>
+              <a:rPr lang="en-US"/>
+              <a:t>engineering approach.</a:t>
+            </a:r>
+            <a:endParaRPr lang="en-GB" dirty="0"/>
+          </a:p>
+        </p:txBody>
+      </p:sp>
+      <p:sp>
+        <p:nvSpPr>
+          <p:cNvPr id="4" name="Slide Number Placeholder 3"/>
+          <p:cNvSpPr>
+            <a:spLocks noGrp="1"/>
+          </p:cNvSpPr>
+          <p:nvPr>
+            <p:ph type="sldNum" sz="quarter" idx="5"/>
+          </p:nvPr>
+        </p:nvSpPr>
+        <p:spPr/>
+        <p:txBody>
+          <a:bodyPr/>
+          <a:lstStyle/>
+          <a:p>
+            <a:fld id="{5243359B-EED2-4AF7-B237-505FDBE4FBE9}" type="slidenum">
+              <a:rPr lang="en-GB" smtClean="0"/>
               <a:t>24</a:t>
             </a:fld>
             <a:endParaRPr lang="en-GB"/>
@@ -687,7 +771,7 @@
 </p:notes>
 </file>
 
-<file path=ppt/notesSlides/notesSlide11.xml><?xml version="1.0" encoding="utf-8"?>
+<file path=ppt/notesSlides/notesSlide12.xml><?xml version="1.0" encoding="utf-8"?>
 <p:notes xmlns:a="http://schemas.openxmlformats.org/drawingml/2006/main" xmlns:r="http://schemas.openxmlformats.org/officeDocument/2006/relationships" xmlns:p="http://schemas.openxmlformats.org/presentationml/2006/main">
   <p:cSld>
     <p:spTree>
@@ -795,7 +879,7 @@
 </p:notes>
 </file>
 
-<file path=ppt/notesSlides/notesSlide12.xml><?xml version="1.0" encoding="utf-8"?>
+<file path=ppt/notesSlides/notesSlide13.xml><?xml version="1.0" encoding="utf-8"?>
 <p:notes xmlns:a="http://schemas.openxmlformats.org/drawingml/2006/main" xmlns:r="http://schemas.openxmlformats.org/officeDocument/2006/relationships" xmlns:p="http://schemas.openxmlformats.org/presentationml/2006/main">
   <p:cSld>
     <p:spTree>
@@ -1820,7 +1904,7 @@
           <a:p>
             <a:fld id="{1A77EDC3-57CA-43CF-8E2C-C9B9AF002A04}" type="datetimeFigureOut">
               <a:rPr lang="en-GB" smtClean="0"/>
-              <a:t>07/04/2025</a:t>
+              <a:t>21/05/2025</a:t>
             </a:fld>
             <a:endParaRPr lang="en-GB"/>
           </a:p>
@@ -2020,7 +2104,7 @@
           <a:p>
             <a:fld id="{1A77EDC3-57CA-43CF-8E2C-C9B9AF002A04}" type="datetimeFigureOut">
               <a:rPr lang="en-GB" smtClean="0"/>
-              <a:t>07/04/2025</a:t>
+              <a:t>21/05/2025</a:t>
             </a:fld>
             <a:endParaRPr lang="en-GB"/>
           </a:p>
@@ -2230,7 +2314,7 @@
           <a:p>
             <a:fld id="{1A77EDC3-57CA-43CF-8E2C-C9B9AF002A04}" type="datetimeFigureOut">
               <a:rPr lang="en-GB" smtClean="0"/>
-              <a:t>07/04/2025</a:t>
+              <a:t>21/05/2025</a:t>
             </a:fld>
             <a:endParaRPr lang="en-GB"/>
           </a:p>
@@ -2430,7 +2514,7 @@
           <a:p>
             <a:fld id="{1A77EDC3-57CA-43CF-8E2C-C9B9AF002A04}" type="datetimeFigureOut">
               <a:rPr lang="en-GB" smtClean="0"/>
-              <a:t>07/04/2025</a:t>
+              <a:t>21/05/2025</a:t>
             </a:fld>
             <a:endParaRPr lang="en-GB"/>
           </a:p>
@@ -2706,7 +2790,7 @@
           <a:p>
             <a:fld id="{1A77EDC3-57CA-43CF-8E2C-C9B9AF002A04}" type="datetimeFigureOut">
               <a:rPr lang="en-GB" smtClean="0"/>
-              <a:t>07/04/2025</a:t>
+              <a:t>21/05/2025</a:t>
             </a:fld>
             <a:endParaRPr lang="en-GB"/>
           </a:p>
@@ -2974,7 +3058,7 @@
           <a:p>
             <a:fld id="{1A77EDC3-57CA-43CF-8E2C-C9B9AF002A04}" type="datetimeFigureOut">
               <a:rPr lang="en-GB" smtClean="0"/>
-              <a:t>07/04/2025</a:t>
+              <a:t>21/05/2025</a:t>
             </a:fld>
             <a:endParaRPr lang="en-GB"/>
           </a:p>
@@ -3389,7 +3473,7 @@
           <a:p>
             <a:fld id="{1A77EDC3-57CA-43CF-8E2C-C9B9AF002A04}" type="datetimeFigureOut">
               <a:rPr lang="en-GB" smtClean="0"/>
-              <a:t>07/04/2025</a:t>
+              <a:t>21/05/2025</a:t>
             </a:fld>
             <a:endParaRPr lang="en-GB"/>
           </a:p>
@@ -3531,7 +3615,7 @@
           <a:p>
             <a:fld id="{1A77EDC3-57CA-43CF-8E2C-C9B9AF002A04}" type="datetimeFigureOut">
               <a:rPr lang="en-GB" smtClean="0"/>
-              <a:t>07/04/2025</a:t>
+              <a:t>21/05/2025</a:t>
             </a:fld>
             <a:endParaRPr lang="en-GB"/>
           </a:p>
@@ -3644,7 +3728,7 @@
           <a:p>
             <a:fld id="{1A77EDC3-57CA-43CF-8E2C-C9B9AF002A04}" type="datetimeFigureOut">
               <a:rPr lang="en-GB" smtClean="0"/>
-              <a:t>07/04/2025</a:t>
+              <a:t>21/05/2025</a:t>
             </a:fld>
             <a:endParaRPr lang="en-GB"/>
           </a:p>
@@ -3957,7 +4041,7 @@
           <a:p>
             <a:fld id="{1A77EDC3-57CA-43CF-8E2C-C9B9AF002A04}" type="datetimeFigureOut">
               <a:rPr lang="en-GB" smtClean="0"/>
-              <a:t>07/04/2025</a:t>
+              <a:t>21/05/2025</a:t>
             </a:fld>
             <a:endParaRPr lang="en-GB"/>
           </a:p>
@@ -4246,7 +4330,7 @@
           <a:p>
             <a:fld id="{1A77EDC3-57CA-43CF-8E2C-C9B9AF002A04}" type="datetimeFigureOut">
               <a:rPr lang="en-GB" smtClean="0"/>
-              <a:t>07/04/2025</a:t>
+              <a:t>21/05/2025</a:t>
             </a:fld>
             <a:endParaRPr lang="en-GB"/>
           </a:p>
@@ -4489,7 +4573,7 @@
           <a:p>
             <a:fld id="{1A77EDC3-57CA-43CF-8E2C-C9B9AF002A04}" type="datetimeFigureOut">
               <a:rPr lang="en-GB" smtClean="0"/>
-              <a:t>07/04/2025</a:t>
+              <a:t>21/05/2025</a:t>
             </a:fld>
             <a:endParaRPr lang="en-GB"/>
           </a:p>
@@ -7363,18 +7447,18 @@
             </a:lvl9pPr>
           </a:lstStyle>
           <a:p>
-            <a:endParaRPr lang="en-US" sz="3000"/>
+            <a:endParaRPr lang="en-US" sz="3000" dirty="0"/>
           </a:p>
           <a:p>
             <a:pPr marL="342900" indent="-342900"/>
-            <a:endParaRPr lang="en-US" sz="3000"/>
+            <a:endParaRPr lang="en-US" sz="3000" dirty="0"/>
           </a:p>
           <a:p>
             <a:pPr marL="342900" indent="-342900"/>
-            <a:endParaRPr lang="en-US" sz="3000"/>
-          </a:p>
-          <a:p>
-            <a:endParaRPr lang="en-US" sz="3000"/>
+            <a:endParaRPr lang="en-US" sz="3000" dirty="0"/>
+          </a:p>
+          <a:p>
+            <a:endParaRPr lang="en-US" sz="3000" dirty="0"/>
           </a:p>
           <a:p>
             <a:endParaRPr lang="en-GB" sz="3000" dirty="0"/>
@@ -8713,10 +8797,10 @@
       </p:sp>
       <p:grpSp>
         <p:nvGrpSpPr>
-          <p:cNvPr id="25" name="Group 24">
-            <a:extLst>
-              <a:ext uri="{FF2B5EF4-FFF2-40B4-BE49-F238E27FC236}">
-                <a16:creationId xmlns:a16="http://schemas.microsoft.com/office/drawing/2014/main" id="{E23E12F7-C2F1-3B0B-312A-E4E3769AFF08}"/>
+          <p:cNvPr id="5" name="Group 4">
+            <a:extLst>
+              <a:ext uri="{FF2B5EF4-FFF2-40B4-BE49-F238E27FC236}">
+                <a16:creationId xmlns:a16="http://schemas.microsoft.com/office/drawing/2014/main" id="{069A5744-1B8F-A106-A580-D09AAA9AADCD}"/>
               </a:ext>
             </a:extLst>
           </p:cNvPr>
@@ -8727,682 +8811,867 @@
           <a:xfrm>
             <a:off x="70008" y="2916960"/>
             <a:ext cx="9334831" cy="3202263"/>
-            <a:chOff x="416295" y="1825584"/>
+            <a:chOff x="70008" y="2916960"/>
             <a:chExt cx="9334831" cy="3202263"/>
           </a:xfrm>
         </p:grpSpPr>
-        <p:sp>
-          <p:nvSpPr>
-            <p:cNvPr id="26" name="Rectangle 25">
+        <p:grpSp>
+          <p:nvGrpSpPr>
+            <p:cNvPr id="25" name="Group 24">
               <a:extLst>
                 <a:ext uri="{FF2B5EF4-FFF2-40B4-BE49-F238E27FC236}">
-                  <a16:creationId xmlns:a16="http://schemas.microsoft.com/office/drawing/2014/main" id="{5D4FB942-FACC-4197-113F-66B1F75CA674}"/>
+                  <a16:creationId xmlns:a16="http://schemas.microsoft.com/office/drawing/2014/main" id="{E23E12F7-C2F1-3B0B-312A-E4E3769AFF08}"/>
                 </a:ext>
               </a:extLst>
             </p:cNvPr>
-            <p:cNvSpPr/>
+            <p:cNvGrpSpPr/>
             <p:nvPr/>
-          </p:nvSpPr>
-          <p:spPr>
+          </p:nvGrpSpPr>
+          <p:grpSpPr>
             <a:xfrm>
-              <a:off x="4488390" y="2208390"/>
-              <a:ext cx="1347252" cy="638457"/>
+              <a:off x="70008" y="2916960"/>
+              <a:ext cx="9334831" cy="3202263"/>
+              <a:chOff x="416295" y="1825584"/>
+              <a:chExt cx="9334831" cy="3202263"/>
             </a:xfrm>
-            <a:prstGeom prst="rect">
-              <a:avLst/>
-            </a:prstGeom>
-            <a:solidFill>
-              <a:srgbClr val="003E74"/>
-            </a:solidFill>
-            <a:ln>
+          </p:grpSpPr>
+          <p:sp>
+            <p:nvSpPr>
+              <p:cNvPr id="26" name="Rectangle 25">
+                <a:extLst>
+                  <a:ext uri="{FF2B5EF4-FFF2-40B4-BE49-F238E27FC236}">
+                    <a16:creationId xmlns:a16="http://schemas.microsoft.com/office/drawing/2014/main" id="{5D4FB942-FACC-4197-113F-66B1F75CA674}"/>
+                  </a:ext>
+                </a:extLst>
+              </p:cNvPr>
+              <p:cNvSpPr/>
+              <p:nvPr/>
+            </p:nvSpPr>
+            <p:spPr>
+              <a:xfrm>
+                <a:off x="4488390" y="2208390"/>
+                <a:ext cx="1347252" cy="638457"/>
+              </a:xfrm>
+              <a:prstGeom prst="rect">
+                <a:avLst/>
+              </a:prstGeom>
               <a:solidFill>
                 <a:srgbClr val="003E74"/>
               </a:solidFill>
-            </a:ln>
-          </p:spPr>
-          <p:style>
-            <a:lnRef idx="2">
-              <a:schemeClr val="accent1">
-                <a:shade val="50000"/>
-              </a:schemeClr>
-            </a:lnRef>
-            <a:fillRef idx="1">
-              <a:schemeClr val="accent1"/>
-            </a:fillRef>
-            <a:effectRef idx="0">
-              <a:schemeClr val="accent1"/>
-            </a:effectRef>
-            <a:fontRef idx="minor">
-              <a:schemeClr val="lt1"/>
-            </a:fontRef>
-          </p:style>
-          <p:txBody>
-            <a:bodyPr rtlCol="0" anchor="ctr"/>
-            <a:lstStyle/>
-            <a:p>
-              <a:pPr algn="ctr"/>
-              <a:r>
-                <a:rPr lang="en-US" b="1" dirty="0">
+              <a:ln>
+                <a:solidFill>
+                  <a:srgbClr val="003E74"/>
+                </a:solidFill>
+              </a:ln>
+            </p:spPr>
+            <p:style>
+              <a:lnRef idx="2">
+                <a:schemeClr val="accent1">
+                  <a:shade val="50000"/>
+                </a:schemeClr>
+              </a:lnRef>
+              <a:fillRef idx="1">
+                <a:schemeClr val="accent1"/>
+              </a:fillRef>
+              <a:effectRef idx="0">
+                <a:schemeClr val="accent1"/>
+              </a:effectRef>
+              <a:fontRef idx="minor">
+                <a:schemeClr val="lt1"/>
+              </a:fontRef>
+            </p:style>
+            <p:txBody>
+              <a:bodyPr rtlCol="0" anchor="ctr"/>
+              <a:lstStyle/>
+              <a:p>
+                <a:pPr algn="ctr"/>
+                <a:r>
+                  <a:rPr lang="en-US" b="1" dirty="0">
+                    <a:solidFill>
+                      <a:schemeClr val="bg1"/>
+                    </a:solidFill>
+                  </a:rPr>
+                  <a:t>Learning Model</a:t>
+                </a:r>
+                <a:endParaRPr lang="en-GB" b="1" dirty="0">
                   <a:solidFill>
                     <a:schemeClr val="bg1"/>
                   </a:solidFill>
-                </a:rPr>
-                <a:t>Learning Model</a:t>
-              </a:r>
-              <a:endParaRPr lang="en-GB" b="1" dirty="0">
-                <a:solidFill>
-                  <a:schemeClr val="bg1"/>
-                </a:solidFill>
-              </a:endParaRPr>
-            </a:p>
-          </p:txBody>
-        </p:sp>
-        <p:sp>
-          <p:nvSpPr>
-            <p:cNvPr id="27" name="Rectangle 26">
-              <a:extLst>
-                <a:ext uri="{FF2B5EF4-FFF2-40B4-BE49-F238E27FC236}">
-                  <a16:creationId xmlns:a16="http://schemas.microsoft.com/office/drawing/2014/main" id="{EAB7EE83-EC54-AB64-6745-77C34A27CBF5}"/>
-                </a:ext>
-              </a:extLst>
-            </p:cNvPr>
-            <p:cNvSpPr/>
-            <p:nvPr/>
-          </p:nvSpPr>
-          <p:spPr>
-            <a:xfrm>
-              <a:off x="1853041" y="2208391"/>
-              <a:ext cx="1585593" cy="638457"/>
-            </a:xfrm>
-            <a:prstGeom prst="rect">
-              <a:avLst/>
-            </a:prstGeom>
-            <a:solidFill>
-              <a:schemeClr val="accent2">
-                <a:lumMod val="40000"/>
-                <a:lumOff val="60000"/>
-              </a:schemeClr>
-            </a:solidFill>
-            <a:ln>
+                </a:endParaRPr>
+              </a:p>
+            </p:txBody>
+          </p:sp>
+          <p:sp>
+            <p:nvSpPr>
+              <p:cNvPr id="27" name="Rectangle 26">
+                <a:extLst>
+                  <a:ext uri="{FF2B5EF4-FFF2-40B4-BE49-F238E27FC236}">
+                    <a16:creationId xmlns:a16="http://schemas.microsoft.com/office/drawing/2014/main" id="{EAB7EE83-EC54-AB64-6745-77C34A27CBF5}"/>
+                  </a:ext>
+                </a:extLst>
+              </p:cNvPr>
+              <p:cNvSpPr/>
+              <p:nvPr/>
+            </p:nvSpPr>
+            <p:spPr>
+              <a:xfrm>
+                <a:off x="1853041" y="2208391"/>
+                <a:ext cx="1585593" cy="638457"/>
+              </a:xfrm>
+              <a:prstGeom prst="rect">
+                <a:avLst/>
+              </a:prstGeom>
               <a:solidFill>
-                <a:srgbClr val="003E74"/>
+                <a:schemeClr val="accent2">
+                  <a:lumMod val="40000"/>
+                  <a:lumOff val="60000"/>
+                </a:schemeClr>
               </a:solidFill>
-            </a:ln>
-          </p:spPr>
-          <p:style>
-            <a:lnRef idx="2">
-              <a:schemeClr val="accent1">
-                <a:shade val="50000"/>
-              </a:schemeClr>
-            </a:lnRef>
-            <a:fillRef idx="1">
-              <a:schemeClr val="accent1"/>
-            </a:fillRef>
-            <a:effectRef idx="0">
-              <a:schemeClr val="accent1"/>
-            </a:effectRef>
-            <a:fontRef idx="minor">
-              <a:schemeClr val="lt1"/>
-            </a:fontRef>
-          </p:style>
-          <p:txBody>
-            <a:bodyPr rtlCol="0" anchor="ctr"/>
-            <a:lstStyle/>
-            <a:p>
-              <a:pPr algn="ctr"/>
-              <a:r>
-                <a:rPr lang="en-US" b="1" dirty="0">
+              <a:ln>
+                <a:solidFill>
+                  <a:srgbClr val="003E74"/>
+                </a:solidFill>
+              </a:ln>
+            </p:spPr>
+            <p:style>
+              <a:lnRef idx="2">
+                <a:schemeClr val="accent1">
+                  <a:shade val="50000"/>
+                </a:schemeClr>
+              </a:lnRef>
+              <a:fillRef idx="1">
+                <a:schemeClr val="accent1"/>
+              </a:fillRef>
+              <a:effectRef idx="0">
+                <a:schemeClr val="accent1"/>
+              </a:effectRef>
+              <a:fontRef idx="minor">
+                <a:schemeClr val="lt1"/>
+              </a:fontRef>
+            </p:style>
+            <p:txBody>
+              <a:bodyPr rtlCol="0" anchor="ctr"/>
+              <a:lstStyle/>
+              <a:p>
+                <a:pPr algn="ctr"/>
+                <a:r>
+                  <a:rPr lang="en-US" b="1" dirty="0">
+                    <a:solidFill>
+                      <a:srgbClr val="003E74"/>
+                    </a:solidFill>
+                  </a:rPr>
+                  <a:t>Component 1</a:t>
+                </a:r>
+                <a:endParaRPr lang="en-GB" b="1" dirty="0">
                   <a:solidFill>
                     <a:srgbClr val="003E74"/>
                   </a:solidFill>
-                </a:rPr>
-                <a:t>Component 1</a:t>
-              </a:r>
-              <a:endParaRPr lang="en-GB" b="1" dirty="0">
+                </a:endParaRPr>
+              </a:p>
+            </p:txBody>
+          </p:sp>
+          <p:sp>
+            <p:nvSpPr>
+              <p:cNvPr id="28" name="Rectangle 27">
+                <a:extLst>
+                  <a:ext uri="{FF2B5EF4-FFF2-40B4-BE49-F238E27FC236}">
+                    <a16:creationId xmlns:a16="http://schemas.microsoft.com/office/drawing/2014/main" id="{913266C1-51D2-0D19-C7AA-607CFFFCAF48}"/>
+                  </a:ext>
+                </a:extLst>
+              </p:cNvPr>
+              <p:cNvSpPr/>
+              <p:nvPr/>
+            </p:nvSpPr>
+            <p:spPr>
+              <a:xfrm>
+                <a:off x="1853041" y="4011153"/>
+                <a:ext cx="1585593" cy="638457"/>
+              </a:xfrm>
+              <a:prstGeom prst="rect">
+                <a:avLst/>
+              </a:prstGeom>
+              <a:solidFill>
+                <a:schemeClr val="accent2">
+                  <a:lumMod val="40000"/>
+                  <a:lumOff val="60000"/>
+                </a:schemeClr>
+              </a:solidFill>
+              <a:ln>
                 <a:solidFill>
                   <a:srgbClr val="003E74"/>
                 </a:solidFill>
-              </a:endParaRPr>
-            </a:p>
-          </p:txBody>
-        </p:sp>
-        <p:sp>
-          <p:nvSpPr>
-            <p:cNvPr id="28" name="Rectangle 27">
-              <a:extLst>
-                <a:ext uri="{FF2B5EF4-FFF2-40B4-BE49-F238E27FC236}">
-                  <a16:creationId xmlns:a16="http://schemas.microsoft.com/office/drawing/2014/main" id="{913266C1-51D2-0D19-C7AA-607CFFFCAF48}"/>
-                </a:ext>
-              </a:extLst>
-            </p:cNvPr>
-            <p:cNvSpPr/>
-            <p:nvPr/>
-          </p:nvSpPr>
-          <p:spPr>
-            <a:xfrm>
-              <a:off x="1853041" y="4011153"/>
-              <a:ext cx="1585593" cy="638457"/>
-            </a:xfrm>
-            <a:prstGeom prst="rect">
-              <a:avLst/>
-            </a:prstGeom>
-            <a:solidFill>
-              <a:schemeClr val="accent2">
-                <a:lumMod val="40000"/>
-                <a:lumOff val="60000"/>
-              </a:schemeClr>
-            </a:solidFill>
-            <a:ln>
-              <a:solidFill>
-                <a:srgbClr val="003E74"/>
-              </a:solidFill>
-            </a:ln>
-          </p:spPr>
-          <p:style>
-            <a:lnRef idx="2">
-              <a:schemeClr val="accent1">
-                <a:shade val="50000"/>
-              </a:schemeClr>
-            </a:lnRef>
-            <a:fillRef idx="1">
-              <a:schemeClr val="accent1"/>
-            </a:fillRef>
-            <a:effectRef idx="0">
-              <a:schemeClr val="accent1"/>
-            </a:effectRef>
-            <a:fontRef idx="minor">
-              <a:schemeClr val="lt1"/>
-            </a:fontRef>
-          </p:style>
-          <p:txBody>
-            <a:bodyPr rtlCol="0" anchor="ctr"/>
-            <a:lstStyle/>
-            <a:p>
-              <a:pPr algn="ctr"/>
-              <a:r>
-                <a:rPr lang="en-US" b="1" dirty="0">
+              </a:ln>
+            </p:spPr>
+            <p:style>
+              <a:lnRef idx="2">
+                <a:schemeClr val="accent1">
+                  <a:shade val="50000"/>
+                </a:schemeClr>
+              </a:lnRef>
+              <a:fillRef idx="1">
+                <a:schemeClr val="accent1"/>
+              </a:fillRef>
+              <a:effectRef idx="0">
+                <a:schemeClr val="accent1"/>
+              </a:effectRef>
+              <a:fontRef idx="minor">
+                <a:schemeClr val="lt1"/>
+              </a:fontRef>
+            </p:style>
+            <p:txBody>
+              <a:bodyPr rtlCol="0" anchor="ctr"/>
+              <a:lstStyle/>
+              <a:p>
+                <a:pPr algn="ctr"/>
+                <a:r>
+                  <a:rPr lang="en-US" b="1" dirty="0">
+                    <a:solidFill>
+                      <a:srgbClr val="003E74"/>
+                    </a:solidFill>
+                  </a:rPr>
+                  <a:t>Component 2</a:t>
+                </a:r>
+                <a:endParaRPr lang="en-GB" b="1" dirty="0">
                   <a:solidFill>
                     <a:srgbClr val="003E74"/>
                   </a:solidFill>
-                </a:rPr>
-                <a:t>Component 2</a:t>
-              </a:r>
-              <a:endParaRPr lang="en-GB" b="1" dirty="0">
+                </a:endParaRPr>
+              </a:p>
+            </p:txBody>
+          </p:sp>
+          <p:sp>
+            <p:nvSpPr>
+              <p:cNvPr id="29" name="Rectangle 28">
+                <a:extLst>
+                  <a:ext uri="{FF2B5EF4-FFF2-40B4-BE49-F238E27FC236}">
+                    <a16:creationId xmlns:a16="http://schemas.microsoft.com/office/drawing/2014/main" id="{3C5E2B2D-24C5-2C88-F79B-857777B6F4BA}"/>
+                  </a:ext>
+                </a:extLst>
+              </p:cNvPr>
+              <p:cNvSpPr/>
+              <p:nvPr/>
+            </p:nvSpPr>
+            <p:spPr>
+              <a:xfrm>
+                <a:off x="4468653" y="4011154"/>
+                <a:ext cx="1653876" cy="638457"/>
+              </a:xfrm>
+              <a:prstGeom prst="rect">
+                <a:avLst/>
+              </a:prstGeom>
+              <a:solidFill>
+                <a:schemeClr val="accent2">
+                  <a:lumMod val="40000"/>
+                  <a:lumOff val="60000"/>
+                </a:schemeClr>
+              </a:solidFill>
+              <a:ln>
                 <a:solidFill>
                   <a:srgbClr val="003E74"/>
                 </a:solidFill>
-              </a:endParaRPr>
-            </a:p>
-          </p:txBody>
-        </p:sp>
-        <p:sp>
-          <p:nvSpPr>
-            <p:cNvPr id="29" name="Rectangle 28">
-              <a:extLst>
-                <a:ext uri="{FF2B5EF4-FFF2-40B4-BE49-F238E27FC236}">
-                  <a16:creationId xmlns:a16="http://schemas.microsoft.com/office/drawing/2014/main" id="{3C5E2B2D-24C5-2C88-F79B-857777B6F4BA}"/>
-                </a:ext>
-              </a:extLst>
-            </p:cNvPr>
-            <p:cNvSpPr/>
-            <p:nvPr/>
-          </p:nvSpPr>
-          <p:spPr>
-            <a:xfrm>
-              <a:off x="4468653" y="4011154"/>
-              <a:ext cx="1653876" cy="638457"/>
-            </a:xfrm>
-            <a:prstGeom prst="rect">
-              <a:avLst/>
-            </a:prstGeom>
-            <a:solidFill>
-              <a:schemeClr val="accent2">
-                <a:lumMod val="40000"/>
-                <a:lumOff val="60000"/>
-              </a:schemeClr>
-            </a:solidFill>
-            <a:ln>
-              <a:solidFill>
-                <a:srgbClr val="003E74"/>
-              </a:solidFill>
-            </a:ln>
-          </p:spPr>
-          <p:style>
-            <a:lnRef idx="2">
-              <a:schemeClr val="accent1">
-                <a:shade val="50000"/>
-              </a:schemeClr>
-            </a:lnRef>
-            <a:fillRef idx="1">
-              <a:schemeClr val="accent1"/>
-            </a:fillRef>
-            <a:effectRef idx="0">
-              <a:schemeClr val="accent1"/>
-            </a:effectRef>
-            <a:fontRef idx="minor">
-              <a:schemeClr val="lt1"/>
-            </a:fontRef>
-          </p:style>
-          <p:txBody>
-            <a:bodyPr rtlCol="0" anchor="ctr"/>
-            <a:lstStyle/>
-            <a:p>
-              <a:pPr algn="ctr"/>
-              <a:r>
-                <a:rPr lang="en-US" b="1" dirty="0">
+              </a:ln>
+            </p:spPr>
+            <p:style>
+              <a:lnRef idx="2">
+                <a:schemeClr val="accent1">
+                  <a:shade val="50000"/>
+                </a:schemeClr>
+              </a:lnRef>
+              <a:fillRef idx="1">
+                <a:schemeClr val="accent1"/>
+              </a:fillRef>
+              <a:effectRef idx="0">
+                <a:schemeClr val="accent1"/>
+              </a:effectRef>
+              <a:fontRef idx="minor">
+                <a:schemeClr val="lt1"/>
+              </a:fontRef>
+            </p:style>
+            <p:txBody>
+              <a:bodyPr rtlCol="0" anchor="ctr"/>
+              <a:lstStyle/>
+              <a:p>
+                <a:pPr algn="ctr"/>
+                <a:r>
+                  <a:rPr lang="en-US" b="1" dirty="0">
+                    <a:solidFill>
+                      <a:srgbClr val="003E74"/>
+                    </a:solidFill>
+                  </a:rPr>
+                  <a:t>Component 3</a:t>
+                </a:r>
+                <a:endParaRPr lang="en-GB" b="1" dirty="0">
                   <a:solidFill>
                     <a:srgbClr val="003E74"/>
                   </a:solidFill>
-                </a:rPr>
-                <a:t>Component 3</a:t>
-              </a:r>
-              <a:endParaRPr lang="en-GB" b="1" dirty="0">
+                </a:endParaRPr>
+              </a:p>
+            </p:txBody>
+          </p:sp>
+          <p:sp>
+            <p:nvSpPr>
+              <p:cNvPr id="30" name="Rectangle 29">
+                <a:extLst>
+                  <a:ext uri="{FF2B5EF4-FFF2-40B4-BE49-F238E27FC236}">
+                    <a16:creationId xmlns:a16="http://schemas.microsoft.com/office/drawing/2014/main" id="{465267D2-DC47-2E54-A60A-C8E3643B6C96}"/>
+                  </a:ext>
+                </a:extLst>
+              </p:cNvPr>
+              <p:cNvSpPr/>
+              <p:nvPr/>
+            </p:nvSpPr>
+            <p:spPr>
+              <a:xfrm>
+                <a:off x="6879958" y="3113708"/>
+                <a:ext cx="1653876" cy="638457"/>
+              </a:xfrm>
+              <a:prstGeom prst="rect">
+                <a:avLst/>
+              </a:prstGeom>
+              <a:solidFill>
+                <a:schemeClr val="accent2">
+                  <a:lumMod val="40000"/>
+                  <a:lumOff val="60000"/>
+                </a:schemeClr>
+              </a:solidFill>
+              <a:ln>
                 <a:solidFill>
                   <a:srgbClr val="003E74"/>
                 </a:solidFill>
-              </a:endParaRPr>
-            </a:p>
-          </p:txBody>
-        </p:sp>
-        <p:sp>
-          <p:nvSpPr>
-            <p:cNvPr id="30" name="Rectangle 29">
-              <a:extLst>
-                <a:ext uri="{FF2B5EF4-FFF2-40B4-BE49-F238E27FC236}">
-                  <a16:creationId xmlns:a16="http://schemas.microsoft.com/office/drawing/2014/main" id="{465267D2-DC47-2E54-A60A-C8E3643B6C96}"/>
-                </a:ext>
-              </a:extLst>
-            </p:cNvPr>
-            <p:cNvSpPr/>
-            <p:nvPr/>
-          </p:nvSpPr>
-          <p:spPr>
-            <a:xfrm>
-              <a:off x="6879958" y="3113708"/>
-              <a:ext cx="1653876" cy="638457"/>
-            </a:xfrm>
-            <a:prstGeom prst="rect">
-              <a:avLst/>
-            </a:prstGeom>
-            <a:solidFill>
-              <a:schemeClr val="accent2">
-                <a:lumMod val="40000"/>
-                <a:lumOff val="60000"/>
-              </a:schemeClr>
-            </a:solidFill>
-            <a:ln>
-              <a:solidFill>
-                <a:srgbClr val="003E74"/>
-              </a:solidFill>
-            </a:ln>
-          </p:spPr>
-          <p:style>
-            <a:lnRef idx="2">
-              <a:schemeClr val="accent1">
-                <a:shade val="50000"/>
-              </a:schemeClr>
-            </a:lnRef>
-            <a:fillRef idx="1">
-              <a:schemeClr val="accent1"/>
-            </a:fillRef>
-            <a:effectRef idx="0">
-              <a:schemeClr val="accent1"/>
-            </a:effectRef>
-            <a:fontRef idx="minor">
-              <a:schemeClr val="lt1"/>
-            </a:fontRef>
-          </p:style>
-          <p:txBody>
-            <a:bodyPr rtlCol="0" anchor="ctr"/>
-            <a:lstStyle/>
-            <a:p>
-              <a:pPr algn="ctr"/>
-              <a:r>
-                <a:rPr lang="en-US" b="1" dirty="0">
+              </a:ln>
+            </p:spPr>
+            <p:style>
+              <a:lnRef idx="2">
+                <a:schemeClr val="accent1">
+                  <a:shade val="50000"/>
+                </a:schemeClr>
+              </a:lnRef>
+              <a:fillRef idx="1">
+                <a:schemeClr val="accent1"/>
+              </a:fillRef>
+              <a:effectRef idx="0">
+                <a:schemeClr val="accent1"/>
+              </a:effectRef>
+              <a:fontRef idx="minor">
+                <a:schemeClr val="lt1"/>
+              </a:fontRef>
+            </p:style>
+            <p:txBody>
+              <a:bodyPr rtlCol="0" anchor="ctr"/>
+              <a:lstStyle/>
+              <a:p>
+                <a:pPr algn="ctr"/>
+                <a:r>
+                  <a:rPr lang="en-US" b="1" dirty="0">
+                    <a:solidFill>
+                      <a:srgbClr val="003E74"/>
+                    </a:solidFill>
+                  </a:rPr>
+                  <a:t>Component 4</a:t>
+                </a:r>
+                <a:endParaRPr lang="en-GB" b="1" dirty="0">
                   <a:solidFill>
                     <a:srgbClr val="003E74"/>
                   </a:solidFill>
-                </a:rPr>
-                <a:t>Component 4</a:t>
-              </a:r>
-              <a:endParaRPr lang="en-GB" b="1" dirty="0">
+                </a:endParaRPr>
+              </a:p>
+            </p:txBody>
+          </p:sp>
+          <p:cxnSp>
+            <p:nvCxnSpPr>
+              <p:cNvPr id="31" name="Straight Arrow Connector 30">
+                <a:extLst>
+                  <a:ext uri="{FF2B5EF4-FFF2-40B4-BE49-F238E27FC236}">
+                    <a16:creationId xmlns:a16="http://schemas.microsoft.com/office/drawing/2014/main" id="{497F0AE9-6340-5721-86CE-0A4FF9C641E8}"/>
+                  </a:ext>
+                </a:extLst>
+              </p:cNvPr>
+              <p:cNvCxnSpPr>
+                <a:cxnSpLocks/>
+                <a:stCxn id="27" idx="3"/>
+                <a:endCxn id="26" idx="1"/>
+              </p:cNvCxnSpPr>
+              <p:nvPr/>
+            </p:nvCxnSpPr>
+            <p:spPr>
+              <a:xfrm flipV="1">
+                <a:off x="3438634" y="2527619"/>
+                <a:ext cx="1049756" cy="1"/>
+              </a:xfrm>
+              <a:prstGeom prst="straightConnector1">
+                <a:avLst/>
+              </a:prstGeom>
+              <a:ln w="19050">
                 <a:solidFill>
                   <a:srgbClr val="003E74"/>
                 </a:solidFill>
-              </a:endParaRPr>
-            </a:p>
-          </p:txBody>
-        </p:sp>
-        <p:cxnSp>
-          <p:nvCxnSpPr>
-            <p:cNvPr id="31" name="Straight Arrow Connector 30">
+                <a:tailEnd type="triangle"/>
+              </a:ln>
+            </p:spPr>
+            <p:style>
+              <a:lnRef idx="1">
+                <a:schemeClr val="accent1"/>
+              </a:lnRef>
+              <a:fillRef idx="0">
+                <a:schemeClr val="accent1"/>
+              </a:fillRef>
+              <a:effectRef idx="0">
+                <a:schemeClr val="accent1"/>
+              </a:effectRef>
+              <a:fontRef idx="minor">
+                <a:schemeClr val="tx1"/>
+              </a:fontRef>
+            </p:style>
+          </p:cxnSp>
+          <p:cxnSp>
+            <p:nvCxnSpPr>
+              <p:cNvPr id="32" name="Straight Arrow Connector 31">
+                <a:extLst>
+                  <a:ext uri="{FF2B5EF4-FFF2-40B4-BE49-F238E27FC236}">
+                    <a16:creationId xmlns:a16="http://schemas.microsoft.com/office/drawing/2014/main" id="{41212456-1FF1-0B21-5B9B-94F6BAC1C81B}"/>
+                  </a:ext>
+                </a:extLst>
+              </p:cNvPr>
+              <p:cNvCxnSpPr>
+                <a:cxnSpLocks/>
+                <a:stCxn id="28" idx="3"/>
+                <a:endCxn id="26" idx="1"/>
+              </p:cNvCxnSpPr>
+              <p:nvPr/>
+            </p:nvCxnSpPr>
+            <p:spPr>
+              <a:xfrm flipV="1">
+                <a:off x="3438634" y="2527619"/>
+                <a:ext cx="1049756" cy="1802763"/>
+              </a:xfrm>
+              <a:prstGeom prst="straightConnector1">
+                <a:avLst/>
+              </a:prstGeom>
+              <a:ln w="19050">
+                <a:solidFill>
+                  <a:srgbClr val="003E74"/>
+                </a:solidFill>
+                <a:tailEnd type="triangle"/>
+              </a:ln>
+            </p:spPr>
+            <p:style>
+              <a:lnRef idx="1">
+                <a:schemeClr val="accent1"/>
+              </a:lnRef>
+              <a:fillRef idx="0">
+                <a:schemeClr val="accent1"/>
+              </a:fillRef>
+              <a:effectRef idx="0">
+                <a:schemeClr val="accent1"/>
+              </a:effectRef>
+              <a:fontRef idx="minor">
+                <a:schemeClr val="tx1"/>
+              </a:fontRef>
+            </p:style>
+          </p:cxnSp>
+          <p:sp>
+            <p:nvSpPr>
+              <p:cNvPr id="36" name="Rectangle 35">
+                <a:extLst>
+                  <a:ext uri="{FF2B5EF4-FFF2-40B4-BE49-F238E27FC236}">
+                    <a16:creationId xmlns:a16="http://schemas.microsoft.com/office/drawing/2014/main" id="{7227E002-F4F6-F40E-8DC6-8C4B79D007A8}"/>
+                  </a:ext>
+                </a:extLst>
+              </p:cNvPr>
+              <p:cNvSpPr/>
+              <p:nvPr/>
+            </p:nvSpPr>
+            <p:spPr>
+              <a:xfrm>
+                <a:off x="1402954" y="1830153"/>
+                <a:ext cx="7254087" cy="3197694"/>
+              </a:xfrm>
+              <a:prstGeom prst="rect">
+                <a:avLst/>
+              </a:prstGeom>
+              <a:noFill/>
+              <a:ln>
+                <a:prstDash val="sysDash"/>
+              </a:ln>
+            </p:spPr>
+            <p:style>
+              <a:lnRef idx="2">
+                <a:schemeClr val="accent1">
+                  <a:shade val="50000"/>
+                </a:schemeClr>
+              </a:lnRef>
+              <a:fillRef idx="1">
+                <a:schemeClr val="accent1"/>
+              </a:fillRef>
+              <a:effectRef idx="0">
+                <a:schemeClr val="accent1"/>
+              </a:effectRef>
+              <a:fontRef idx="minor">
+                <a:schemeClr val="lt1"/>
+              </a:fontRef>
+            </p:style>
+            <p:txBody>
+              <a:bodyPr rtlCol="0" anchor="ctr"/>
+              <a:lstStyle/>
+              <a:p>
+                <a:pPr algn="ctr"/>
+                <a:endParaRPr lang="en-GB"/>
+              </a:p>
+            </p:txBody>
+          </p:sp>
+          <p:cxnSp>
+            <p:nvCxnSpPr>
+              <p:cNvPr id="37" name="Straight Arrow Connector 36">
+                <a:extLst>
+                  <a:ext uri="{FF2B5EF4-FFF2-40B4-BE49-F238E27FC236}">
+                    <a16:creationId xmlns:a16="http://schemas.microsoft.com/office/drawing/2014/main" id="{7D261476-1A18-714C-D5CD-C0E6F328A83D}"/>
+                  </a:ext>
+                </a:extLst>
+              </p:cNvPr>
+              <p:cNvCxnSpPr>
+                <a:cxnSpLocks/>
+                <a:endCxn id="36" idx="1"/>
+              </p:cNvCxnSpPr>
+              <p:nvPr/>
+            </p:nvCxnSpPr>
+            <p:spPr>
+              <a:xfrm>
+                <a:off x="434448" y="3429000"/>
+                <a:ext cx="968506" cy="0"/>
+              </a:xfrm>
+              <a:prstGeom prst="straightConnector1">
+                <a:avLst/>
+              </a:prstGeom>
+              <a:ln w="19050">
+                <a:solidFill>
+                  <a:srgbClr val="003E74"/>
+                </a:solidFill>
+                <a:tailEnd type="triangle"/>
+              </a:ln>
+            </p:spPr>
+            <p:style>
+              <a:lnRef idx="1">
+                <a:schemeClr val="accent1"/>
+              </a:lnRef>
+              <a:fillRef idx="0">
+                <a:schemeClr val="accent1"/>
+              </a:fillRef>
+              <a:effectRef idx="0">
+                <a:schemeClr val="accent1"/>
+              </a:effectRef>
+              <a:fontRef idx="minor">
+                <a:schemeClr val="tx1"/>
+              </a:fontRef>
+            </p:style>
+          </p:cxnSp>
+          <p:cxnSp>
+            <p:nvCxnSpPr>
+              <p:cNvPr id="38" name="Straight Arrow Connector 37">
+                <a:extLst>
+                  <a:ext uri="{FF2B5EF4-FFF2-40B4-BE49-F238E27FC236}">
+                    <a16:creationId xmlns:a16="http://schemas.microsoft.com/office/drawing/2014/main" id="{EF2BCADF-A5FF-7721-0BBD-0CB1E7284BA8}"/>
+                  </a:ext>
+                </a:extLst>
+              </p:cNvPr>
+              <p:cNvCxnSpPr>
+                <a:cxnSpLocks/>
+                <a:stCxn id="36" idx="1"/>
+                <a:endCxn id="27" idx="1"/>
+              </p:cNvCxnSpPr>
+              <p:nvPr/>
+            </p:nvCxnSpPr>
+            <p:spPr>
+              <a:xfrm flipV="1">
+                <a:off x="1402954" y="2527620"/>
+                <a:ext cx="450087" cy="901380"/>
+              </a:xfrm>
+              <a:prstGeom prst="straightConnector1">
+                <a:avLst/>
+              </a:prstGeom>
+              <a:ln w="19050">
+                <a:solidFill>
+                  <a:srgbClr val="003E74"/>
+                </a:solidFill>
+                <a:tailEnd type="triangle"/>
+              </a:ln>
+            </p:spPr>
+            <p:style>
+              <a:lnRef idx="1">
+                <a:schemeClr val="accent1"/>
+              </a:lnRef>
+              <a:fillRef idx="0">
+                <a:schemeClr val="accent1"/>
+              </a:fillRef>
+              <a:effectRef idx="0">
+                <a:schemeClr val="accent1"/>
+              </a:effectRef>
+              <a:fontRef idx="minor">
+                <a:schemeClr val="tx1"/>
+              </a:fontRef>
+            </p:style>
+          </p:cxnSp>
+          <p:cxnSp>
+            <p:nvCxnSpPr>
+              <p:cNvPr id="39" name="Straight Arrow Connector 38">
+                <a:extLst>
+                  <a:ext uri="{FF2B5EF4-FFF2-40B4-BE49-F238E27FC236}">
+                    <a16:creationId xmlns:a16="http://schemas.microsoft.com/office/drawing/2014/main" id="{D77F8663-2FD6-5D54-A4D6-1161C46C737E}"/>
+                  </a:ext>
+                </a:extLst>
+              </p:cNvPr>
+              <p:cNvCxnSpPr>
+                <a:cxnSpLocks/>
+                <a:stCxn id="36" idx="1"/>
+                <a:endCxn id="28" idx="1"/>
+              </p:cNvCxnSpPr>
+              <p:nvPr/>
+            </p:nvCxnSpPr>
+            <p:spPr>
+              <a:xfrm>
+                <a:off x="1402954" y="3429000"/>
+                <a:ext cx="450087" cy="901382"/>
+              </a:xfrm>
+              <a:prstGeom prst="straightConnector1">
+                <a:avLst/>
+              </a:prstGeom>
+              <a:ln w="19050">
+                <a:solidFill>
+                  <a:srgbClr val="003E74"/>
+                </a:solidFill>
+                <a:tailEnd type="triangle"/>
+              </a:ln>
+            </p:spPr>
+            <p:style>
+              <a:lnRef idx="1">
+                <a:schemeClr val="accent1"/>
+              </a:lnRef>
+              <a:fillRef idx="0">
+                <a:schemeClr val="accent1"/>
+              </a:fillRef>
+              <a:effectRef idx="0">
+                <a:schemeClr val="accent1"/>
+              </a:effectRef>
+              <a:fontRef idx="minor">
+                <a:schemeClr val="tx1"/>
+              </a:fontRef>
+            </p:style>
+          </p:cxnSp>
+          <p:cxnSp>
+            <p:nvCxnSpPr>
+              <p:cNvPr id="40" name="Straight Arrow Connector 39">
+                <a:extLst>
+                  <a:ext uri="{FF2B5EF4-FFF2-40B4-BE49-F238E27FC236}">
+                    <a16:creationId xmlns:a16="http://schemas.microsoft.com/office/drawing/2014/main" id="{858DA820-6A75-503C-B775-9481C340F1FE}"/>
+                  </a:ext>
+                </a:extLst>
+              </p:cNvPr>
+              <p:cNvCxnSpPr>
+                <a:cxnSpLocks/>
+                <a:stCxn id="36" idx="3"/>
+              </p:cNvCxnSpPr>
+              <p:nvPr/>
+            </p:nvCxnSpPr>
+            <p:spPr>
+              <a:xfrm>
+                <a:off x="8657041" y="3429000"/>
+                <a:ext cx="898168" cy="0"/>
+              </a:xfrm>
+              <a:prstGeom prst="straightConnector1">
+                <a:avLst/>
+              </a:prstGeom>
+              <a:ln w="19050">
+                <a:solidFill>
+                  <a:srgbClr val="003E74"/>
+                </a:solidFill>
+                <a:tailEnd type="triangle"/>
+              </a:ln>
+            </p:spPr>
+            <p:style>
+              <a:lnRef idx="1">
+                <a:schemeClr val="accent1"/>
+              </a:lnRef>
+              <a:fillRef idx="0">
+                <a:schemeClr val="accent1"/>
+              </a:fillRef>
+              <a:effectRef idx="0">
+                <a:schemeClr val="accent1"/>
+              </a:effectRef>
+              <a:fontRef idx="minor">
+                <a:schemeClr val="tx1"/>
+              </a:fontRef>
+            </p:style>
+          </p:cxnSp>
+          <p:sp>
+            <p:nvSpPr>
+              <p:cNvPr id="42" name="TextBox 41">
+                <a:extLst>
+                  <a:ext uri="{FF2B5EF4-FFF2-40B4-BE49-F238E27FC236}">
+                    <a16:creationId xmlns:a16="http://schemas.microsoft.com/office/drawing/2014/main" id="{F15E810A-9B70-75AF-11F2-299FB8565319}"/>
+                  </a:ext>
+                </a:extLst>
+              </p:cNvPr>
+              <p:cNvSpPr txBox="1"/>
+              <p:nvPr/>
+            </p:nvSpPr>
+            <p:spPr>
+              <a:xfrm>
+                <a:off x="7750681" y="1825584"/>
+                <a:ext cx="867032" cy="369332"/>
+              </a:xfrm>
+              <a:prstGeom prst="rect">
+                <a:avLst/>
+              </a:prstGeom>
+              <a:noFill/>
+            </p:spPr>
+            <p:txBody>
+              <a:bodyPr wrap="none" rtlCol="0">
+                <a:spAutoFit/>
+              </a:bodyPr>
+              <a:lstStyle/>
+              <a:p>
+                <a:r>
+                  <a:rPr lang="en-US" b="1" dirty="0">
+                    <a:solidFill>
+                      <a:srgbClr val="003E74"/>
+                    </a:solidFill>
+                  </a:rPr>
+                  <a:t>System</a:t>
+                </a:r>
+                <a:endParaRPr lang="en-GB" b="1" dirty="0">
+                  <a:solidFill>
+                    <a:srgbClr val="003E74"/>
+                  </a:solidFill>
+                </a:endParaRPr>
+              </a:p>
+            </p:txBody>
+          </p:sp>
+          <p:sp>
+            <p:nvSpPr>
+              <p:cNvPr id="43" name="TextBox 42">
+                <a:extLst>
+                  <a:ext uri="{FF2B5EF4-FFF2-40B4-BE49-F238E27FC236}">
+                    <a16:creationId xmlns:a16="http://schemas.microsoft.com/office/drawing/2014/main" id="{D297D733-089F-4A31-A888-F6D9A4D05A8C}"/>
+                  </a:ext>
+                </a:extLst>
+              </p:cNvPr>
+              <p:cNvSpPr txBox="1"/>
+              <p:nvPr/>
+            </p:nvSpPr>
+            <p:spPr>
+              <a:xfrm>
+                <a:off x="416295" y="3105834"/>
+                <a:ext cx="1054776" cy="646331"/>
+              </a:xfrm>
+              <a:prstGeom prst="rect">
+                <a:avLst/>
+              </a:prstGeom>
+              <a:noFill/>
+            </p:spPr>
+            <p:txBody>
+              <a:bodyPr wrap="none" rtlCol="0">
+                <a:spAutoFit/>
+              </a:bodyPr>
+              <a:lstStyle/>
+              <a:p>
+                <a:r>
+                  <a:rPr lang="en-US" b="1" dirty="0">
+                    <a:solidFill>
+                      <a:schemeClr val="accent2">
+                        <a:lumMod val="50000"/>
+                      </a:schemeClr>
+                    </a:solidFill>
+                  </a:rPr>
+                  <a:t>User’s </a:t>
+                </a:r>
+              </a:p>
+              <a:p>
+                <a:r>
+                  <a:rPr lang="en-US" b="1" dirty="0">
+                    <a:solidFill>
+                      <a:schemeClr val="accent2">
+                        <a:lumMod val="50000"/>
+                      </a:schemeClr>
+                    </a:solidFill>
+                  </a:rPr>
+                  <a:t>Request</a:t>
+                </a:r>
+                <a:endParaRPr lang="en-GB" b="1" dirty="0">
+                  <a:solidFill>
+                    <a:schemeClr val="accent2">
+                      <a:lumMod val="50000"/>
+                    </a:schemeClr>
+                  </a:solidFill>
+                </a:endParaRPr>
+              </a:p>
+            </p:txBody>
+          </p:sp>
+          <p:sp>
+            <p:nvSpPr>
+              <p:cNvPr id="44" name="TextBox 43">
+                <a:extLst>
+                  <a:ext uri="{FF2B5EF4-FFF2-40B4-BE49-F238E27FC236}">
+                    <a16:creationId xmlns:a16="http://schemas.microsoft.com/office/drawing/2014/main" id="{24E73EF7-4AE3-D451-165D-3AD3F0DB9F5A}"/>
+                  </a:ext>
+                </a:extLst>
+              </p:cNvPr>
+              <p:cNvSpPr txBox="1"/>
+              <p:nvPr/>
+            </p:nvSpPr>
+            <p:spPr>
+              <a:xfrm>
+                <a:off x="8615366" y="3105833"/>
+                <a:ext cx="1135760" cy="646331"/>
+              </a:xfrm>
+              <a:prstGeom prst="rect">
+                <a:avLst/>
+              </a:prstGeom>
+              <a:noFill/>
+            </p:spPr>
+            <p:txBody>
+              <a:bodyPr wrap="none" rtlCol="0">
+                <a:spAutoFit/>
+              </a:bodyPr>
+              <a:lstStyle/>
+              <a:p>
+                <a:r>
+                  <a:rPr lang="en-US" b="1" dirty="0">
+                    <a:solidFill>
+                      <a:schemeClr val="accent2">
+                        <a:lumMod val="50000"/>
+                      </a:schemeClr>
+                    </a:solidFill>
+                  </a:rPr>
+                  <a:t>System’s</a:t>
+                </a:r>
+              </a:p>
+              <a:p>
+                <a:r>
+                  <a:rPr lang="en-US" b="1" dirty="0">
+                    <a:solidFill>
+                      <a:schemeClr val="accent2">
+                        <a:lumMod val="50000"/>
+                      </a:schemeClr>
+                    </a:solidFill>
+                  </a:rPr>
+                  <a:t>Outputs</a:t>
+                </a:r>
+                <a:endParaRPr lang="en-GB" b="1" dirty="0">
+                  <a:solidFill>
+                    <a:schemeClr val="accent2">
+                      <a:lumMod val="50000"/>
+                    </a:schemeClr>
+                  </a:solidFill>
+                </a:endParaRPr>
+              </a:p>
+            </p:txBody>
+          </p:sp>
+        </p:grpSp>
+        <p:sp>
+          <p:nvSpPr>
+            <p:cNvPr id="47" name="TextBox 46">
               <a:extLst>
                 <a:ext uri="{FF2B5EF4-FFF2-40B4-BE49-F238E27FC236}">
-                  <a16:creationId xmlns:a16="http://schemas.microsoft.com/office/drawing/2014/main" id="{497F0AE9-6340-5721-86CE-0A4FF9C641E8}"/>
-                </a:ext>
-              </a:extLst>
-            </p:cNvPr>
-            <p:cNvCxnSpPr>
-              <a:cxnSpLocks/>
-              <a:stCxn id="27" idx="3"/>
-              <a:endCxn id="26" idx="1"/>
-            </p:cNvCxnSpPr>
-            <p:nvPr/>
-          </p:nvCxnSpPr>
-          <p:spPr>
-            <a:xfrm flipV="1">
-              <a:off x="3438634" y="2527619"/>
-              <a:ext cx="1049756" cy="1"/>
-            </a:xfrm>
-            <a:prstGeom prst="straightConnector1">
-              <a:avLst/>
-            </a:prstGeom>
-            <a:ln w="19050">
-              <a:solidFill>
-                <a:srgbClr val="003E74"/>
-              </a:solidFill>
-              <a:tailEnd type="triangle"/>
-            </a:ln>
-          </p:spPr>
-          <p:style>
-            <a:lnRef idx="1">
-              <a:schemeClr val="accent1"/>
-            </a:lnRef>
-            <a:fillRef idx="0">
-              <a:schemeClr val="accent1"/>
-            </a:fillRef>
-            <a:effectRef idx="0">
-              <a:schemeClr val="accent1"/>
-            </a:effectRef>
-            <a:fontRef idx="minor">
-              <a:schemeClr val="tx1"/>
-            </a:fontRef>
-          </p:style>
-        </p:cxnSp>
-        <p:cxnSp>
-          <p:nvCxnSpPr>
-            <p:cNvPr id="32" name="Straight Arrow Connector 31">
-              <a:extLst>
-                <a:ext uri="{FF2B5EF4-FFF2-40B4-BE49-F238E27FC236}">
-                  <a16:creationId xmlns:a16="http://schemas.microsoft.com/office/drawing/2014/main" id="{41212456-1FF1-0B21-5B9B-94F6BAC1C81B}"/>
-                </a:ext>
-              </a:extLst>
-            </p:cNvPr>
-            <p:cNvCxnSpPr>
-              <a:cxnSpLocks/>
-              <a:stCxn id="28" idx="3"/>
-              <a:endCxn id="26" idx="1"/>
-            </p:cNvCxnSpPr>
-            <p:nvPr/>
-          </p:nvCxnSpPr>
-          <p:spPr>
-            <a:xfrm flipV="1">
-              <a:off x="3438634" y="2527619"/>
-              <a:ext cx="1049756" cy="1802763"/>
-            </a:xfrm>
-            <a:prstGeom prst="straightConnector1">
-              <a:avLst/>
-            </a:prstGeom>
-            <a:ln w="19050">
-              <a:solidFill>
-                <a:srgbClr val="003E74"/>
-              </a:solidFill>
-              <a:tailEnd type="triangle"/>
-            </a:ln>
-          </p:spPr>
-          <p:style>
-            <a:lnRef idx="1">
-              <a:schemeClr val="accent1"/>
-            </a:lnRef>
-            <a:fillRef idx="0">
-              <a:schemeClr val="accent1"/>
-            </a:fillRef>
-            <a:effectRef idx="0">
-              <a:schemeClr val="accent1"/>
-            </a:effectRef>
-            <a:fontRef idx="minor">
-              <a:schemeClr val="tx1"/>
-            </a:fontRef>
-          </p:style>
-        </p:cxnSp>
-        <p:sp>
-          <p:nvSpPr>
-            <p:cNvPr id="36" name="Rectangle 35">
-              <a:extLst>
-                <a:ext uri="{FF2B5EF4-FFF2-40B4-BE49-F238E27FC236}">
-                  <a16:creationId xmlns:a16="http://schemas.microsoft.com/office/drawing/2014/main" id="{7227E002-F4F6-F40E-8DC6-8C4B79D007A8}"/>
-                </a:ext>
-              </a:extLst>
-            </p:cNvPr>
-            <p:cNvSpPr/>
-            <p:nvPr/>
-          </p:nvSpPr>
-          <p:spPr>
-            <a:xfrm>
-              <a:off x="1402954" y="1830153"/>
-              <a:ext cx="7254087" cy="3197694"/>
-            </a:xfrm>
-            <a:prstGeom prst="rect">
-              <a:avLst/>
-            </a:prstGeom>
-            <a:noFill/>
-            <a:ln>
-              <a:prstDash val="sysDash"/>
-            </a:ln>
-          </p:spPr>
-          <p:style>
-            <a:lnRef idx="2">
-              <a:schemeClr val="accent1">
-                <a:shade val="50000"/>
-              </a:schemeClr>
-            </a:lnRef>
-            <a:fillRef idx="1">
-              <a:schemeClr val="accent1"/>
-            </a:fillRef>
-            <a:effectRef idx="0">
-              <a:schemeClr val="accent1"/>
-            </a:effectRef>
-            <a:fontRef idx="minor">
-              <a:schemeClr val="lt1"/>
-            </a:fontRef>
-          </p:style>
-          <p:txBody>
-            <a:bodyPr rtlCol="0" anchor="ctr"/>
-            <a:lstStyle/>
-            <a:p>
-              <a:pPr algn="ctr"/>
-              <a:endParaRPr lang="en-GB"/>
-            </a:p>
-          </p:txBody>
-        </p:sp>
-        <p:cxnSp>
-          <p:nvCxnSpPr>
-            <p:cNvPr id="37" name="Straight Arrow Connector 36">
-              <a:extLst>
-                <a:ext uri="{FF2B5EF4-FFF2-40B4-BE49-F238E27FC236}">
-                  <a16:creationId xmlns:a16="http://schemas.microsoft.com/office/drawing/2014/main" id="{7D261476-1A18-714C-D5CD-C0E6F328A83D}"/>
-                </a:ext>
-              </a:extLst>
-            </p:cNvPr>
-            <p:cNvCxnSpPr>
-              <a:cxnSpLocks/>
-              <a:endCxn id="36" idx="1"/>
-            </p:cNvCxnSpPr>
-            <p:nvPr/>
-          </p:nvCxnSpPr>
-          <p:spPr>
-            <a:xfrm>
-              <a:off x="434448" y="3429000"/>
-              <a:ext cx="968506" cy="0"/>
-            </a:xfrm>
-            <a:prstGeom prst="straightConnector1">
-              <a:avLst/>
-            </a:prstGeom>
-            <a:ln w="19050">
-              <a:solidFill>
-                <a:srgbClr val="003E74"/>
-              </a:solidFill>
-              <a:tailEnd type="triangle"/>
-            </a:ln>
-          </p:spPr>
-          <p:style>
-            <a:lnRef idx="1">
-              <a:schemeClr val="accent1"/>
-            </a:lnRef>
-            <a:fillRef idx="0">
-              <a:schemeClr val="accent1"/>
-            </a:fillRef>
-            <a:effectRef idx="0">
-              <a:schemeClr val="accent1"/>
-            </a:effectRef>
-            <a:fontRef idx="minor">
-              <a:schemeClr val="tx1"/>
-            </a:fontRef>
-          </p:style>
-        </p:cxnSp>
-        <p:cxnSp>
-          <p:nvCxnSpPr>
-            <p:cNvPr id="38" name="Straight Arrow Connector 37">
-              <a:extLst>
-                <a:ext uri="{FF2B5EF4-FFF2-40B4-BE49-F238E27FC236}">
-                  <a16:creationId xmlns:a16="http://schemas.microsoft.com/office/drawing/2014/main" id="{EF2BCADF-A5FF-7721-0BBD-0CB1E7284BA8}"/>
-                </a:ext>
-              </a:extLst>
-            </p:cNvPr>
-            <p:cNvCxnSpPr>
-              <a:cxnSpLocks/>
-              <a:stCxn id="36" idx="1"/>
-              <a:endCxn id="27" idx="1"/>
-            </p:cNvCxnSpPr>
-            <p:nvPr/>
-          </p:nvCxnSpPr>
-          <p:spPr>
-            <a:xfrm flipV="1">
-              <a:off x="1402954" y="2527620"/>
-              <a:ext cx="450087" cy="901380"/>
-            </a:xfrm>
-            <a:prstGeom prst="straightConnector1">
-              <a:avLst/>
-            </a:prstGeom>
-            <a:ln w="19050">
-              <a:solidFill>
-                <a:srgbClr val="003E74"/>
-              </a:solidFill>
-              <a:tailEnd type="triangle"/>
-            </a:ln>
-          </p:spPr>
-          <p:style>
-            <a:lnRef idx="1">
-              <a:schemeClr val="accent1"/>
-            </a:lnRef>
-            <a:fillRef idx="0">
-              <a:schemeClr val="accent1"/>
-            </a:fillRef>
-            <a:effectRef idx="0">
-              <a:schemeClr val="accent1"/>
-            </a:effectRef>
-            <a:fontRef idx="minor">
-              <a:schemeClr val="tx1"/>
-            </a:fontRef>
-          </p:style>
-        </p:cxnSp>
-        <p:cxnSp>
-          <p:nvCxnSpPr>
-            <p:cNvPr id="39" name="Straight Arrow Connector 38">
-              <a:extLst>
-                <a:ext uri="{FF2B5EF4-FFF2-40B4-BE49-F238E27FC236}">
-                  <a16:creationId xmlns:a16="http://schemas.microsoft.com/office/drawing/2014/main" id="{D77F8663-2FD6-5D54-A4D6-1161C46C737E}"/>
-                </a:ext>
-              </a:extLst>
-            </p:cNvPr>
-            <p:cNvCxnSpPr>
-              <a:cxnSpLocks/>
-              <a:stCxn id="36" idx="1"/>
-              <a:endCxn id="28" idx="1"/>
-            </p:cNvCxnSpPr>
-            <p:nvPr/>
-          </p:nvCxnSpPr>
-          <p:spPr>
-            <a:xfrm>
-              <a:off x="1402954" y="3429000"/>
-              <a:ext cx="450087" cy="901382"/>
-            </a:xfrm>
-            <a:prstGeom prst="straightConnector1">
-              <a:avLst/>
-            </a:prstGeom>
-            <a:ln w="19050">
-              <a:solidFill>
-                <a:srgbClr val="003E74"/>
-              </a:solidFill>
-              <a:tailEnd type="triangle"/>
-            </a:ln>
-          </p:spPr>
-          <p:style>
-            <a:lnRef idx="1">
-              <a:schemeClr val="accent1"/>
-            </a:lnRef>
-            <a:fillRef idx="0">
-              <a:schemeClr val="accent1"/>
-            </a:fillRef>
-            <a:effectRef idx="0">
-              <a:schemeClr val="accent1"/>
-            </a:effectRef>
-            <a:fontRef idx="minor">
-              <a:schemeClr val="tx1"/>
-            </a:fontRef>
-          </p:style>
-        </p:cxnSp>
-        <p:cxnSp>
-          <p:nvCxnSpPr>
-            <p:cNvPr id="40" name="Straight Arrow Connector 39">
-              <a:extLst>
-                <a:ext uri="{FF2B5EF4-FFF2-40B4-BE49-F238E27FC236}">
-                  <a16:creationId xmlns:a16="http://schemas.microsoft.com/office/drawing/2014/main" id="{858DA820-6A75-503C-B775-9481C340F1FE}"/>
-                </a:ext>
-              </a:extLst>
-            </p:cNvPr>
-            <p:cNvCxnSpPr>
-              <a:cxnSpLocks/>
-              <a:stCxn id="36" idx="3"/>
-            </p:cNvCxnSpPr>
-            <p:nvPr/>
-          </p:nvCxnSpPr>
-          <p:spPr>
-            <a:xfrm>
-              <a:off x="8657041" y="3429000"/>
-              <a:ext cx="898168" cy="0"/>
-            </a:xfrm>
-            <a:prstGeom prst="straightConnector1">
-              <a:avLst/>
-            </a:prstGeom>
-            <a:ln w="19050">
-              <a:solidFill>
-                <a:srgbClr val="003E74"/>
-              </a:solidFill>
-              <a:tailEnd type="triangle"/>
-            </a:ln>
-          </p:spPr>
-          <p:style>
-            <a:lnRef idx="1">
-              <a:schemeClr val="accent1"/>
-            </a:lnRef>
-            <a:fillRef idx="0">
-              <a:schemeClr val="accent1"/>
-            </a:fillRef>
-            <a:effectRef idx="0">
-              <a:schemeClr val="accent1"/>
-            </a:effectRef>
-            <a:fontRef idx="minor">
-              <a:schemeClr val="tx1"/>
-            </a:fontRef>
-          </p:style>
-        </p:cxnSp>
-        <p:sp>
-          <p:nvSpPr>
-            <p:cNvPr id="42" name="TextBox 41">
-              <a:extLst>
-                <a:ext uri="{FF2B5EF4-FFF2-40B4-BE49-F238E27FC236}">
-                  <a16:creationId xmlns:a16="http://schemas.microsoft.com/office/drawing/2014/main" id="{F15E810A-9B70-75AF-11F2-299FB8565319}"/>
+                  <a16:creationId xmlns:a16="http://schemas.microsoft.com/office/drawing/2014/main" id="{47E7DB25-D763-985C-459C-4DAA602B9D6B}"/>
                 </a:ext>
               </a:extLst>
             </p:cNvPr>
@@ -9411,8 +9680,8 @@
           </p:nvSpPr>
           <p:spPr>
             <a:xfrm>
-              <a:off x="7750681" y="1825584"/>
-              <a:ext cx="867032" cy="369332"/>
+              <a:off x="3092348" y="3274715"/>
+              <a:ext cx="1000595" cy="369332"/>
             </a:xfrm>
             <a:prstGeom prst="rect">
               <a:avLst/>
@@ -9426,14 +9695,14 @@
             <a:lstStyle/>
             <a:p>
               <a:r>
-                <a:rPr lang="en-US" b="1" dirty="0">
+                <a:rPr lang="en-US" dirty="0">
                   <a:solidFill>
                     <a:srgbClr val="003E74"/>
                   </a:solidFill>
                 </a:rPr>
-                <a:t>System</a:t>
+                <a:t>&lt;inputs&gt;</a:t>
               </a:r>
-              <a:endParaRPr lang="en-GB" b="1" dirty="0">
+              <a:endParaRPr lang="en-GB" dirty="0">
                 <a:solidFill>
                   <a:srgbClr val="003E74"/>
                 </a:solidFill>
@@ -9443,10 +9712,10 @@
         </p:sp>
         <p:sp>
           <p:nvSpPr>
-            <p:cNvPr id="43" name="TextBox 42">
+            <p:cNvPr id="48" name="TextBox 47">
               <a:extLst>
                 <a:ext uri="{FF2B5EF4-FFF2-40B4-BE49-F238E27FC236}">
-                  <a16:creationId xmlns:a16="http://schemas.microsoft.com/office/drawing/2014/main" id="{D297D733-089F-4A31-A888-F6D9A4D05A8C}"/>
+                  <a16:creationId xmlns:a16="http://schemas.microsoft.com/office/drawing/2014/main" id="{FB97772F-F452-F2F2-185B-2B832DEDC6EB}"/>
                 </a:ext>
               </a:extLst>
             </p:cNvPr>
@@ -9454,9 +9723,9 @@
             <p:nvPr/>
           </p:nvSpPr>
           <p:spPr>
-            <a:xfrm>
-              <a:off x="416295" y="3105834"/>
-              <a:ext cx="1054776" cy="646331"/>
+            <a:xfrm rot="18213921">
+              <a:off x="2978166" y="4176096"/>
+              <a:ext cx="1000595" cy="369332"/>
             </a:xfrm>
             <a:prstGeom prst="rect">
               <a:avLst/>
@@ -9470,186 +9739,22 @@
             <a:lstStyle/>
             <a:p>
               <a:r>
-                <a:rPr lang="en-US" b="1" dirty="0">
+                <a:rPr lang="en-US" dirty="0">
                   <a:solidFill>
-                    <a:schemeClr val="accent2">
-                      <a:lumMod val="50000"/>
-                    </a:schemeClr>
+                    <a:srgbClr val="003E74"/>
                   </a:solidFill>
                 </a:rPr>
-                <a:t>User’s </a:t>
+                <a:t>&lt;inputs&gt;</a:t>
               </a:r>
-            </a:p>
-            <a:p>
-              <a:r>
-                <a:rPr lang="en-US" b="1" dirty="0">
-                  <a:solidFill>
-                    <a:schemeClr val="accent2">
-                      <a:lumMod val="50000"/>
-                    </a:schemeClr>
-                  </a:solidFill>
-                </a:rPr>
-                <a:t>Request</a:t>
-              </a:r>
-              <a:endParaRPr lang="en-GB" b="1" dirty="0">
-                <a:solidFill>
-                  <a:schemeClr val="accent2">
-                    <a:lumMod val="50000"/>
-                  </a:schemeClr>
-                </a:solidFill>
-              </a:endParaRPr>
-            </a:p>
-          </p:txBody>
-        </p:sp>
-        <p:sp>
-          <p:nvSpPr>
-            <p:cNvPr id="44" name="TextBox 43">
-              <a:extLst>
-                <a:ext uri="{FF2B5EF4-FFF2-40B4-BE49-F238E27FC236}">
-                  <a16:creationId xmlns:a16="http://schemas.microsoft.com/office/drawing/2014/main" id="{24E73EF7-4AE3-D451-165D-3AD3F0DB9F5A}"/>
-                </a:ext>
-              </a:extLst>
-            </p:cNvPr>
-            <p:cNvSpPr txBox="1"/>
-            <p:nvPr/>
-          </p:nvSpPr>
-          <p:spPr>
-            <a:xfrm>
-              <a:off x="8615366" y="3105833"/>
-              <a:ext cx="1135760" cy="646331"/>
-            </a:xfrm>
-            <a:prstGeom prst="rect">
-              <a:avLst/>
-            </a:prstGeom>
-            <a:noFill/>
-          </p:spPr>
-          <p:txBody>
-            <a:bodyPr wrap="none" rtlCol="0">
-              <a:spAutoFit/>
-            </a:bodyPr>
-            <a:lstStyle/>
-            <a:p>
-              <a:r>
-                <a:rPr lang="en-US" b="1" dirty="0">
-                  <a:solidFill>
-                    <a:schemeClr val="accent2">
-                      <a:lumMod val="50000"/>
-                    </a:schemeClr>
-                  </a:solidFill>
-                </a:rPr>
-                <a:t>System’s</a:t>
-              </a:r>
-            </a:p>
-            <a:p>
-              <a:r>
-                <a:rPr lang="en-US" b="1" dirty="0">
-                  <a:solidFill>
-                    <a:schemeClr val="accent2">
-                      <a:lumMod val="50000"/>
-                    </a:schemeClr>
-                  </a:solidFill>
-                </a:rPr>
-                <a:t>Outputs</a:t>
-              </a:r>
-              <a:endParaRPr lang="en-GB" b="1" dirty="0">
-                <a:solidFill>
-                  <a:schemeClr val="accent2">
-                    <a:lumMod val="50000"/>
-                  </a:schemeClr>
+              <a:endParaRPr lang="en-GB" dirty="0">
+                <a:solidFill>
+                  <a:srgbClr val="003E74"/>
                 </a:solidFill>
               </a:endParaRPr>
             </a:p>
           </p:txBody>
         </p:sp>
       </p:grpSp>
-      <p:sp>
-        <p:nvSpPr>
-          <p:cNvPr id="47" name="TextBox 46">
-            <a:extLst>
-              <a:ext uri="{FF2B5EF4-FFF2-40B4-BE49-F238E27FC236}">
-                <a16:creationId xmlns:a16="http://schemas.microsoft.com/office/drawing/2014/main" id="{47E7DB25-D763-985C-459C-4DAA602B9D6B}"/>
-              </a:ext>
-            </a:extLst>
-          </p:cNvPr>
-          <p:cNvSpPr txBox="1"/>
-          <p:nvPr/>
-        </p:nvSpPr>
-        <p:spPr>
-          <a:xfrm>
-            <a:off x="3092348" y="3274715"/>
-            <a:ext cx="1000595" cy="369332"/>
-          </a:xfrm>
-          <a:prstGeom prst="rect">
-            <a:avLst/>
-          </a:prstGeom>
-          <a:noFill/>
-        </p:spPr>
-        <p:txBody>
-          <a:bodyPr wrap="none" rtlCol="0">
-            <a:spAutoFit/>
-          </a:bodyPr>
-          <a:lstStyle/>
-          <a:p>
-            <a:r>
-              <a:rPr lang="en-US" dirty="0">
-                <a:solidFill>
-                  <a:srgbClr val="003E74"/>
-                </a:solidFill>
-              </a:rPr>
-              <a:t>&lt;inputs&gt;</a:t>
-            </a:r>
-            <a:endParaRPr lang="en-GB" dirty="0">
-              <a:solidFill>
-                <a:srgbClr val="003E74"/>
-              </a:solidFill>
-            </a:endParaRPr>
-          </a:p>
-        </p:txBody>
-      </p:sp>
-      <p:sp>
-        <p:nvSpPr>
-          <p:cNvPr id="48" name="TextBox 47">
-            <a:extLst>
-              <a:ext uri="{FF2B5EF4-FFF2-40B4-BE49-F238E27FC236}">
-                <a16:creationId xmlns:a16="http://schemas.microsoft.com/office/drawing/2014/main" id="{FB97772F-F452-F2F2-185B-2B832DEDC6EB}"/>
-              </a:ext>
-            </a:extLst>
-          </p:cNvPr>
-          <p:cNvSpPr txBox="1"/>
-          <p:nvPr/>
-        </p:nvSpPr>
-        <p:spPr>
-          <a:xfrm rot="18213921">
-            <a:off x="2978166" y="4176096"/>
-            <a:ext cx="1000595" cy="369332"/>
-          </a:xfrm>
-          <a:prstGeom prst="rect">
-            <a:avLst/>
-          </a:prstGeom>
-          <a:noFill/>
-        </p:spPr>
-        <p:txBody>
-          <a:bodyPr wrap="none" rtlCol="0">
-            <a:spAutoFit/>
-          </a:bodyPr>
-          <a:lstStyle/>
-          <a:p>
-            <a:r>
-              <a:rPr lang="en-US" dirty="0">
-                <a:solidFill>
-                  <a:srgbClr val="003E74"/>
-                </a:solidFill>
-              </a:rPr>
-              <a:t>&lt;inputs&gt;</a:t>
-            </a:r>
-            <a:endParaRPr lang="en-GB" dirty="0">
-              <a:solidFill>
-                <a:srgbClr val="003E74"/>
-              </a:solidFill>
-            </a:endParaRPr>
-          </a:p>
-        </p:txBody>
-      </p:sp>
       <p:sp>
         <p:nvSpPr>
           <p:cNvPr id="4" name="Content Placeholder 2">
@@ -10278,1059 +10383,24 @@
             </a:lvl9pPr>
           </a:lstStyle>
           <a:p>
-            <a:endParaRPr lang="en-US" sz="3000"/>
+            <a:endParaRPr lang="en-US" sz="3000" dirty="0"/>
           </a:p>
           <a:p>
             <a:pPr marL="342900" indent="-342900"/>
-            <a:endParaRPr lang="en-US" sz="3000"/>
+            <a:endParaRPr lang="en-US" sz="3000" dirty="0"/>
           </a:p>
           <a:p>
             <a:pPr marL="342900" indent="-342900"/>
-            <a:endParaRPr lang="en-US" sz="3000"/>
-          </a:p>
-          <a:p>
-            <a:endParaRPr lang="en-US" sz="3000"/>
+            <a:endParaRPr lang="en-US" sz="3000" dirty="0"/>
+          </a:p>
+          <a:p>
+            <a:endParaRPr lang="en-US" sz="3000" dirty="0"/>
           </a:p>
           <a:p>
             <a:endParaRPr lang="en-GB" sz="3000" dirty="0"/>
           </a:p>
         </p:txBody>
       </p:sp>
-      <p:grpSp>
-        <p:nvGrpSpPr>
-          <p:cNvPr id="25" name="Group 24">
-            <a:extLst>
-              <a:ext uri="{FF2B5EF4-FFF2-40B4-BE49-F238E27FC236}">
-                <a16:creationId xmlns:a16="http://schemas.microsoft.com/office/drawing/2014/main" id="{4A3674FC-01CE-CE1B-EC3E-EB71E73CE1B6}"/>
-              </a:ext>
-            </a:extLst>
-          </p:cNvPr>
-          <p:cNvGrpSpPr/>
-          <p:nvPr/>
-        </p:nvGrpSpPr>
-        <p:grpSpPr>
-          <a:xfrm>
-            <a:off x="70008" y="2916960"/>
-            <a:ext cx="9334831" cy="3202263"/>
-            <a:chOff x="416295" y="1825584"/>
-            <a:chExt cx="9334831" cy="3202263"/>
-          </a:xfrm>
-        </p:grpSpPr>
-        <p:sp>
-          <p:nvSpPr>
-            <p:cNvPr id="26" name="Rectangle 25">
-              <a:extLst>
-                <a:ext uri="{FF2B5EF4-FFF2-40B4-BE49-F238E27FC236}">
-                  <a16:creationId xmlns:a16="http://schemas.microsoft.com/office/drawing/2014/main" id="{0D50BDF7-909A-0ABB-230C-10B6B1CC63BB}"/>
-                </a:ext>
-              </a:extLst>
-            </p:cNvPr>
-            <p:cNvSpPr/>
-            <p:nvPr/>
-          </p:nvSpPr>
-          <p:spPr>
-            <a:xfrm>
-              <a:off x="4488390" y="2208390"/>
-              <a:ext cx="1347252" cy="638457"/>
-            </a:xfrm>
-            <a:prstGeom prst="rect">
-              <a:avLst/>
-            </a:prstGeom>
-            <a:solidFill>
-              <a:srgbClr val="003E74"/>
-            </a:solidFill>
-            <a:ln>
-              <a:solidFill>
-                <a:srgbClr val="003E74"/>
-              </a:solidFill>
-            </a:ln>
-          </p:spPr>
-          <p:style>
-            <a:lnRef idx="2">
-              <a:schemeClr val="accent1">
-                <a:shade val="50000"/>
-              </a:schemeClr>
-            </a:lnRef>
-            <a:fillRef idx="1">
-              <a:schemeClr val="accent1"/>
-            </a:fillRef>
-            <a:effectRef idx="0">
-              <a:schemeClr val="accent1"/>
-            </a:effectRef>
-            <a:fontRef idx="minor">
-              <a:schemeClr val="lt1"/>
-            </a:fontRef>
-          </p:style>
-          <p:txBody>
-            <a:bodyPr rtlCol="0" anchor="ctr"/>
-            <a:lstStyle/>
-            <a:p>
-              <a:pPr algn="ctr"/>
-              <a:r>
-                <a:rPr lang="en-US" b="1" dirty="0">
-                  <a:solidFill>
-                    <a:schemeClr val="bg1"/>
-                  </a:solidFill>
-                </a:rPr>
-                <a:t>Learning Model</a:t>
-              </a:r>
-              <a:endParaRPr lang="en-GB" b="1" dirty="0">
-                <a:solidFill>
-                  <a:schemeClr val="bg1"/>
-                </a:solidFill>
-              </a:endParaRPr>
-            </a:p>
-          </p:txBody>
-        </p:sp>
-        <p:sp>
-          <p:nvSpPr>
-            <p:cNvPr id="27" name="Rectangle 26">
-              <a:extLst>
-                <a:ext uri="{FF2B5EF4-FFF2-40B4-BE49-F238E27FC236}">
-                  <a16:creationId xmlns:a16="http://schemas.microsoft.com/office/drawing/2014/main" id="{E8BA2F2B-DEB0-5CC5-ED41-5FABC2F84840}"/>
-                </a:ext>
-              </a:extLst>
-            </p:cNvPr>
-            <p:cNvSpPr/>
-            <p:nvPr/>
-          </p:nvSpPr>
-          <p:spPr>
-            <a:xfrm>
-              <a:off x="1853041" y="2208391"/>
-              <a:ext cx="1585593" cy="638457"/>
-            </a:xfrm>
-            <a:prstGeom prst="rect">
-              <a:avLst/>
-            </a:prstGeom>
-            <a:solidFill>
-              <a:schemeClr val="accent2">
-                <a:lumMod val="40000"/>
-                <a:lumOff val="60000"/>
-              </a:schemeClr>
-            </a:solidFill>
-            <a:ln>
-              <a:solidFill>
-                <a:srgbClr val="003E74"/>
-              </a:solidFill>
-            </a:ln>
-          </p:spPr>
-          <p:style>
-            <a:lnRef idx="2">
-              <a:schemeClr val="accent1">
-                <a:shade val="50000"/>
-              </a:schemeClr>
-            </a:lnRef>
-            <a:fillRef idx="1">
-              <a:schemeClr val="accent1"/>
-            </a:fillRef>
-            <a:effectRef idx="0">
-              <a:schemeClr val="accent1"/>
-            </a:effectRef>
-            <a:fontRef idx="minor">
-              <a:schemeClr val="lt1"/>
-            </a:fontRef>
-          </p:style>
-          <p:txBody>
-            <a:bodyPr rtlCol="0" anchor="ctr"/>
-            <a:lstStyle/>
-            <a:p>
-              <a:pPr algn="ctr"/>
-              <a:r>
-                <a:rPr lang="en-US" b="1" dirty="0">
-                  <a:solidFill>
-                    <a:srgbClr val="003E74"/>
-                  </a:solidFill>
-                </a:rPr>
-                <a:t>Component 1</a:t>
-              </a:r>
-              <a:endParaRPr lang="en-GB" b="1" dirty="0">
-                <a:solidFill>
-                  <a:srgbClr val="003E74"/>
-                </a:solidFill>
-              </a:endParaRPr>
-            </a:p>
-          </p:txBody>
-        </p:sp>
-        <p:sp>
-          <p:nvSpPr>
-            <p:cNvPr id="28" name="Rectangle 27">
-              <a:extLst>
-                <a:ext uri="{FF2B5EF4-FFF2-40B4-BE49-F238E27FC236}">
-                  <a16:creationId xmlns:a16="http://schemas.microsoft.com/office/drawing/2014/main" id="{DA4C6194-8325-B76D-B7EF-B6605079FE9B}"/>
-                </a:ext>
-              </a:extLst>
-            </p:cNvPr>
-            <p:cNvSpPr/>
-            <p:nvPr/>
-          </p:nvSpPr>
-          <p:spPr>
-            <a:xfrm>
-              <a:off x="1853041" y="4011153"/>
-              <a:ext cx="1585593" cy="638457"/>
-            </a:xfrm>
-            <a:prstGeom prst="rect">
-              <a:avLst/>
-            </a:prstGeom>
-            <a:solidFill>
-              <a:schemeClr val="accent2">
-                <a:lumMod val="40000"/>
-                <a:lumOff val="60000"/>
-              </a:schemeClr>
-            </a:solidFill>
-            <a:ln>
-              <a:solidFill>
-                <a:srgbClr val="003E74"/>
-              </a:solidFill>
-            </a:ln>
-          </p:spPr>
-          <p:style>
-            <a:lnRef idx="2">
-              <a:schemeClr val="accent1">
-                <a:shade val="50000"/>
-              </a:schemeClr>
-            </a:lnRef>
-            <a:fillRef idx="1">
-              <a:schemeClr val="accent1"/>
-            </a:fillRef>
-            <a:effectRef idx="0">
-              <a:schemeClr val="accent1"/>
-            </a:effectRef>
-            <a:fontRef idx="minor">
-              <a:schemeClr val="lt1"/>
-            </a:fontRef>
-          </p:style>
-          <p:txBody>
-            <a:bodyPr rtlCol="0" anchor="ctr"/>
-            <a:lstStyle/>
-            <a:p>
-              <a:pPr algn="ctr"/>
-              <a:r>
-                <a:rPr lang="en-US" b="1" dirty="0">
-                  <a:solidFill>
-                    <a:srgbClr val="003E74"/>
-                  </a:solidFill>
-                </a:rPr>
-                <a:t>Component 2</a:t>
-              </a:r>
-              <a:endParaRPr lang="en-GB" b="1" dirty="0">
-                <a:solidFill>
-                  <a:srgbClr val="003E74"/>
-                </a:solidFill>
-              </a:endParaRPr>
-            </a:p>
-          </p:txBody>
-        </p:sp>
-        <p:sp>
-          <p:nvSpPr>
-            <p:cNvPr id="29" name="Rectangle 28">
-              <a:extLst>
-                <a:ext uri="{FF2B5EF4-FFF2-40B4-BE49-F238E27FC236}">
-                  <a16:creationId xmlns:a16="http://schemas.microsoft.com/office/drawing/2014/main" id="{ED7D3463-7DD0-CD84-B2B5-568AFEBE8075}"/>
-                </a:ext>
-              </a:extLst>
-            </p:cNvPr>
-            <p:cNvSpPr/>
-            <p:nvPr/>
-          </p:nvSpPr>
-          <p:spPr>
-            <a:xfrm>
-              <a:off x="4468653" y="4011154"/>
-              <a:ext cx="1653876" cy="638457"/>
-            </a:xfrm>
-            <a:prstGeom prst="rect">
-              <a:avLst/>
-            </a:prstGeom>
-            <a:solidFill>
-              <a:schemeClr val="accent2">
-                <a:lumMod val="40000"/>
-                <a:lumOff val="60000"/>
-              </a:schemeClr>
-            </a:solidFill>
-            <a:ln>
-              <a:solidFill>
-                <a:srgbClr val="003E74"/>
-              </a:solidFill>
-            </a:ln>
-          </p:spPr>
-          <p:style>
-            <a:lnRef idx="2">
-              <a:schemeClr val="accent1">
-                <a:shade val="50000"/>
-              </a:schemeClr>
-            </a:lnRef>
-            <a:fillRef idx="1">
-              <a:schemeClr val="accent1"/>
-            </a:fillRef>
-            <a:effectRef idx="0">
-              <a:schemeClr val="accent1"/>
-            </a:effectRef>
-            <a:fontRef idx="minor">
-              <a:schemeClr val="lt1"/>
-            </a:fontRef>
-          </p:style>
-          <p:txBody>
-            <a:bodyPr rtlCol="0" anchor="ctr"/>
-            <a:lstStyle/>
-            <a:p>
-              <a:pPr algn="ctr"/>
-              <a:r>
-                <a:rPr lang="en-US" b="1" dirty="0">
-                  <a:solidFill>
-                    <a:srgbClr val="003E74"/>
-                  </a:solidFill>
-                </a:rPr>
-                <a:t>Component 3</a:t>
-              </a:r>
-              <a:endParaRPr lang="en-GB" b="1" dirty="0">
-                <a:solidFill>
-                  <a:srgbClr val="003E74"/>
-                </a:solidFill>
-              </a:endParaRPr>
-            </a:p>
-          </p:txBody>
-        </p:sp>
-        <p:sp>
-          <p:nvSpPr>
-            <p:cNvPr id="30" name="Rectangle 29">
-              <a:extLst>
-                <a:ext uri="{FF2B5EF4-FFF2-40B4-BE49-F238E27FC236}">
-                  <a16:creationId xmlns:a16="http://schemas.microsoft.com/office/drawing/2014/main" id="{35D76BDD-9163-8AE0-2AE5-56BCB681EB63}"/>
-                </a:ext>
-              </a:extLst>
-            </p:cNvPr>
-            <p:cNvSpPr/>
-            <p:nvPr/>
-          </p:nvSpPr>
-          <p:spPr>
-            <a:xfrm>
-              <a:off x="6879958" y="3113708"/>
-              <a:ext cx="1653876" cy="638457"/>
-            </a:xfrm>
-            <a:prstGeom prst="rect">
-              <a:avLst/>
-            </a:prstGeom>
-            <a:solidFill>
-              <a:schemeClr val="accent2">
-                <a:lumMod val="40000"/>
-                <a:lumOff val="60000"/>
-              </a:schemeClr>
-            </a:solidFill>
-            <a:ln>
-              <a:solidFill>
-                <a:srgbClr val="003E74"/>
-              </a:solidFill>
-            </a:ln>
-          </p:spPr>
-          <p:style>
-            <a:lnRef idx="2">
-              <a:schemeClr val="accent1">
-                <a:shade val="50000"/>
-              </a:schemeClr>
-            </a:lnRef>
-            <a:fillRef idx="1">
-              <a:schemeClr val="accent1"/>
-            </a:fillRef>
-            <a:effectRef idx="0">
-              <a:schemeClr val="accent1"/>
-            </a:effectRef>
-            <a:fontRef idx="minor">
-              <a:schemeClr val="lt1"/>
-            </a:fontRef>
-          </p:style>
-          <p:txBody>
-            <a:bodyPr rtlCol="0" anchor="ctr"/>
-            <a:lstStyle/>
-            <a:p>
-              <a:pPr algn="ctr"/>
-              <a:r>
-                <a:rPr lang="en-US" b="1" dirty="0">
-                  <a:solidFill>
-                    <a:srgbClr val="003E74"/>
-                  </a:solidFill>
-                </a:rPr>
-                <a:t>Component 4</a:t>
-              </a:r>
-              <a:endParaRPr lang="en-GB" b="1" dirty="0">
-                <a:solidFill>
-                  <a:srgbClr val="003E74"/>
-                </a:solidFill>
-              </a:endParaRPr>
-            </a:p>
-          </p:txBody>
-        </p:sp>
-        <p:cxnSp>
-          <p:nvCxnSpPr>
-            <p:cNvPr id="31" name="Straight Arrow Connector 30">
-              <a:extLst>
-                <a:ext uri="{FF2B5EF4-FFF2-40B4-BE49-F238E27FC236}">
-                  <a16:creationId xmlns:a16="http://schemas.microsoft.com/office/drawing/2014/main" id="{DB759732-91D2-15C8-6026-B79AEDF38C70}"/>
-                </a:ext>
-              </a:extLst>
-            </p:cNvPr>
-            <p:cNvCxnSpPr>
-              <a:cxnSpLocks/>
-              <a:stCxn id="27" idx="3"/>
-              <a:endCxn id="26" idx="1"/>
-            </p:cNvCxnSpPr>
-            <p:nvPr/>
-          </p:nvCxnSpPr>
-          <p:spPr>
-            <a:xfrm flipV="1">
-              <a:off x="3438634" y="2527619"/>
-              <a:ext cx="1049756" cy="1"/>
-            </a:xfrm>
-            <a:prstGeom prst="straightConnector1">
-              <a:avLst/>
-            </a:prstGeom>
-            <a:ln w="19050">
-              <a:solidFill>
-                <a:srgbClr val="003E74"/>
-              </a:solidFill>
-              <a:tailEnd type="triangle"/>
-            </a:ln>
-          </p:spPr>
-          <p:style>
-            <a:lnRef idx="1">
-              <a:schemeClr val="accent1"/>
-            </a:lnRef>
-            <a:fillRef idx="0">
-              <a:schemeClr val="accent1"/>
-            </a:fillRef>
-            <a:effectRef idx="0">
-              <a:schemeClr val="accent1"/>
-            </a:effectRef>
-            <a:fontRef idx="minor">
-              <a:schemeClr val="tx1"/>
-            </a:fontRef>
-          </p:style>
-        </p:cxnSp>
-        <p:cxnSp>
-          <p:nvCxnSpPr>
-            <p:cNvPr id="32" name="Straight Arrow Connector 31">
-              <a:extLst>
-                <a:ext uri="{FF2B5EF4-FFF2-40B4-BE49-F238E27FC236}">
-                  <a16:creationId xmlns:a16="http://schemas.microsoft.com/office/drawing/2014/main" id="{C165BB7A-2111-36AE-BB38-ED333D09D94A}"/>
-                </a:ext>
-              </a:extLst>
-            </p:cNvPr>
-            <p:cNvCxnSpPr>
-              <a:cxnSpLocks/>
-              <a:stCxn id="28" idx="3"/>
-              <a:endCxn id="26" idx="1"/>
-            </p:cNvCxnSpPr>
-            <p:nvPr/>
-          </p:nvCxnSpPr>
-          <p:spPr>
-            <a:xfrm flipV="1">
-              <a:off x="3438634" y="2527619"/>
-              <a:ext cx="1049756" cy="1802763"/>
-            </a:xfrm>
-            <a:prstGeom prst="straightConnector1">
-              <a:avLst/>
-            </a:prstGeom>
-            <a:ln w="19050">
-              <a:solidFill>
-                <a:srgbClr val="003E74"/>
-              </a:solidFill>
-              <a:tailEnd type="triangle"/>
-            </a:ln>
-          </p:spPr>
-          <p:style>
-            <a:lnRef idx="1">
-              <a:schemeClr val="accent1"/>
-            </a:lnRef>
-            <a:fillRef idx="0">
-              <a:schemeClr val="accent1"/>
-            </a:fillRef>
-            <a:effectRef idx="0">
-              <a:schemeClr val="accent1"/>
-            </a:effectRef>
-            <a:fontRef idx="minor">
-              <a:schemeClr val="tx1"/>
-            </a:fontRef>
-          </p:style>
-        </p:cxnSp>
-        <p:cxnSp>
-          <p:nvCxnSpPr>
-            <p:cNvPr id="33" name="Straight Arrow Connector 32">
-              <a:extLst>
-                <a:ext uri="{FF2B5EF4-FFF2-40B4-BE49-F238E27FC236}">
-                  <a16:creationId xmlns:a16="http://schemas.microsoft.com/office/drawing/2014/main" id="{FAE19ACB-84A5-E1F2-5F52-F6D8D57F5400}"/>
-                </a:ext>
-              </a:extLst>
-            </p:cNvPr>
-            <p:cNvCxnSpPr>
-              <a:cxnSpLocks/>
-              <a:stCxn id="28" idx="3"/>
-              <a:endCxn id="29" idx="1"/>
-            </p:cNvCxnSpPr>
-            <p:nvPr/>
-          </p:nvCxnSpPr>
-          <p:spPr>
-            <a:xfrm>
-              <a:off x="3438634" y="4330382"/>
-              <a:ext cx="1030019" cy="1"/>
-            </a:xfrm>
-            <a:prstGeom prst="straightConnector1">
-              <a:avLst/>
-            </a:prstGeom>
-            <a:ln w="19050">
-              <a:solidFill>
-                <a:srgbClr val="003E74"/>
-              </a:solidFill>
-              <a:tailEnd type="triangle"/>
-            </a:ln>
-          </p:spPr>
-          <p:style>
-            <a:lnRef idx="1">
-              <a:schemeClr val="accent1"/>
-            </a:lnRef>
-            <a:fillRef idx="0">
-              <a:schemeClr val="accent1"/>
-            </a:fillRef>
-            <a:effectRef idx="0">
-              <a:schemeClr val="accent1"/>
-            </a:effectRef>
-            <a:fontRef idx="minor">
-              <a:schemeClr val="tx1"/>
-            </a:fontRef>
-          </p:style>
-        </p:cxnSp>
-        <p:cxnSp>
-          <p:nvCxnSpPr>
-            <p:cNvPr id="34" name="Straight Arrow Connector 33">
-              <a:extLst>
-                <a:ext uri="{FF2B5EF4-FFF2-40B4-BE49-F238E27FC236}">
-                  <a16:creationId xmlns:a16="http://schemas.microsoft.com/office/drawing/2014/main" id="{2F7C922F-E6B5-10CA-30DC-1BAFFEF39E98}"/>
-                </a:ext>
-              </a:extLst>
-            </p:cNvPr>
-            <p:cNvCxnSpPr>
-              <a:cxnSpLocks/>
-              <a:stCxn id="26" idx="3"/>
-              <a:endCxn id="30" idx="1"/>
-            </p:cNvCxnSpPr>
-            <p:nvPr/>
-          </p:nvCxnSpPr>
-          <p:spPr>
-            <a:xfrm>
-              <a:off x="5835642" y="2527619"/>
-              <a:ext cx="1044316" cy="905318"/>
-            </a:xfrm>
-            <a:prstGeom prst="straightConnector1">
-              <a:avLst/>
-            </a:prstGeom>
-            <a:ln w="19050">
-              <a:solidFill>
-                <a:srgbClr val="003E74"/>
-              </a:solidFill>
-              <a:tailEnd type="triangle"/>
-            </a:ln>
-          </p:spPr>
-          <p:style>
-            <a:lnRef idx="1">
-              <a:schemeClr val="accent1"/>
-            </a:lnRef>
-            <a:fillRef idx="0">
-              <a:schemeClr val="accent1"/>
-            </a:fillRef>
-            <a:effectRef idx="0">
-              <a:schemeClr val="accent1"/>
-            </a:effectRef>
-            <a:fontRef idx="minor">
-              <a:schemeClr val="tx1"/>
-            </a:fontRef>
-          </p:style>
-        </p:cxnSp>
-        <p:cxnSp>
-          <p:nvCxnSpPr>
-            <p:cNvPr id="35" name="Straight Arrow Connector 34">
-              <a:extLst>
-                <a:ext uri="{FF2B5EF4-FFF2-40B4-BE49-F238E27FC236}">
-                  <a16:creationId xmlns:a16="http://schemas.microsoft.com/office/drawing/2014/main" id="{FA6B6FFB-79B5-CA62-55EA-B543836FCED4}"/>
-                </a:ext>
-              </a:extLst>
-            </p:cNvPr>
-            <p:cNvCxnSpPr>
-              <a:cxnSpLocks/>
-              <a:stCxn id="29" idx="3"/>
-              <a:endCxn id="30" idx="1"/>
-            </p:cNvCxnSpPr>
-            <p:nvPr/>
-          </p:nvCxnSpPr>
-          <p:spPr>
-            <a:xfrm flipV="1">
-              <a:off x="6122529" y="3432937"/>
-              <a:ext cx="757429" cy="897446"/>
-            </a:xfrm>
-            <a:prstGeom prst="straightConnector1">
-              <a:avLst/>
-            </a:prstGeom>
-            <a:ln w="19050">
-              <a:solidFill>
-                <a:srgbClr val="003E74"/>
-              </a:solidFill>
-              <a:tailEnd type="triangle"/>
-            </a:ln>
-          </p:spPr>
-          <p:style>
-            <a:lnRef idx="1">
-              <a:schemeClr val="accent1"/>
-            </a:lnRef>
-            <a:fillRef idx="0">
-              <a:schemeClr val="accent1"/>
-            </a:fillRef>
-            <a:effectRef idx="0">
-              <a:schemeClr val="accent1"/>
-            </a:effectRef>
-            <a:fontRef idx="minor">
-              <a:schemeClr val="tx1"/>
-            </a:fontRef>
-          </p:style>
-        </p:cxnSp>
-        <p:sp>
-          <p:nvSpPr>
-            <p:cNvPr id="36" name="Rectangle 35">
-              <a:extLst>
-                <a:ext uri="{FF2B5EF4-FFF2-40B4-BE49-F238E27FC236}">
-                  <a16:creationId xmlns:a16="http://schemas.microsoft.com/office/drawing/2014/main" id="{130F8F63-1EB5-80E6-055C-E6563F5C505E}"/>
-                </a:ext>
-              </a:extLst>
-            </p:cNvPr>
-            <p:cNvSpPr/>
-            <p:nvPr/>
-          </p:nvSpPr>
-          <p:spPr>
-            <a:xfrm>
-              <a:off x="1402954" y="1830153"/>
-              <a:ext cx="7254087" cy="3197694"/>
-            </a:xfrm>
-            <a:prstGeom prst="rect">
-              <a:avLst/>
-            </a:prstGeom>
-            <a:noFill/>
-            <a:ln>
-              <a:prstDash val="sysDash"/>
-            </a:ln>
-          </p:spPr>
-          <p:style>
-            <a:lnRef idx="2">
-              <a:schemeClr val="accent1">
-                <a:shade val="50000"/>
-              </a:schemeClr>
-            </a:lnRef>
-            <a:fillRef idx="1">
-              <a:schemeClr val="accent1"/>
-            </a:fillRef>
-            <a:effectRef idx="0">
-              <a:schemeClr val="accent1"/>
-            </a:effectRef>
-            <a:fontRef idx="minor">
-              <a:schemeClr val="lt1"/>
-            </a:fontRef>
-          </p:style>
-          <p:txBody>
-            <a:bodyPr rtlCol="0" anchor="ctr"/>
-            <a:lstStyle/>
-            <a:p>
-              <a:pPr algn="ctr"/>
-              <a:endParaRPr lang="en-GB"/>
-            </a:p>
-          </p:txBody>
-        </p:sp>
-        <p:cxnSp>
-          <p:nvCxnSpPr>
-            <p:cNvPr id="37" name="Straight Arrow Connector 36">
-              <a:extLst>
-                <a:ext uri="{FF2B5EF4-FFF2-40B4-BE49-F238E27FC236}">
-                  <a16:creationId xmlns:a16="http://schemas.microsoft.com/office/drawing/2014/main" id="{44453B87-09FF-03B3-CF6A-91B3788DBC48}"/>
-                </a:ext>
-              </a:extLst>
-            </p:cNvPr>
-            <p:cNvCxnSpPr>
-              <a:cxnSpLocks/>
-              <a:endCxn id="36" idx="1"/>
-            </p:cNvCxnSpPr>
-            <p:nvPr/>
-          </p:nvCxnSpPr>
-          <p:spPr>
-            <a:xfrm>
-              <a:off x="434448" y="3429000"/>
-              <a:ext cx="968506" cy="0"/>
-            </a:xfrm>
-            <a:prstGeom prst="straightConnector1">
-              <a:avLst/>
-            </a:prstGeom>
-            <a:ln w="19050">
-              <a:solidFill>
-                <a:srgbClr val="003E74"/>
-              </a:solidFill>
-              <a:tailEnd type="triangle"/>
-            </a:ln>
-          </p:spPr>
-          <p:style>
-            <a:lnRef idx="1">
-              <a:schemeClr val="accent1"/>
-            </a:lnRef>
-            <a:fillRef idx="0">
-              <a:schemeClr val="accent1"/>
-            </a:fillRef>
-            <a:effectRef idx="0">
-              <a:schemeClr val="accent1"/>
-            </a:effectRef>
-            <a:fontRef idx="minor">
-              <a:schemeClr val="tx1"/>
-            </a:fontRef>
-          </p:style>
-        </p:cxnSp>
-        <p:cxnSp>
-          <p:nvCxnSpPr>
-            <p:cNvPr id="38" name="Straight Arrow Connector 37">
-              <a:extLst>
-                <a:ext uri="{FF2B5EF4-FFF2-40B4-BE49-F238E27FC236}">
-                  <a16:creationId xmlns:a16="http://schemas.microsoft.com/office/drawing/2014/main" id="{90D3181B-3415-3575-0DA1-FC1BA4DDC036}"/>
-                </a:ext>
-              </a:extLst>
-            </p:cNvPr>
-            <p:cNvCxnSpPr>
-              <a:cxnSpLocks/>
-              <a:stCxn id="36" idx="1"/>
-              <a:endCxn id="27" idx="1"/>
-            </p:cNvCxnSpPr>
-            <p:nvPr/>
-          </p:nvCxnSpPr>
-          <p:spPr>
-            <a:xfrm flipV="1">
-              <a:off x="1402954" y="2527620"/>
-              <a:ext cx="450087" cy="901380"/>
-            </a:xfrm>
-            <a:prstGeom prst="straightConnector1">
-              <a:avLst/>
-            </a:prstGeom>
-            <a:ln w="19050">
-              <a:solidFill>
-                <a:srgbClr val="003E74"/>
-              </a:solidFill>
-              <a:tailEnd type="triangle"/>
-            </a:ln>
-          </p:spPr>
-          <p:style>
-            <a:lnRef idx="1">
-              <a:schemeClr val="accent1"/>
-            </a:lnRef>
-            <a:fillRef idx="0">
-              <a:schemeClr val="accent1"/>
-            </a:fillRef>
-            <a:effectRef idx="0">
-              <a:schemeClr val="accent1"/>
-            </a:effectRef>
-            <a:fontRef idx="minor">
-              <a:schemeClr val="tx1"/>
-            </a:fontRef>
-          </p:style>
-        </p:cxnSp>
-        <p:cxnSp>
-          <p:nvCxnSpPr>
-            <p:cNvPr id="39" name="Straight Arrow Connector 38">
-              <a:extLst>
-                <a:ext uri="{FF2B5EF4-FFF2-40B4-BE49-F238E27FC236}">
-                  <a16:creationId xmlns:a16="http://schemas.microsoft.com/office/drawing/2014/main" id="{5A35F8B5-FE91-1873-E459-4F7C4BF7654E}"/>
-                </a:ext>
-              </a:extLst>
-            </p:cNvPr>
-            <p:cNvCxnSpPr>
-              <a:cxnSpLocks/>
-              <a:stCxn id="36" idx="1"/>
-              <a:endCxn id="28" idx="1"/>
-            </p:cNvCxnSpPr>
-            <p:nvPr/>
-          </p:nvCxnSpPr>
-          <p:spPr>
-            <a:xfrm>
-              <a:off x="1402954" y="3429000"/>
-              <a:ext cx="450087" cy="901382"/>
-            </a:xfrm>
-            <a:prstGeom prst="straightConnector1">
-              <a:avLst/>
-            </a:prstGeom>
-            <a:ln w="19050">
-              <a:solidFill>
-                <a:srgbClr val="003E74"/>
-              </a:solidFill>
-              <a:tailEnd type="triangle"/>
-            </a:ln>
-          </p:spPr>
-          <p:style>
-            <a:lnRef idx="1">
-              <a:schemeClr val="accent1"/>
-            </a:lnRef>
-            <a:fillRef idx="0">
-              <a:schemeClr val="accent1"/>
-            </a:fillRef>
-            <a:effectRef idx="0">
-              <a:schemeClr val="accent1"/>
-            </a:effectRef>
-            <a:fontRef idx="minor">
-              <a:schemeClr val="tx1"/>
-            </a:fontRef>
-          </p:style>
-        </p:cxnSp>
-        <p:cxnSp>
-          <p:nvCxnSpPr>
-            <p:cNvPr id="40" name="Straight Arrow Connector 39">
-              <a:extLst>
-                <a:ext uri="{FF2B5EF4-FFF2-40B4-BE49-F238E27FC236}">
-                  <a16:creationId xmlns:a16="http://schemas.microsoft.com/office/drawing/2014/main" id="{58845451-6324-B342-A292-95E320FC5857}"/>
-                </a:ext>
-              </a:extLst>
-            </p:cNvPr>
-            <p:cNvCxnSpPr>
-              <a:cxnSpLocks/>
-              <a:stCxn id="36" idx="3"/>
-            </p:cNvCxnSpPr>
-            <p:nvPr/>
-          </p:nvCxnSpPr>
-          <p:spPr>
-            <a:xfrm>
-              <a:off x="8657041" y="3429000"/>
-              <a:ext cx="898168" cy="0"/>
-            </a:xfrm>
-            <a:prstGeom prst="straightConnector1">
-              <a:avLst/>
-            </a:prstGeom>
-            <a:ln w="19050">
-              <a:solidFill>
-                <a:srgbClr val="003E74"/>
-              </a:solidFill>
-              <a:tailEnd type="triangle"/>
-            </a:ln>
-          </p:spPr>
-          <p:style>
-            <a:lnRef idx="1">
-              <a:schemeClr val="accent1"/>
-            </a:lnRef>
-            <a:fillRef idx="0">
-              <a:schemeClr val="accent1"/>
-            </a:fillRef>
-            <a:effectRef idx="0">
-              <a:schemeClr val="accent1"/>
-            </a:effectRef>
-            <a:fontRef idx="minor">
-              <a:schemeClr val="tx1"/>
-            </a:fontRef>
-          </p:style>
-        </p:cxnSp>
-        <p:cxnSp>
-          <p:nvCxnSpPr>
-            <p:cNvPr id="41" name="Straight Arrow Connector 40">
-              <a:extLst>
-                <a:ext uri="{FF2B5EF4-FFF2-40B4-BE49-F238E27FC236}">
-                  <a16:creationId xmlns:a16="http://schemas.microsoft.com/office/drawing/2014/main" id="{454F4CCE-5BB0-963A-7241-D6D46EB84C85}"/>
-                </a:ext>
-              </a:extLst>
-            </p:cNvPr>
-            <p:cNvCxnSpPr>
-              <a:cxnSpLocks/>
-              <a:stCxn id="30" idx="3"/>
-              <a:endCxn id="36" idx="3"/>
-            </p:cNvCxnSpPr>
-            <p:nvPr/>
-          </p:nvCxnSpPr>
-          <p:spPr>
-            <a:xfrm flipV="1">
-              <a:off x="8533834" y="3429000"/>
-              <a:ext cx="123207" cy="3937"/>
-            </a:xfrm>
-            <a:prstGeom prst="straightConnector1">
-              <a:avLst/>
-            </a:prstGeom>
-            <a:ln w="19050">
-              <a:solidFill>
-                <a:srgbClr val="003E74"/>
-              </a:solidFill>
-              <a:tailEnd type="triangle"/>
-            </a:ln>
-          </p:spPr>
-          <p:style>
-            <a:lnRef idx="1">
-              <a:schemeClr val="accent1"/>
-            </a:lnRef>
-            <a:fillRef idx="0">
-              <a:schemeClr val="accent1"/>
-            </a:fillRef>
-            <a:effectRef idx="0">
-              <a:schemeClr val="accent1"/>
-            </a:effectRef>
-            <a:fontRef idx="minor">
-              <a:schemeClr val="tx1"/>
-            </a:fontRef>
-          </p:style>
-        </p:cxnSp>
-        <p:sp>
-          <p:nvSpPr>
-            <p:cNvPr id="42" name="TextBox 41">
-              <a:extLst>
-                <a:ext uri="{FF2B5EF4-FFF2-40B4-BE49-F238E27FC236}">
-                  <a16:creationId xmlns:a16="http://schemas.microsoft.com/office/drawing/2014/main" id="{3C35F6AE-750C-7CA4-1AB5-622139528946}"/>
-                </a:ext>
-              </a:extLst>
-            </p:cNvPr>
-            <p:cNvSpPr txBox="1"/>
-            <p:nvPr/>
-          </p:nvSpPr>
-          <p:spPr>
-            <a:xfrm>
-              <a:off x="7750681" y="1825584"/>
-              <a:ext cx="867032" cy="369332"/>
-            </a:xfrm>
-            <a:prstGeom prst="rect">
-              <a:avLst/>
-            </a:prstGeom>
-            <a:noFill/>
-          </p:spPr>
-          <p:txBody>
-            <a:bodyPr wrap="none" rtlCol="0">
-              <a:spAutoFit/>
-            </a:bodyPr>
-            <a:lstStyle/>
-            <a:p>
-              <a:r>
-                <a:rPr lang="en-US" b="1" dirty="0">
-                  <a:solidFill>
-                    <a:srgbClr val="003E74"/>
-                  </a:solidFill>
-                </a:rPr>
-                <a:t>System</a:t>
-              </a:r>
-              <a:endParaRPr lang="en-GB" b="1" dirty="0">
-                <a:solidFill>
-                  <a:srgbClr val="003E74"/>
-                </a:solidFill>
-              </a:endParaRPr>
-            </a:p>
-          </p:txBody>
-        </p:sp>
-        <p:sp>
-          <p:nvSpPr>
-            <p:cNvPr id="43" name="TextBox 42">
-              <a:extLst>
-                <a:ext uri="{FF2B5EF4-FFF2-40B4-BE49-F238E27FC236}">
-                  <a16:creationId xmlns:a16="http://schemas.microsoft.com/office/drawing/2014/main" id="{31FFDAE2-811B-1083-BAC7-A9AF8475ABD9}"/>
-                </a:ext>
-              </a:extLst>
-            </p:cNvPr>
-            <p:cNvSpPr txBox="1"/>
-            <p:nvPr/>
-          </p:nvSpPr>
-          <p:spPr>
-            <a:xfrm>
-              <a:off x="416295" y="3105834"/>
-              <a:ext cx="1054776" cy="646331"/>
-            </a:xfrm>
-            <a:prstGeom prst="rect">
-              <a:avLst/>
-            </a:prstGeom>
-            <a:noFill/>
-          </p:spPr>
-          <p:txBody>
-            <a:bodyPr wrap="none" rtlCol="0">
-              <a:spAutoFit/>
-            </a:bodyPr>
-            <a:lstStyle/>
-            <a:p>
-              <a:r>
-                <a:rPr lang="en-US" b="1" dirty="0">
-                  <a:solidFill>
-                    <a:schemeClr val="accent2">
-                      <a:lumMod val="50000"/>
-                    </a:schemeClr>
-                  </a:solidFill>
-                </a:rPr>
-                <a:t>User’s </a:t>
-              </a:r>
-            </a:p>
-            <a:p>
-              <a:r>
-                <a:rPr lang="en-US" b="1" dirty="0">
-                  <a:solidFill>
-                    <a:schemeClr val="accent2">
-                      <a:lumMod val="50000"/>
-                    </a:schemeClr>
-                  </a:solidFill>
-                </a:rPr>
-                <a:t>Request</a:t>
-              </a:r>
-              <a:endParaRPr lang="en-GB" b="1" dirty="0">
-                <a:solidFill>
-                  <a:schemeClr val="accent2">
-                    <a:lumMod val="50000"/>
-                  </a:schemeClr>
-                </a:solidFill>
-              </a:endParaRPr>
-            </a:p>
-          </p:txBody>
-        </p:sp>
-        <p:sp>
-          <p:nvSpPr>
-            <p:cNvPr id="44" name="TextBox 43">
-              <a:extLst>
-                <a:ext uri="{FF2B5EF4-FFF2-40B4-BE49-F238E27FC236}">
-                  <a16:creationId xmlns:a16="http://schemas.microsoft.com/office/drawing/2014/main" id="{123F1C9B-9630-E8D2-B041-CC4E4F206CBD}"/>
-                </a:ext>
-              </a:extLst>
-            </p:cNvPr>
-            <p:cNvSpPr txBox="1"/>
-            <p:nvPr/>
-          </p:nvSpPr>
-          <p:spPr>
-            <a:xfrm>
-              <a:off x="8615366" y="3105833"/>
-              <a:ext cx="1135760" cy="646331"/>
-            </a:xfrm>
-            <a:prstGeom prst="rect">
-              <a:avLst/>
-            </a:prstGeom>
-            <a:noFill/>
-          </p:spPr>
-          <p:txBody>
-            <a:bodyPr wrap="none" rtlCol="0">
-              <a:spAutoFit/>
-            </a:bodyPr>
-            <a:lstStyle/>
-            <a:p>
-              <a:r>
-                <a:rPr lang="en-US" b="1" dirty="0">
-                  <a:solidFill>
-                    <a:schemeClr val="accent2">
-                      <a:lumMod val="50000"/>
-                    </a:schemeClr>
-                  </a:solidFill>
-                </a:rPr>
-                <a:t>System’s</a:t>
-              </a:r>
-            </a:p>
-            <a:p>
-              <a:r>
-                <a:rPr lang="en-US" b="1" dirty="0">
-                  <a:solidFill>
-                    <a:schemeClr val="accent2">
-                      <a:lumMod val="50000"/>
-                    </a:schemeClr>
-                  </a:solidFill>
-                </a:rPr>
-                <a:t>Outputs</a:t>
-              </a:r>
-              <a:endParaRPr lang="en-GB" b="1" dirty="0">
-                <a:solidFill>
-                  <a:schemeClr val="accent2">
-                    <a:lumMod val="50000"/>
-                  </a:schemeClr>
-                </a:solidFill>
-              </a:endParaRPr>
-            </a:p>
-          </p:txBody>
-        </p:sp>
-      </p:grpSp>
       <p:sp>
         <p:nvSpPr>
           <p:cNvPr id="45" name="Content Placeholder 2">
@@ -11615,138 +10685,1194 @@
           </a:p>
         </p:txBody>
       </p:sp>
-      <p:sp>
-        <p:nvSpPr>
-          <p:cNvPr id="46" name="TextBox 45">
-            <a:extLst>
-              <a:ext uri="{FF2B5EF4-FFF2-40B4-BE49-F238E27FC236}">
-                <a16:creationId xmlns:a16="http://schemas.microsoft.com/office/drawing/2014/main" id="{212BC486-E0F4-9056-BE27-A566097B4372}"/>
-              </a:ext>
-            </a:extLst>
-          </p:cNvPr>
-          <p:cNvSpPr txBox="1"/>
+      <p:grpSp>
+        <p:nvGrpSpPr>
+          <p:cNvPr id="4" name="Group 3">
+            <a:extLst>
+              <a:ext uri="{FF2B5EF4-FFF2-40B4-BE49-F238E27FC236}">
+                <a16:creationId xmlns:a16="http://schemas.microsoft.com/office/drawing/2014/main" id="{D3ABB530-A178-CC7D-C8F4-5415709E49A8}"/>
+              </a:ext>
+            </a:extLst>
+          </p:cNvPr>
+          <p:cNvGrpSpPr/>
           <p:nvPr/>
-        </p:nvSpPr>
-        <p:spPr>
-          <a:xfrm rot="2588457">
-            <a:off x="5285760" y="3701189"/>
-            <a:ext cx="1375889" cy="369332"/>
+        </p:nvGrpSpPr>
+        <p:grpSpPr>
+          <a:xfrm>
+            <a:off x="70008" y="2916960"/>
+            <a:ext cx="9334831" cy="3202263"/>
+            <a:chOff x="70008" y="2916960"/>
+            <a:chExt cx="9334831" cy="3202263"/>
           </a:xfrm>
-          <a:prstGeom prst="rect">
-            <a:avLst/>
-          </a:prstGeom>
-          <a:noFill/>
-        </p:spPr>
-        <p:txBody>
-          <a:bodyPr wrap="none" rtlCol="0">
-            <a:spAutoFit/>
-          </a:bodyPr>
-          <a:lstStyle/>
-          <a:p>
-            <a:r>
-              <a:rPr lang="en-US" dirty="0">
-                <a:solidFill>
-                  <a:srgbClr val="003E74"/>
-                </a:solidFill>
-              </a:rPr>
-              <a:t>&lt;prediction&gt;</a:t>
-            </a:r>
-            <a:endParaRPr lang="en-GB" dirty="0">
+        </p:grpSpPr>
+        <p:grpSp>
+          <p:nvGrpSpPr>
+            <p:cNvPr id="25" name="Group 24">
+              <a:extLst>
+                <a:ext uri="{FF2B5EF4-FFF2-40B4-BE49-F238E27FC236}">
+                  <a16:creationId xmlns:a16="http://schemas.microsoft.com/office/drawing/2014/main" id="{4A3674FC-01CE-CE1B-EC3E-EB71E73CE1B6}"/>
+                </a:ext>
+              </a:extLst>
+            </p:cNvPr>
+            <p:cNvGrpSpPr/>
+            <p:nvPr/>
+          </p:nvGrpSpPr>
+          <p:grpSpPr>
+            <a:xfrm>
+              <a:off x="70008" y="2916960"/>
+              <a:ext cx="9334831" cy="3202263"/>
+              <a:chOff x="416295" y="1825584"/>
+              <a:chExt cx="9334831" cy="3202263"/>
+            </a:xfrm>
+          </p:grpSpPr>
+          <p:sp>
+            <p:nvSpPr>
+              <p:cNvPr id="26" name="Rectangle 25">
+                <a:extLst>
+                  <a:ext uri="{FF2B5EF4-FFF2-40B4-BE49-F238E27FC236}">
+                    <a16:creationId xmlns:a16="http://schemas.microsoft.com/office/drawing/2014/main" id="{0D50BDF7-909A-0ABB-230C-10B6B1CC63BB}"/>
+                  </a:ext>
+                </a:extLst>
+              </p:cNvPr>
+              <p:cNvSpPr/>
+              <p:nvPr/>
+            </p:nvSpPr>
+            <p:spPr>
+              <a:xfrm>
+                <a:off x="4488390" y="2208390"/>
+                <a:ext cx="1347252" cy="638457"/>
+              </a:xfrm>
+              <a:prstGeom prst="rect">
+                <a:avLst/>
+              </a:prstGeom>
               <a:solidFill>
                 <a:srgbClr val="003E74"/>
               </a:solidFill>
-            </a:endParaRPr>
-          </a:p>
-        </p:txBody>
-      </p:sp>
-      <p:sp>
-        <p:nvSpPr>
-          <p:cNvPr id="47" name="TextBox 46">
-            <a:extLst>
-              <a:ext uri="{FF2B5EF4-FFF2-40B4-BE49-F238E27FC236}">
-                <a16:creationId xmlns:a16="http://schemas.microsoft.com/office/drawing/2014/main" id="{AF2DDE43-17CB-C81C-1E72-0ED9DCE14DD3}"/>
-              </a:ext>
-            </a:extLst>
-          </p:cNvPr>
-          <p:cNvSpPr txBox="1"/>
-          <p:nvPr/>
-        </p:nvSpPr>
-        <p:spPr>
-          <a:xfrm>
-            <a:off x="3092348" y="3274715"/>
-            <a:ext cx="1000595" cy="369332"/>
-          </a:xfrm>
-          <a:prstGeom prst="rect">
-            <a:avLst/>
-          </a:prstGeom>
-          <a:noFill/>
-        </p:spPr>
-        <p:txBody>
-          <a:bodyPr wrap="none" rtlCol="0">
-            <a:spAutoFit/>
-          </a:bodyPr>
-          <a:lstStyle/>
-          <a:p>
-            <a:r>
-              <a:rPr lang="en-US" dirty="0">
+              <a:ln>
                 <a:solidFill>
                   <a:srgbClr val="003E74"/>
                 </a:solidFill>
-              </a:rPr>
-              <a:t>&lt;inputs&gt;</a:t>
-            </a:r>
-            <a:endParaRPr lang="en-GB" dirty="0">
+              </a:ln>
+            </p:spPr>
+            <p:style>
+              <a:lnRef idx="2">
+                <a:schemeClr val="accent1">
+                  <a:shade val="50000"/>
+                </a:schemeClr>
+              </a:lnRef>
+              <a:fillRef idx="1">
+                <a:schemeClr val="accent1"/>
+              </a:fillRef>
+              <a:effectRef idx="0">
+                <a:schemeClr val="accent1"/>
+              </a:effectRef>
+              <a:fontRef idx="minor">
+                <a:schemeClr val="lt1"/>
+              </a:fontRef>
+            </p:style>
+            <p:txBody>
+              <a:bodyPr rtlCol="0" anchor="ctr"/>
+              <a:lstStyle/>
+              <a:p>
+                <a:pPr algn="ctr"/>
+                <a:r>
+                  <a:rPr lang="en-US" b="1" dirty="0">
+                    <a:solidFill>
+                      <a:schemeClr val="bg1"/>
+                    </a:solidFill>
+                  </a:rPr>
+                  <a:t>Learning Model</a:t>
+                </a:r>
+                <a:endParaRPr lang="en-GB" b="1" dirty="0">
+                  <a:solidFill>
+                    <a:schemeClr val="bg1"/>
+                  </a:solidFill>
+                </a:endParaRPr>
+              </a:p>
+            </p:txBody>
+          </p:sp>
+          <p:sp>
+            <p:nvSpPr>
+              <p:cNvPr id="27" name="Rectangle 26">
+                <a:extLst>
+                  <a:ext uri="{FF2B5EF4-FFF2-40B4-BE49-F238E27FC236}">
+                    <a16:creationId xmlns:a16="http://schemas.microsoft.com/office/drawing/2014/main" id="{E8BA2F2B-DEB0-5CC5-ED41-5FABC2F84840}"/>
+                  </a:ext>
+                </a:extLst>
+              </p:cNvPr>
+              <p:cNvSpPr/>
+              <p:nvPr/>
+            </p:nvSpPr>
+            <p:spPr>
+              <a:xfrm>
+                <a:off x="1853041" y="2208391"/>
+                <a:ext cx="1585593" cy="638457"/>
+              </a:xfrm>
+              <a:prstGeom prst="rect">
+                <a:avLst/>
+              </a:prstGeom>
               <a:solidFill>
-                <a:srgbClr val="003E74"/>
+                <a:schemeClr val="accent2">
+                  <a:lumMod val="40000"/>
+                  <a:lumOff val="60000"/>
+                </a:schemeClr>
               </a:solidFill>
-            </a:endParaRPr>
-          </a:p>
-        </p:txBody>
-      </p:sp>
-      <p:sp>
-        <p:nvSpPr>
-          <p:cNvPr id="48" name="TextBox 47">
-            <a:extLst>
-              <a:ext uri="{FF2B5EF4-FFF2-40B4-BE49-F238E27FC236}">
-                <a16:creationId xmlns:a16="http://schemas.microsoft.com/office/drawing/2014/main" id="{D6EBC6B5-5269-3520-F568-DABD8316DF1F}"/>
-              </a:ext>
-            </a:extLst>
-          </p:cNvPr>
-          <p:cNvSpPr txBox="1"/>
-          <p:nvPr/>
-        </p:nvSpPr>
-        <p:spPr>
-          <a:xfrm rot="18213921">
-            <a:off x="2978166" y="4176096"/>
-            <a:ext cx="1000595" cy="369332"/>
-          </a:xfrm>
-          <a:prstGeom prst="rect">
-            <a:avLst/>
-          </a:prstGeom>
-          <a:noFill/>
-        </p:spPr>
-        <p:txBody>
-          <a:bodyPr wrap="none" rtlCol="0">
-            <a:spAutoFit/>
-          </a:bodyPr>
-          <a:lstStyle/>
-          <a:p>
-            <a:r>
-              <a:rPr lang="en-US" dirty="0">
+              <a:ln>
                 <a:solidFill>
                   <a:srgbClr val="003E74"/>
                 </a:solidFill>
-              </a:rPr>
-              <a:t>&lt;inputs&gt;</a:t>
-            </a:r>
-            <a:endParaRPr lang="en-GB" dirty="0">
+              </a:ln>
+            </p:spPr>
+            <p:style>
+              <a:lnRef idx="2">
+                <a:schemeClr val="accent1">
+                  <a:shade val="50000"/>
+                </a:schemeClr>
+              </a:lnRef>
+              <a:fillRef idx="1">
+                <a:schemeClr val="accent1"/>
+              </a:fillRef>
+              <a:effectRef idx="0">
+                <a:schemeClr val="accent1"/>
+              </a:effectRef>
+              <a:fontRef idx="minor">
+                <a:schemeClr val="lt1"/>
+              </a:fontRef>
+            </p:style>
+            <p:txBody>
+              <a:bodyPr rtlCol="0" anchor="ctr"/>
+              <a:lstStyle/>
+              <a:p>
+                <a:pPr algn="ctr"/>
+                <a:r>
+                  <a:rPr lang="en-US" b="1" dirty="0">
+                    <a:solidFill>
+                      <a:srgbClr val="003E74"/>
+                    </a:solidFill>
+                  </a:rPr>
+                  <a:t>Component 1</a:t>
+                </a:r>
+                <a:endParaRPr lang="en-GB" b="1" dirty="0">
+                  <a:solidFill>
+                    <a:srgbClr val="003E74"/>
+                  </a:solidFill>
+                </a:endParaRPr>
+              </a:p>
+            </p:txBody>
+          </p:sp>
+          <p:sp>
+            <p:nvSpPr>
+              <p:cNvPr id="28" name="Rectangle 27">
+                <a:extLst>
+                  <a:ext uri="{FF2B5EF4-FFF2-40B4-BE49-F238E27FC236}">
+                    <a16:creationId xmlns:a16="http://schemas.microsoft.com/office/drawing/2014/main" id="{DA4C6194-8325-B76D-B7EF-B6605079FE9B}"/>
+                  </a:ext>
+                </a:extLst>
+              </p:cNvPr>
+              <p:cNvSpPr/>
+              <p:nvPr/>
+            </p:nvSpPr>
+            <p:spPr>
+              <a:xfrm>
+                <a:off x="1853041" y="4011153"/>
+                <a:ext cx="1585593" cy="638457"/>
+              </a:xfrm>
+              <a:prstGeom prst="rect">
+                <a:avLst/>
+              </a:prstGeom>
               <a:solidFill>
-                <a:srgbClr val="003E74"/>
+                <a:schemeClr val="accent2">
+                  <a:lumMod val="40000"/>
+                  <a:lumOff val="60000"/>
+                </a:schemeClr>
               </a:solidFill>
-            </a:endParaRPr>
-          </a:p>
-        </p:txBody>
-      </p:sp>
+              <a:ln>
+                <a:solidFill>
+                  <a:srgbClr val="003E74"/>
+                </a:solidFill>
+              </a:ln>
+            </p:spPr>
+            <p:style>
+              <a:lnRef idx="2">
+                <a:schemeClr val="accent1">
+                  <a:shade val="50000"/>
+                </a:schemeClr>
+              </a:lnRef>
+              <a:fillRef idx="1">
+                <a:schemeClr val="accent1"/>
+              </a:fillRef>
+              <a:effectRef idx="0">
+                <a:schemeClr val="accent1"/>
+              </a:effectRef>
+              <a:fontRef idx="minor">
+                <a:schemeClr val="lt1"/>
+              </a:fontRef>
+            </p:style>
+            <p:txBody>
+              <a:bodyPr rtlCol="0" anchor="ctr"/>
+              <a:lstStyle/>
+              <a:p>
+                <a:pPr algn="ctr"/>
+                <a:r>
+                  <a:rPr lang="en-US" b="1" dirty="0">
+                    <a:solidFill>
+                      <a:srgbClr val="003E74"/>
+                    </a:solidFill>
+                  </a:rPr>
+                  <a:t>Component 2</a:t>
+                </a:r>
+                <a:endParaRPr lang="en-GB" b="1" dirty="0">
+                  <a:solidFill>
+                    <a:srgbClr val="003E74"/>
+                  </a:solidFill>
+                </a:endParaRPr>
+              </a:p>
+            </p:txBody>
+          </p:sp>
+          <p:sp>
+            <p:nvSpPr>
+              <p:cNvPr id="29" name="Rectangle 28">
+                <a:extLst>
+                  <a:ext uri="{FF2B5EF4-FFF2-40B4-BE49-F238E27FC236}">
+                    <a16:creationId xmlns:a16="http://schemas.microsoft.com/office/drawing/2014/main" id="{ED7D3463-7DD0-CD84-B2B5-568AFEBE8075}"/>
+                  </a:ext>
+                </a:extLst>
+              </p:cNvPr>
+              <p:cNvSpPr/>
+              <p:nvPr/>
+            </p:nvSpPr>
+            <p:spPr>
+              <a:xfrm>
+                <a:off x="4468653" y="4011154"/>
+                <a:ext cx="1653876" cy="638457"/>
+              </a:xfrm>
+              <a:prstGeom prst="rect">
+                <a:avLst/>
+              </a:prstGeom>
+              <a:solidFill>
+                <a:schemeClr val="accent2">
+                  <a:lumMod val="40000"/>
+                  <a:lumOff val="60000"/>
+                </a:schemeClr>
+              </a:solidFill>
+              <a:ln>
+                <a:solidFill>
+                  <a:srgbClr val="003E74"/>
+                </a:solidFill>
+              </a:ln>
+            </p:spPr>
+            <p:style>
+              <a:lnRef idx="2">
+                <a:schemeClr val="accent1">
+                  <a:shade val="50000"/>
+                </a:schemeClr>
+              </a:lnRef>
+              <a:fillRef idx="1">
+                <a:schemeClr val="accent1"/>
+              </a:fillRef>
+              <a:effectRef idx="0">
+                <a:schemeClr val="accent1"/>
+              </a:effectRef>
+              <a:fontRef idx="minor">
+                <a:schemeClr val="lt1"/>
+              </a:fontRef>
+            </p:style>
+            <p:txBody>
+              <a:bodyPr rtlCol="0" anchor="ctr"/>
+              <a:lstStyle/>
+              <a:p>
+                <a:pPr algn="ctr"/>
+                <a:r>
+                  <a:rPr lang="en-US" b="1" dirty="0">
+                    <a:solidFill>
+                      <a:srgbClr val="003E74"/>
+                    </a:solidFill>
+                  </a:rPr>
+                  <a:t>Component 3</a:t>
+                </a:r>
+                <a:endParaRPr lang="en-GB" b="1" dirty="0">
+                  <a:solidFill>
+                    <a:srgbClr val="003E74"/>
+                  </a:solidFill>
+                </a:endParaRPr>
+              </a:p>
+            </p:txBody>
+          </p:sp>
+          <p:sp>
+            <p:nvSpPr>
+              <p:cNvPr id="30" name="Rectangle 29">
+                <a:extLst>
+                  <a:ext uri="{FF2B5EF4-FFF2-40B4-BE49-F238E27FC236}">
+                    <a16:creationId xmlns:a16="http://schemas.microsoft.com/office/drawing/2014/main" id="{35D76BDD-9163-8AE0-2AE5-56BCB681EB63}"/>
+                  </a:ext>
+                </a:extLst>
+              </p:cNvPr>
+              <p:cNvSpPr/>
+              <p:nvPr/>
+            </p:nvSpPr>
+            <p:spPr>
+              <a:xfrm>
+                <a:off x="6879958" y="3113708"/>
+                <a:ext cx="1653876" cy="638457"/>
+              </a:xfrm>
+              <a:prstGeom prst="rect">
+                <a:avLst/>
+              </a:prstGeom>
+              <a:solidFill>
+                <a:schemeClr val="accent2">
+                  <a:lumMod val="40000"/>
+                  <a:lumOff val="60000"/>
+                </a:schemeClr>
+              </a:solidFill>
+              <a:ln>
+                <a:solidFill>
+                  <a:srgbClr val="003E74"/>
+                </a:solidFill>
+              </a:ln>
+            </p:spPr>
+            <p:style>
+              <a:lnRef idx="2">
+                <a:schemeClr val="accent1">
+                  <a:shade val="50000"/>
+                </a:schemeClr>
+              </a:lnRef>
+              <a:fillRef idx="1">
+                <a:schemeClr val="accent1"/>
+              </a:fillRef>
+              <a:effectRef idx="0">
+                <a:schemeClr val="accent1"/>
+              </a:effectRef>
+              <a:fontRef idx="minor">
+                <a:schemeClr val="lt1"/>
+              </a:fontRef>
+            </p:style>
+            <p:txBody>
+              <a:bodyPr rtlCol="0" anchor="ctr"/>
+              <a:lstStyle/>
+              <a:p>
+                <a:pPr algn="ctr"/>
+                <a:r>
+                  <a:rPr lang="en-US" b="1" dirty="0">
+                    <a:solidFill>
+                      <a:srgbClr val="003E74"/>
+                    </a:solidFill>
+                  </a:rPr>
+                  <a:t>Component 4</a:t>
+                </a:r>
+                <a:endParaRPr lang="en-GB" b="1" dirty="0">
+                  <a:solidFill>
+                    <a:srgbClr val="003E74"/>
+                  </a:solidFill>
+                </a:endParaRPr>
+              </a:p>
+            </p:txBody>
+          </p:sp>
+          <p:cxnSp>
+            <p:nvCxnSpPr>
+              <p:cNvPr id="31" name="Straight Arrow Connector 30">
+                <a:extLst>
+                  <a:ext uri="{FF2B5EF4-FFF2-40B4-BE49-F238E27FC236}">
+                    <a16:creationId xmlns:a16="http://schemas.microsoft.com/office/drawing/2014/main" id="{DB759732-91D2-15C8-6026-B79AEDF38C70}"/>
+                  </a:ext>
+                </a:extLst>
+              </p:cNvPr>
+              <p:cNvCxnSpPr>
+                <a:cxnSpLocks/>
+                <a:stCxn id="27" idx="3"/>
+                <a:endCxn id="26" idx="1"/>
+              </p:cNvCxnSpPr>
+              <p:nvPr/>
+            </p:nvCxnSpPr>
+            <p:spPr>
+              <a:xfrm flipV="1">
+                <a:off x="3438634" y="2527619"/>
+                <a:ext cx="1049756" cy="1"/>
+              </a:xfrm>
+              <a:prstGeom prst="straightConnector1">
+                <a:avLst/>
+              </a:prstGeom>
+              <a:ln w="19050">
+                <a:solidFill>
+                  <a:srgbClr val="003E74"/>
+                </a:solidFill>
+                <a:tailEnd type="triangle"/>
+              </a:ln>
+            </p:spPr>
+            <p:style>
+              <a:lnRef idx="1">
+                <a:schemeClr val="accent1"/>
+              </a:lnRef>
+              <a:fillRef idx="0">
+                <a:schemeClr val="accent1"/>
+              </a:fillRef>
+              <a:effectRef idx="0">
+                <a:schemeClr val="accent1"/>
+              </a:effectRef>
+              <a:fontRef idx="minor">
+                <a:schemeClr val="tx1"/>
+              </a:fontRef>
+            </p:style>
+          </p:cxnSp>
+          <p:cxnSp>
+            <p:nvCxnSpPr>
+              <p:cNvPr id="32" name="Straight Arrow Connector 31">
+                <a:extLst>
+                  <a:ext uri="{FF2B5EF4-FFF2-40B4-BE49-F238E27FC236}">
+                    <a16:creationId xmlns:a16="http://schemas.microsoft.com/office/drawing/2014/main" id="{C165BB7A-2111-36AE-BB38-ED333D09D94A}"/>
+                  </a:ext>
+                </a:extLst>
+              </p:cNvPr>
+              <p:cNvCxnSpPr>
+                <a:cxnSpLocks/>
+                <a:stCxn id="28" idx="3"/>
+                <a:endCxn id="26" idx="1"/>
+              </p:cNvCxnSpPr>
+              <p:nvPr/>
+            </p:nvCxnSpPr>
+            <p:spPr>
+              <a:xfrm flipV="1">
+                <a:off x="3438634" y="2527619"/>
+                <a:ext cx="1049756" cy="1802763"/>
+              </a:xfrm>
+              <a:prstGeom prst="straightConnector1">
+                <a:avLst/>
+              </a:prstGeom>
+              <a:ln w="19050">
+                <a:solidFill>
+                  <a:srgbClr val="003E74"/>
+                </a:solidFill>
+                <a:tailEnd type="triangle"/>
+              </a:ln>
+            </p:spPr>
+            <p:style>
+              <a:lnRef idx="1">
+                <a:schemeClr val="accent1"/>
+              </a:lnRef>
+              <a:fillRef idx="0">
+                <a:schemeClr val="accent1"/>
+              </a:fillRef>
+              <a:effectRef idx="0">
+                <a:schemeClr val="accent1"/>
+              </a:effectRef>
+              <a:fontRef idx="minor">
+                <a:schemeClr val="tx1"/>
+              </a:fontRef>
+            </p:style>
+          </p:cxnSp>
+          <p:cxnSp>
+            <p:nvCxnSpPr>
+              <p:cNvPr id="33" name="Straight Arrow Connector 32">
+                <a:extLst>
+                  <a:ext uri="{FF2B5EF4-FFF2-40B4-BE49-F238E27FC236}">
+                    <a16:creationId xmlns:a16="http://schemas.microsoft.com/office/drawing/2014/main" id="{FAE19ACB-84A5-E1F2-5F52-F6D8D57F5400}"/>
+                  </a:ext>
+                </a:extLst>
+              </p:cNvPr>
+              <p:cNvCxnSpPr>
+                <a:cxnSpLocks/>
+                <a:stCxn id="28" idx="3"/>
+                <a:endCxn id="29" idx="1"/>
+              </p:cNvCxnSpPr>
+              <p:nvPr/>
+            </p:nvCxnSpPr>
+            <p:spPr>
+              <a:xfrm>
+                <a:off x="3438634" y="4330382"/>
+                <a:ext cx="1030019" cy="1"/>
+              </a:xfrm>
+              <a:prstGeom prst="straightConnector1">
+                <a:avLst/>
+              </a:prstGeom>
+              <a:ln w="19050">
+                <a:solidFill>
+                  <a:srgbClr val="003E74"/>
+                </a:solidFill>
+                <a:tailEnd type="triangle"/>
+              </a:ln>
+            </p:spPr>
+            <p:style>
+              <a:lnRef idx="1">
+                <a:schemeClr val="accent1"/>
+              </a:lnRef>
+              <a:fillRef idx="0">
+                <a:schemeClr val="accent1"/>
+              </a:fillRef>
+              <a:effectRef idx="0">
+                <a:schemeClr val="accent1"/>
+              </a:effectRef>
+              <a:fontRef idx="minor">
+                <a:schemeClr val="tx1"/>
+              </a:fontRef>
+            </p:style>
+          </p:cxnSp>
+          <p:cxnSp>
+            <p:nvCxnSpPr>
+              <p:cNvPr id="34" name="Straight Arrow Connector 33">
+                <a:extLst>
+                  <a:ext uri="{FF2B5EF4-FFF2-40B4-BE49-F238E27FC236}">
+                    <a16:creationId xmlns:a16="http://schemas.microsoft.com/office/drawing/2014/main" id="{2F7C922F-E6B5-10CA-30DC-1BAFFEF39E98}"/>
+                  </a:ext>
+                </a:extLst>
+              </p:cNvPr>
+              <p:cNvCxnSpPr>
+                <a:cxnSpLocks/>
+                <a:stCxn id="26" idx="3"/>
+                <a:endCxn id="30" idx="1"/>
+              </p:cNvCxnSpPr>
+              <p:nvPr/>
+            </p:nvCxnSpPr>
+            <p:spPr>
+              <a:xfrm>
+                <a:off x="5835642" y="2527619"/>
+                <a:ext cx="1044316" cy="905318"/>
+              </a:xfrm>
+              <a:prstGeom prst="straightConnector1">
+                <a:avLst/>
+              </a:prstGeom>
+              <a:ln w="19050">
+                <a:solidFill>
+                  <a:srgbClr val="003E74"/>
+                </a:solidFill>
+                <a:tailEnd type="triangle"/>
+              </a:ln>
+            </p:spPr>
+            <p:style>
+              <a:lnRef idx="1">
+                <a:schemeClr val="accent1"/>
+              </a:lnRef>
+              <a:fillRef idx="0">
+                <a:schemeClr val="accent1"/>
+              </a:fillRef>
+              <a:effectRef idx="0">
+                <a:schemeClr val="accent1"/>
+              </a:effectRef>
+              <a:fontRef idx="minor">
+                <a:schemeClr val="tx1"/>
+              </a:fontRef>
+            </p:style>
+          </p:cxnSp>
+          <p:cxnSp>
+            <p:nvCxnSpPr>
+              <p:cNvPr id="35" name="Straight Arrow Connector 34">
+                <a:extLst>
+                  <a:ext uri="{FF2B5EF4-FFF2-40B4-BE49-F238E27FC236}">
+                    <a16:creationId xmlns:a16="http://schemas.microsoft.com/office/drawing/2014/main" id="{FA6B6FFB-79B5-CA62-55EA-B543836FCED4}"/>
+                  </a:ext>
+                </a:extLst>
+              </p:cNvPr>
+              <p:cNvCxnSpPr>
+                <a:cxnSpLocks/>
+                <a:stCxn id="29" idx="3"/>
+                <a:endCxn id="30" idx="1"/>
+              </p:cNvCxnSpPr>
+              <p:nvPr/>
+            </p:nvCxnSpPr>
+            <p:spPr>
+              <a:xfrm flipV="1">
+                <a:off x="6122529" y="3432937"/>
+                <a:ext cx="757429" cy="897446"/>
+              </a:xfrm>
+              <a:prstGeom prst="straightConnector1">
+                <a:avLst/>
+              </a:prstGeom>
+              <a:ln w="19050">
+                <a:solidFill>
+                  <a:srgbClr val="003E74"/>
+                </a:solidFill>
+                <a:tailEnd type="triangle"/>
+              </a:ln>
+            </p:spPr>
+            <p:style>
+              <a:lnRef idx="1">
+                <a:schemeClr val="accent1"/>
+              </a:lnRef>
+              <a:fillRef idx="0">
+                <a:schemeClr val="accent1"/>
+              </a:fillRef>
+              <a:effectRef idx="0">
+                <a:schemeClr val="accent1"/>
+              </a:effectRef>
+              <a:fontRef idx="minor">
+                <a:schemeClr val="tx1"/>
+              </a:fontRef>
+            </p:style>
+          </p:cxnSp>
+          <p:sp>
+            <p:nvSpPr>
+              <p:cNvPr id="36" name="Rectangle 35">
+                <a:extLst>
+                  <a:ext uri="{FF2B5EF4-FFF2-40B4-BE49-F238E27FC236}">
+                    <a16:creationId xmlns:a16="http://schemas.microsoft.com/office/drawing/2014/main" id="{130F8F63-1EB5-80E6-055C-E6563F5C505E}"/>
+                  </a:ext>
+                </a:extLst>
+              </p:cNvPr>
+              <p:cNvSpPr/>
+              <p:nvPr/>
+            </p:nvSpPr>
+            <p:spPr>
+              <a:xfrm>
+                <a:off x="1402954" y="1830153"/>
+                <a:ext cx="7254087" cy="3197694"/>
+              </a:xfrm>
+              <a:prstGeom prst="rect">
+                <a:avLst/>
+              </a:prstGeom>
+              <a:noFill/>
+              <a:ln>
+                <a:prstDash val="sysDash"/>
+              </a:ln>
+            </p:spPr>
+            <p:style>
+              <a:lnRef idx="2">
+                <a:schemeClr val="accent1">
+                  <a:shade val="50000"/>
+                </a:schemeClr>
+              </a:lnRef>
+              <a:fillRef idx="1">
+                <a:schemeClr val="accent1"/>
+              </a:fillRef>
+              <a:effectRef idx="0">
+                <a:schemeClr val="accent1"/>
+              </a:effectRef>
+              <a:fontRef idx="minor">
+                <a:schemeClr val="lt1"/>
+              </a:fontRef>
+            </p:style>
+            <p:txBody>
+              <a:bodyPr rtlCol="0" anchor="ctr"/>
+              <a:lstStyle/>
+              <a:p>
+                <a:pPr algn="ctr"/>
+                <a:endParaRPr lang="en-GB"/>
+              </a:p>
+            </p:txBody>
+          </p:sp>
+          <p:cxnSp>
+            <p:nvCxnSpPr>
+              <p:cNvPr id="37" name="Straight Arrow Connector 36">
+                <a:extLst>
+                  <a:ext uri="{FF2B5EF4-FFF2-40B4-BE49-F238E27FC236}">
+                    <a16:creationId xmlns:a16="http://schemas.microsoft.com/office/drawing/2014/main" id="{44453B87-09FF-03B3-CF6A-91B3788DBC48}"/>
+                  </a:ext>
+                </a:extLst>
+              </p:cNvPr>
+              <p:cNvCxnSpPr>
+                <a:cxnSpLocks/>
+                <a:endCxn id="36" idx="1"/>
+              </p:cNvCxnSpPr>
+              <p:nvPr/>
+            </p:nvCxnSpPr>
+            <p:spPr>
+              <a:xfrm>
+                <a:off x="434448" y="3429000"/>
+                <a:ext cx="968506" cy="0"/>
+              </a:xfrm>
+              <a:prstGeom prst="straightConnector1">
+                <a:avLst/>
+              </a:prstGeom>
+              <a:ln w="19050">
+                <a:solidFill>
+                  <a:srgbClr val="003E74"/>
+                </a:solidFill>
+                <a:tailEnd type="triangle"/>
+              </a:ln>
+            </p:spPr>
+            <p:style>
+              <a:lnRef idx="1">
+                <a:schemeClr val="accent1"/>
+              </a:lnRef>
+              <a:fillRef idx="0">
+                <a:schemeClr val="accent1"/>
+              </a:fillRef>
+              <a:effectRef idx="0">
+                <a:schemeClr val="accent1"/>
+              </a:effectRef>
+              <a:fontRef idx="minor">
+                <a:schemeClr val="tx1"/>
+              </a:fontRef>
+            </p:style>
+          </p:cxnSp>
+          <p:cxnSp>
+            <p:nvCxnSpPr>
+              <p:cNvPr id="38" name="Straight Arrow Connector 37">
+                <a:extLst>
+                  <a:ext uri="{FF2B5EF4-FFF2-40B4-BE49-F238E27FC236}">
+                    <a16:creationId xmlns:a16="http://schemas.microsoft.com/office/drawing/2014/main" id="{90D3181B-3415-3575-0DA1-FC1BA4DDC036}"/>
+                  </a:ext>
+                </a:extLst>
+              </p:cNvPr>
+              <p:cNvCxnSpPr>
+                <a:cxnSpLocks/>
+                <a:stCxn id="36" idx="1"/>
+                <a:endCxn id="27" idx="1"/>
+              </p:cNvCxnSpPr>
+              <p:nvPr/>
+            </p:nvCxnSpPr>
+            <p:spPr>
+              <a:xfrm flipV="1">
+                <a:off x="1402954" y="2527620"/>
+                <a:ext cx="450087" cy="901380"/>
+              </a:xfrm>
+              <a:prstGeom prst="straightConnector1">
+                <a:avLst/>
+              </a:prstGeom>
+              <a:ln w="19050">
+                <a:solidFill>
+                  <a:srgbClr val="003E74"/>
+                </a:solidFill>
+                <a:tailEnd type="triangle"/>
+              </a:ln>
+            </p:spPr>
+            <p:style>
+              <a:lnRef idx="1">
+                <a:schemeClr val="accent1"/>
+              </a:lnRef>
+              <a:fillRef idx="0">
+                <a:schemeClr val="accent1"/>
+              </a:fillRef>
+              <a:effectRef idx="0">
+                <a:schemeClr val="accent1"/>
+              </a:effectRef>
+              <a:fontRef idx="minor">
+                <a:schemeClr val="tx1"/>
+              </a:fontRef>
+            </p:style>
+          </p:cxnSp>
+          <p:cxnSp>
+            <p:nvCxnSpPr>
+              <p:cNvPr id="39" name="Straight Arrow Connector 38">
+                <a:extLst>
+                  <a:ext uri="{FF2B5EF4-FFF2-40B4-BE49-F238E27FC236}">
+                    <a16:creationId xmlns:a16="http://schemas.microsoft.com/office/drawing/2014/main" id="{5A35F8B5-FE91-1873-E459-4F7C4BF7654E}"/>
+                  </a:ext>
+                </a:extLst>
+              </p:cNvPr>
+              <p:cNvCxnSpPr>
+                <a:cxnSpLocks/>
+                <a:stCxn id="36" idx="1"/>
+                <a:endCxn id="28" idx="1"/>
+              </p:cNvCxnSpPr>
+              <p:nvPr/>
+            </p:nvCxnSpPr>
+            <p:spPr>
+              <a:xfrm>
+                <a:off x="1402954" y="3429000"/>
+                <a:ext cx="450087" cy="901382"/>
+              </a:xfrm>
+              <a:prstGeom prst="straightConnector1">
+                <a:avLst/>
+              </a:prstGeom>
+              <a:ln w="19050">
+                <a:solidFill>
+                  <a:srgbClr val="003E74"/>
+                </a:solidFill>
+                <a:tailEnd type="triangle"/>
+              </a:ln>
+            </p:spPr>
+            <p:style>
+              <a:lnRef idx="1">
+                <a:schemeClr val="accent1"/>
+              </a:lnRef>
+              <a:fillRef idx="0">
+                <a:schemeClr val="accent1"/>
+              </a:fillRef>
+              <a:effectRef idx="0">
+                <a:schemeClr val="accent1"/>
+              </a:effectRef>
+              <a:fontRef idx="minor">
+                <a:schemeClr val="tx1"/>
+              </a:fontRef>
+            </p:style>
+          </p:cxnSp>
+          <p:cxnSp>
+            <p:nvCxnSpPr>
+              <p:cNvPr id="40" name="Straight Arrow Connector 39">
+                <a:extLst>
+                  <a:ext uri="{FF2B5EF4-FFF2-40B4-BE49-F238E27FC236}">
+                    <a16:creationId xmlns:a16="http://schemas.microsoft.com/office/drawing/2014/main" id="{58845451-6324-B342-A292-95E320FC5857}"/>
+                  </a:ext>
+                </a:extLst>
+              </p:cNvPr>
+              <p:cNvCxnSpPr>
+                <a:cxnSpLocks/>
+                <a:stCxn id="36" idx="3"/>
+              </p:cNvCxnSpPr>
+              <p:nvPr/>
+            </p:nvCxnSpPr>
+            <p:spPr>
+              <a:xfrm>
+                <a:off x="8657041" y="3429000"/>
+                <a:ext cx="898168" cy="0"/>
+              </a:xfrm>
+              <a:prstGeom prst="straightConnector1">
+                <a:avLst/>
+              </a:prstGeom>
+              <a:ln w="19050">
+                <a:solidFill>
+                  <a:srgbClr val="003E74"/>
+                </a:solidFill>
+                <a:tailEnd type="triangle"/>
+              </a:ln>
+            </p:spPr>
+            <p:style>
+              <a:lnRef idx="1">
+                <a:schemeClr val="accent1"/>
+              </a:lnRef>
+              <a:fillRef idx="0">
+                <a:schemeClr val="accent1"/>
+              </a:fillRef>
+              <a:effectRef idx="0">
+                <a:schemeClr val="accent1"/>
+              </a:effectRef>
+              <a:fontRef idx="minor">
+                <a:schemeClr val="tx1"/>
+              </a:fontRef>
+            </p:style>
+          </p:cxnSp>
+          <p:cxnSp>
+            <p:nvCxnSpPr>
+              <p:cNvPr id="41" name="Straight Arrow Connector 40">
+                <a:extLst>
+                  <a:ext uri="{FF2B5EF4-FFF2-40B4-BE49-F238E27FC236}">
+                    <a16:creationId xmlns:a16="http://schemas.microsoft.com/office/drawing/2014/main" id="{454F4CCE-5BB0-963A-7241-D6D46EB84C85}"/>
+                  </a:ext>
+                </a:extLst>
+              </p:cNvPr>
+              <p:cNvCxnSpPr>
+                <a:cxnSpLocks/>
+                <a:stCxn id="30" idx="3"/>
+                <a:endCxn id="36" idx="3"/>
+              </p:cNvCxnSpPr>
+              <p:nvPr/>
+            </p:nvCxnSpPr>
+            <p:spPr>
+              <a:xfrm flipV="1">
+                <a:off x="8533834" y="3429000"/>
+                <a:ext cx="123207" cy="3937"/>
+              </a:xfrm>
+              <a:prstGeom prst="straightConnector1">
+                <a:avLst/>
+              </a:prstGeom>
+              <a:ln w="19050">
+                <a:solidFill>
+                  <a:srgbClr val="003E74"/>
+                </a:solidFill>
+                <a:tailEnd type="triangle"/>
+              </a:ln>
+            </p:spPr>
+            <p:style>
+              <a:lnRef idx="1">
+                <a:schemeClr val="accent1"/>
+              </a:lnRef>
+              <a:fillRef idx="0">
+                <a:schemeClr val="accent1"/>
+              </a:fillRef>
+              <a:effectRef idx="0">
+                <a:schemeClr val="accent1"/>
+              </a:effectRef>
+              <a:fontRef idx="minor">
+                <a:schemeClr val="tx1"/>
+              </a:fontRef>
+            </p:style>
+          </p:cxnSp>
+          <p:sp>
+            <p:nvSpPr>
+              <p:cNvPr id="42" name="TextBox 41">
+                <a:extLst>
+                  <a:ext uri="{FF2B5EF4-FFF2-40B4-BE49-F238E27FC236}">
+                    <a16:creationId xmlns:a16="http://schemas.microsoft.com/office/drawing/2014/main" id="{3C35F6AE-750C-7CA4-1AB5-622139528946}"/>
+                  </a:ext>
+                </a:extLst>
+              </p:cNvPr>
+              <p:cNvSpPr txBox="1"/>
+              <p:nvPr/>
+            </p:nvSpPr>
+            <p:spPr>
+              <a:xfrm>
+                <a:off x="7750681" y="1825584"/>
+                <a:ext cx="867032" cy="369332"/>
+              </a:xfrm>
+              <a:prstGeom prst="rect">
+                <a:avLst/>
+              </a:prstGeom>
+              <a:noFill/>
+            </p:spPr>
+            <p:txBody>
+              <a:bodyPr wrap="none" rtlCol="0">
+                <a:spAutoFit/>
+              </a:bodyPr>
+              <a:lstStyle/>
+              <a:p>
+                <a:r>
+                  <a:rPr lang="en-US" b="1" dirty="0">
+                    <a:solidFill>
+                      <a:srgbClr val="003E74"/>
+                    </a:solidFill>
+                  </a:rPr>
+                  <a:t>System</a:t>
+                </a:r>
+                <a:endParaRPr lang="en-GB" b="1" dirty="0">
+                  <a:solidFill>
+                    <a:srgbClr val="003E74"/>
+                  </a:solidFill>
+                </a:endParaRPr>
+              </a:p>
+            </p:txBody>
+          </p:sp>
+          <p:sp>
+            <p:nvSpPr>
+              <p:cNvPr id="43" name="TextBox 42">
+                <a:extLst>
+                  <a:ext uri="{FF2B5EF4-FFF2-40B4-BE49-F238E27FC236}">
+                    <a16:creationId xmlns:a16="http://schemas.microsoft.com/office/drawing/2014/main" id="{31FFDAE2-811B-1083-BAC7-A9AF8475ABD9}"/>
+                  </a:ext>
+                </a:extLst>
+              </p:cNvPr>
+              <p:cNvSpPr txBox="1"/>
+              <p:nvPr/>
+            </p:nvSpPr>
+            <p:spPr>
+              <a:xfrm>
+                <a:off x="416295" y="3105834"/>
+                <a:ext cx="1054776" cy="646331"/>
+              </a:xfrm>
+              <a:prstGeom prst="rect">
+                <a:avLst/>
+              </a:prstGeom>
+              <a:noFill/>
+            </p:spPr>
+            <p:txBody>
+              <a:bodyPr wrap="none" rtlCol="0">
+                <a:spAutoFit/>
+              </a:bodyPr>
+              <a:lstStyle/>
+              <a:p>
+                <a:r>
+                  <a:rPr lang="en-US" b="1" dirty="0">
+                    <a:solidFill>
+                      <a:schemeClr val="accent2">
+                        <a:lumMod val="50000"/>
+                      </a:schemeClr>
+                    </a:solidFill>
+                  </a:rPr>
+                  <a:t>User’s </a:t>
+                </a:r>
+              </a:p>
+              <a:p>
+                <a:r>
+                  <a:rPr lang="en-US" b="1" dirty="0">
+                    <a:solidFill>
+                      <a:schemeClr val="accent2">
+                        <a:lumMod val="50000"/>
+                      </a:schemeClr>
+                    </a:solidFill>
+                  </a:rPr>
+                  <a:t>Request</a:t>
+                </a:r>
+                <a:endParaRPr lang="en-GB" b="1" dirty="0">
+                  <a:solidFill>
+                    <a:schemeClr val="accent2">
+                      <a:lumMod val="50000"/>
+                    </a:schemeClr>
+                  </a:solidFill>
+                </a:endParaRPr>
+              </a:p>
+            </p:txBody>
+          </p:sp>
+          <p:sp>
+            <p:nvSpPr>
+              <p:cNvPr id="44" name="TextBox 43">
+                <a:extLst>
+                  <a:ext uri="{FF2B5EF4-FFF2-40B4-BE49-F238E27FC236}">
+                    <a16:creationId xmlns:a16="http://schemas.microsoft.com/office/drawing/2014/main" id="{123F1C9B-9630-E8D2-B041-CC4E4F206CBD}"/>
+                  </a:ext>
+                </a:extLst>
+              </p:cNvPr>
+              <p:cNvSpPr txBox="1"/>
+              <p:nvPr/>
+            </p:nvSpPr>
+            <p:spPr>
+              <a:xfrm>
+                <a:off x="8615366" y="3105833"/>
+                <a:ext cx="1135760" cy="646331"/>
+              </a:xfrm>
+              <a:prstGeom prst="rect">
+                <a:avLst/>
+              </a:prstGeom>
+              <a:noFill/>
+            </p:spPr>
+            <p:txBody>
+              <a:bodyPr wrap="none" rtlCol="0">
+                <a:spAutoFit/>
+              </a:bodyPr>
+              <a:lstStyle/>
+              <a:p>
+                <a:r>
+                  <a:rPr lang="en-US" b="1" dirty="0">
+                    <a:solidFill>
+                      <a:schemeClr val="accent2">
+                        <a:lumMod val="50000"/>
+                      </a:schemeClr>
+                    </a:solidFill>
+                  </a:rPr>
+                  <a:t>System’s</a:t>
+                </a:r>
+              </a:p>
+              <a:p>
+                <a:r>
+                  <a:rPr lang="en-US" b="1" dirty="0">
+                    <a:solidFill>
+                      <a:schemeClr val="accent2">
+                        <a:lumMod val="50000"/>
+                      </a:schemeClr>
+                    </a:solidFill>
+                  </a:rPr>
+                  <a:t>Outputs</a:t>
+                </a:r>
+                <a:endParaRPr lang="en-GB" b="1" dirty="0">
+                  <a:solidFill>
+                    <a:schemeClr val="accent2">
+                      <a:lumMod val="50000"/>
+                    </a:schemeClr>
+                  </a:solidFill>
+                </a:endParaRPr>
+              </a:p>
+            </p:txBody>
+          </p:sp>
+        </p:grpSp>
+        <p:sp>
+          <p:nvSpPr>
+            <p:cNvPr id="46" name="TextBox 45">
+              <a:extLst>
+                <a:ext uri="{FF2B5EF4-FFF2-40B4-BE49-F238E27FC236}">
+                  <a16:creationId xmlns:a16="http://schemas.microsoft.com/office/drawing/2014/main" id="{212BC486-E0F4-9056-BE27-A566097B4372}"/>
+                </a:ext>
+              </a:extLst>
+            </p:cNvPr>
+            <p:cNvSpPr txBox="1"/>
+            <p:nvPr/>
+          </p:nvSpPr>
+          <p:spPr>
+            <a:xfrm rot="2588457">
+              <a:off x="5285760" y="3701189"/>
+              <a:ext cx="1375889" cy="369332"/>
+            </a:xfrm>
+            <a:prstGeom prst="rect">
+              <a:avLst/>
+            </a:prstGeom>
+            <a:noFill/>
+          </p:spPr>
+          <p:txBody>
+            <a:bodyPr wrap="none" rtlCol="0">
+              <a:spAutoFit/>
+            </a:bodyPr>
+            <a:lstStyle/>
+            <a:p>
+              <a:r>
+                <a:rPr lang="en-US" dirty="0">
+                  <a:solidFill>
+                    <a:srgbClr val="003E74"/>
+                  </a:solidFill>
+                </a:rPr>
+                <a:t>&lt;prediction&gt;</a:t>
+              </a:r>
+              <a:endParaRPr lang="en-GB" dirty="0">
+                <a:solidFill>
+                  <a:srgbClr val="003E74"/>
+                </a:solidFill>
+              </a:endParaRPr>
+            </a:p>
+          </p:txBody>
+        </p:sp>
+        <p:sp>
+          <p:nvSpPr>
+            <p:cNvPr id="47" name="TextBox 46">
+              <a:extLst>
+                <a:ext uri="{FF2B5EF4-FFF2-40B4-BE49-F238E27FC236}">
+                  <a16:creationId xmlns:a16="http://schemas.microsoft.com/office/drawing/2014/main" id="{AF2DDE43-17CB-C81C-1E72-0ED9DCE14DD3}"/>
+                </a:ext>
+              </a:extLst>
+            </p:cNvPr>
+            <p:cNvSpPr txBox="1"/>
+            <p:nvPr/>
+          </p:nvSpPr>
+          <p:spPr>
+            <a:xfrm>
+              <a:off x="3092348" y="3274715"/>
+              <a:ext cx="1000595" cy="369332"/>
+            </a:xfrm>
+            <a:prstGeom prst="rect">
+              <a:avLst/>
+            </a:prstGeom>
+            <a:noFill/>
+          </p:spPr>
+          <p:txBody>
+            <a:bodyPr wrap="none" rtlCol="0">
+              <a:spAutoFit/>
+            </a:bodyPr>
+            <a:lstStyle/>
+            <a:p>
+              <a:r>
+                <a:rPr lang="en-US" dirty="0">
+                  <a:solidFill>
+                    <a:srgbClr val="003E74"/>
+                  </a:solidFill>
+                </a:rPr>
+                <a:t>&lt;inputs&gt;</a:t>
+              </a:r>
+              <a:endParaRPr lang="en-GB" dirty="0">
+                <a:solidFill>
+                  <a:srgbClr val="003E74"/>
+                </a:solidFill>
+              </a:endParaRPr>
+            </a:p>
+          </p:txBody>
+        </p:sp>
+        <p:sp>
+          <p:nvSpPr>
+            <p:cNvPr id="48" name="TextBox 47">
+              <a:extLst>
+                <a:ext uri="{FF2B5EF4-FFF2-40B4-BE49-F238E27FC236}">
+                  <a16:creationId xmlns:a16="http://schemas.microsoft.com/office/drawing/2014/main" id="{D6EBC6B5-5269-3520-F568-DABD8316DF1F}"/>
+                </a:ext>
+              </a:extLst>
+            </p:cNvPr>
+            <p:cNvSpPr txBox="1"/>
+            <p:nvPr/>
+          </p:nvSpPr>
+          <p:spPr>
+            <a:xfrm rot="18213921">
+              <a:off x="2978166" y="4176096"/>
+              <a:ext cx="1000595" cy="369332"/>
+            </a:xfrm>
+            <a:prstGeom prst="rect">
+              <a:avLst/>
+            </a:prstGeom>
+            <a:noFill/>
+          </p:spPr>
+          <p:txBody>
+            <a:bodyPr wrap="none" rtlCol="0">
+              <a:spAutoFit/>
+            </a:bodyPr>
+            <a:lstStyle/>
+            <a:p>
+              <a:r>
+                <a:rPr lang="en-US" dirty="0">
+                  <a:solidFill>
+                    <a:srgbClr val="003E74"/>
+                  </a:solidFill>
+                </a:rPr>
+                <a:t>&lt;inputs&gt;</a:t>
+              </a:r>
+              <a:endParaRPr lang="en-GB" dirty="0">
+                <a:solidFill>
+                  <a:srgbClr val="003E74"/>
+                </a:solidFill>
+              </a:endParaRPr>
+            </a:p>
+          </p:txBody>
+        </p:sp>
+      </p:grpSp>
     </p:spTree>
     <p:extLst>
       <p:ext uri="{BB962C8B-B14F-4D97-AF65-F5344CB8AC3E}">
@@ -11907,7 +12033,7 @@
         </p:nvSpPr>
         <p:spPr>
           <a:xfrm>
-            <a:off x="363894" y="2799527"/>
+            <a:off x="375469" y="2799527"/>
             <a:ext cx="11313757" cy="4067175"/>
           </a:xfrm>
           <a:prstGeom prst="rect">
@@ -14423,256 +14549,6 @@
           </a:p>
         </p:txBody>
       </p:sp>
-      <p:sp>
-        <p:nvSpPr>
-          <p:cNvPr id="4" name="Content Placeholder 2">
-            <a:extLst>
-              <a:ext uri="{FF2B5EF4-FFF2-40B4-BE49-F238E27FC236}">
-                <a16:creationId xmlns:a16="http://schemas.microsoft.com/office/drawing/2014/main" id="{3DE51E65-D897-98D1-7C66-2FC8197868B7}"/>
-              </a:ext>
-            </a:extLst>
-          </p:cNvPr>
-          <p:cNvSpPr txBox="1">
-            <a:spLocks/>
-          </p:cNvSpPr>
-          <p:nvPr/>
-        </p:nvSpPr>
-        <p:spPr bwMode="auto">
-          <a:xfrm>
-            <a:off x="8748357" y="4482675"/>
-            <a:ext cx="4210049" cy="569350"/>
-          </a:xfrm>
-          <a:prstGeom prst="rect">
-            <a:avLst/>
-          </a:prstGeom>
-          <a:noFill/>
-          <a:ln>
-            <a:noFill/>
-          </a:ln>
-          <a:effectLst/>
-          <a:extLst>
-            <a:ext uri="{909E8E84-426E-40DD-AFC4-6F175D3DCCD1}">
-              <a14:hiddenFill xmlns:a14="http://schemas.microsoft.com/office/drawing/2010/main">
-                <a:solidFill>
-                  <a:schemeClr val="accent1"/>
-                </a:solidFill>
-              </a14:hiddenFill>
-            </a:ext>
-            <a:ext uri="{91240B29-F687-4F45-9708-019B960494DF}">
-              <a14:hiddenLine xmlns:a14="http://schemas.microsoft.com/office/drawing/2010/main" w="9525">
-                <a:solidFill>
-                  <a:schemeClr val="tx1"/>
-                </a:solidFill>
-                <a:miter lim="800000"/>
-                <a:headEnd/>
-                <a:tailEnd/>
-              </a14:hiddenLine>
-            </a:ext>
-            <a:ext uri="{AF507438-7753-43E0-B8FC-AC1667EBCBE1}">
-              <a14:hiddenEffects xmlns:a14="http://schemas.microsoft.com/office/drawing/2010/main">
-                <a:effectLst>
-                  <a:outerShdw dist="35921" dir="2700000" algn="ctr" rotWithShape="0">
-                    <a:schemeClr val="bg2"/>
-                  </a:outerShdw>
-                </a:effectLst>
-              </a14:hiddenEffects>
-            </a:ext>
-          </a:extLst>
-        </p:spPr>
-        <p:txBody>
-          <a:bodyPr vert="horz" wrap="square" lIns="0" tIns="0" rIns="0" bIns="0" numCol="1" anchor="t" anchorCtr="0" compatLnSpc="1">
-            <a:prstTxWarp prst="textNoShape">
-              <a:avLst/>
-            </a:prstTxWarp>
-            <a:normAutofit/>
-          </a:bodyPr>
-          <a:lstStyle>
-            <a:lvl1pPr marL="0" indent="0" algn="l" defTabSz="914400" rtl="0" eaLnBrk="1" latinLnBrk="0" hangingPunct="1">
-              <a:lnSpc>
-                <a:spcPct val="90000"/>
-              </a:lnSpc>
-              <a:spcBef>
-                <a:spcPts val="1000"/>
-              </a:spcBef>
-              <a:buFont typeface="Arial" panose="020B0604020202020204" pitchFamily="34" charset="0"/>
-              <a:buNone/>
-              <a:defRPr sz="2000" kern="1200">
-                <a:solidFill>
-                  <a:schemeClr val="accent1">
-                    <a:lumMod val="50000"/>
-                  </a:schemeClr>
-                </a:solidFill>
-                <a:latin typeface="+mn-lt"/>
-                <a:ea typeface="+mn-ea"/>
-                <a:cs typeface="+mn-cs"/>
-              </a:defRPr>
-            </a:lvl1pPr>
-            <a:lvl2pPr marL="685800" indent="-228600" algn="l" defTabSz="914400" rtl="0" eaLnBrk="1" latinLnBrk="0" hangingPunct="1">
-              <a:lnSpc>
-                <a:spcPct val="90000"/>
-              </a:lnSpc>
-              <a:spcBef>
-                <a:spcPts val="500"/>
-              </a:spcBef>
-              <a:buFont typeface="Arial" panose="020B0604020202020204" pitchFamily="34" charset="0"/>
-              <a:buChar char="•"/>
-              <a:defRPr sz="1800" kern="1200">
-                <a:solidFill>
-                  <a:schemeClr val="accent1">
-                    <a:lumMod val="50000"/>
-                  </a:schemeClr>
-                </a:solidFill>
-                <a:latin typeface="+mn-lt"/>
-                <a:ea typeface="+mn-ea"/>
-                <a:cs typeface="+mn-cs"/>
-              </a:defRPr>
-            </a:lvl2pPr>
-            <a:lvl3pPr marL="1143000" indent="-228600" algn="l" defTabSz="914400" rtl="0" eaLnBrk="1" latinLnBrk="0" hangingPunct="1">
-              <a:lnSpc>
-                <a:spcPct val="90000"/>
-              </a:lnSpc>
-              <a:spcBef>
-                <a:spcPts val="500"/>
-              </a:spcBef>
-              <a:buFont typeface="Arial" panose="020B0604020202020204" pitchFamily="34" charset="0"/>
-              <a:buChar char="•"/>
-              <a:defRPr sz="1800" kern="1200">
-                <a:solidFill>
-                  <a:schemeClr val="accent1">
-                    <a:lumMod val="50000"/>
-                  </a:schemeClr>
-                </a:solidFill>
-                <a:latin typeface="+mn-lt"/>
-                <a:ea typeface="+mn-ea"/>
-                <a:cs typeface="+mn-cs"/>
-              </a:defRPr>
-            </a:lvl3pPr>
-            <a:lvl4pPr marL="1600200" indent="-228600" algn="l" defTabSz="914400" rtl="0" eaLnBrk="1" latinLnBrk="0" hangingPunct="1">
-              <a:lnSpc>
-                <a:spcPct val="90000"/>
-              </a:lnSpc>
-              <a:spcBef>
-                <a:spcPts val="500"/>
-              </a:spcBef>
-              <a:buFont typeface="Arial" panose="020B0604020202020204" pitchFamily="34" charset="0"/>
-              <a:buChar char="•"/>
-              <a:defRPr sz="1800" kern="1200">
-                <a:solidFill>
-                  <a:schemeClr val="accent1">
-                    <a:lumMod val="50000"/>
-                  </a:schemeClr>
-                </a:solidFill>
-                <a:latin typeface="+mn-lt"/>
-                <a:ea typeface="+mn-ea"/>
-                <a:cs typeface="+mn-cs"/>
-              </a:defRPr>
-            </a:lvl4pPr>
-            <a:lvl5pPr marL="2057400" indent="-228600" algn="l" defTabSz="914400" rtl="0" eaLnBrk="1" latinLnBrk="0" hangingPunct="1">
-              <a:lnSpc>
-                <a:spcPct val="90000"/>
-              </a:lnSpc>
-              <a:spcBef>
-                <a:spcPts val="500"/>
-              </a:spcBef>
-              <a:buFont typeface="Arial" panose="020B0604020202020204" pitchFamily="34" charset="0"/>
-              <a:buChar char="•"/>
-              <a:defRPr sz="1800" kern="1200">
-                <a:solidFill>
-                  <a:schemeClr val="accent1">
-                    <a:lumMod val="50000"/>
-                  </a:schemeClr>
-                </a:solidFill>
-                <a:latin typeface="+mn-lt"/>
-                <a:ea typeface="+mn-ea"/>
-                <a:cs typeface="+mn-cs"/>
-              </a:defRPr>
-            </a:lvl5pPr>
-            <a:lvl6pPr marL="2514600" indent="-228600" algn="l" defTabSz="914400" rtl="0" eaLnBrk="1" latinLnBrk="0" hangingPunct="1">
-              <a:lnSpc>
-                <a:spcPct val="90000"/>
-              </a:lnSpc>
-              <a:spcBef>
-                <a:spcPts val="500"/>
-              </a:spcBef>
-              <a:buFont typeface="Arial" panose="020B0604020202020204" pitchFamily="34" charset="0"/>
-              <a:buChar char="•"/>
-              <a:defRPr sz="1800" kern="1200">
-                <a:solidFill>
-                  <a:schemeClr val="tx1"/>
-                </a:solidFill>
-                <a:latin typeface="+mn-lt"/>
-                <a:ea typeface="+mn-ea"/>
-                <a:cs typeface="+mn-cs"/>
-              </a:defRPr>
-            </a:lvl6pPr>
-            <a:lvl7pPr marL="2971800" indent="-228600" algn="l" defTabSz="914400" rtl="0" eaLnBrk="1" latinLnBrk="0" hangingPunct="1">
-              <a:lnSpc>
-                <a:spcPct val="90000"/>
-              </a:lnSpc>
-              <a:spcBef>
-                <a:spcPts val="500"/>
-              </a:spcBef>
-              <a:buFont typeface="Arial" panose="020B0604020202020204" pitchFamily="34" charset="0"/>
-              <a:buChar char="•"/>
-              <a:defRPr sz="1800" kern="1200">
-                <a:solidFill>
-                  <a:schemeClr val="tx1"/>
-                </a:solidFill>
-                <a:latin typeface="+mn-lt"/>
-                <a:ea typeface="+mn-ea"/>
-                <a:cs typeface="+mn-cs"/>
-              </a:defRPr>
-            </a:lvl7pPr>
-            <a:lvl8pPr marL="3429000" indent="-228600" algn="l" defTabSz="914400" rtl="0" eaLnBrk="1" latinLnBrk="0" hangingPunct="1">
-              <a:lnSpc>
-                <a:spcPct val="90000"/>
-              </a:lnSpc>
-              <a:spcBef>
-                <a:spcPts val="500"/>
-              </a:spcBef>
-              <a:buFont typeface="Arial" panose="020B0604020202020204" pitchFamily="34" charset="0"/>
-              <a:buChar char="•"/>
-              <a:defRPr sz="1800" kern="1200">
-                <a:solidFill>
-                  <a:schemeClr val="tx1"/>
-                </a:solidFill>
-                <a:latin typeface="+mn-lt"/>
-                <a:ea typeface="+mn-ea"/>
-                <a:cs typeface="+mn-cs"/>
-              </a:defRPr>
-            </a:lvl8pPr>
-            <a:lvl9pPr marL="3886200" indent="-228600" algn="l" defTabSz="914400" rtl="0" eaLnBrk="1" latinLnBrk="0" hangingPunct="1">
-              <a:lnSpc>
-                <a:spcPct val="90000"/>
-              </a:lnSpc>
-              <a:spcBef>
-                <a:spcPts val="500"/>
-              </a:spcBef>
-              <a:buFont typeface="Arial" panose="020B0604020202020204" pitchFamily="34" charset="0"/>
-              <a:buChar char="•"/>
-              <a:defRPr sz="1800" kern="1200">
-                <a:solidFill>
-                  <a:schemeClr val="tx1"/>
-                </a:solidFill>
-                <a:latin typeface="+mn-lt"/>
-                <a:ea typeface="+mn-ea"/>
-                <a:cs typeface="+mn-cs"/>
-              </a:defRPr>
-            </a:lvl9pPr>
-          </a:lstStyle>
-          <a:p>
-            <a:pPr marL="457200" indent="-457200">
-              <a:buFont typeface="Arial" panose="020B0604020202020204" pitchFamily="34" charset="0"/>
-              <a:buChar char="•"/>
-            </a:pPr>
-            <a:endParaRPr lang="en-GB" sz="3000" dirty="0">
-              <a:solidFill>
-                <a:srgbClr val="FF0000"/>
-              </a:solidFill>
-            </a:endParaRPr>
-          </a:p>
-        </p:txBody>
-      </p:sp>
       <p:pic>
         <p:nvPicPr>
           <p:cNvPr id="1026" name="Picture 2">
@@ -14688,7 +14564,7 @@
           <p:nvPr/>
         </p:nvPicPr>
         <p:blipFill>
-          <a:blip r:embed="rId2">
+          <a:blip r:embed="rId3">
             <a:extLst>
               <a:ext uri="{28A0092B-C50C-407E-A947-70E740481C1C}">
                 <a14:useLocalDpi xmlns:a14="http://schemas.microsoft.com/office/drawing/2010/main" val="0"/>
@@ -14761,7 +14637,7 @@
                 <a:solidFill>
                   <a:srgbClr val="003E74"/>
                 </a:solidFill>
-                <a:hlinkClick r:id="rId3"/>
+                <a:hlinkClick r:id="rId4"/>
               </a:rPr>
               <a:t>https://commons.wikimedia.org/wiki/File:NP_coffee_cooperative_%285867722870%29.jpg</a:t>
             </a:r>
@@ -14792,7 +14668,7 @@
           <p:nvPr/>
         </p:nvPicPr>
         <p:blipFill>
-          <a:blip r:embed="rId4">
+          <a:blip r:embed="rId5">
             <a:extLst>
               <a:ext uri="{28A0092B-C50C-407E-A947-70E740481C1C}">
                 <a14:useLocalDpi xmlns:a14="http://schemas.microsoft.com/office/drawing/2010/main" val="0"/>
@@ -14854,7 +14730,7 @@
                 <a:solidFill>
                   <a:srgbClr val="003E74"/>
                 </a:solidFill>
-                <a:hlinkClick r:id="rId5"/>
+                <a:hlinkClick r:id="rId6"/>
               </a:rPr>
               <a:t>https://www.flickr.com/photos/scottishgovernment/23657582298/in/photostream/</a:t>
             </a:r>
@@ -25104,273 +24980,252 @@
           </a:p>
         </p:txBody>
       </p:sp>
-      <p:grpSp>
-        <p:nvGrpSpPr>
-          <p:cNvPr id="10" name="Group 9">
-            <a:extLst>
-              <a:ext uri="{FF2B5EF4-FFF2-40B4-BE49-F238E27FC236}">
-                <a16:creationId xmlns:a16="http://schemas.microsoft.com/office/drawing/2014/main" id="{80EB4E07-B24D-FFC4-C080-423AC1DA7633}"/>
-              </a:ext>
-            </a:extLst>
-          </p:cNvPr>
-          <p:cNvGrpSpPr/>
+      <p:sp>
+        <p:nvSpPr>
+          <p:cNvPr id="12" name="Rectangle 11">
+            <a:extLst>
+              <a:ext uri="{FF2B5EF4-FFF2-40B4-BE49-F238E27FC236}">
+                <a16:creationId xmlns:a16="http://schemas.microsoft.com/office/drawing/2014/main" id="{F59F64BC-F18C-0B71-8BE5-123545A540BE}"/>
+              </a:ext>
+            </a:extLst>
+          </p:cNvPr>
+          <p:cNvSpPr/>
           <p:nvPr/>
-        </p:nvGrpSpPr>
-        <p:grpSpPr>
+        </p:nvSpPr>
+        <p:spPr>
           <a:xfrm>
-            <a:off x="5126393" y="3448755"/>
-            <a:ext cx="6031278" cy="1123243"/>
-            <a:chOff x="3668648" y="2921046"/>
-            <a:chExt cx="5310999" cy="638457"/>
+            <a:off x="7117960" y="3448755"/>
+            <a:ext cx="1529967" cy="1123243"/>
           </a:xfrm>
-        </p:grpSpPr>
-        <p:sp>
-          <p:nvSpPr>
-            <p:cNvPr id="12" name="Rectangle 11">
-              <a:extLst>
-                <a:ext uri="{FF2B5EF4-FFF2-40B4-BE49-F238E27FC236}">
-                  <a16:creationId xmlns:a16="http://schemas.microsoft.com/office/drawing/2014/main" id="{F59F64BC-F18C-0B71-8BE5-123545A540BE}"/>
-                </a:ext>
-              </a:extLst>
-            </p:cNvPr>
-            <p:cNvSpPr/>
-            <p:nvPr/>
-          </p:nvSpPr>
-          <p:spPr>
-            <a:xfrm>
-              <a:off x="5422374" y="2921046"/>
-              <a:ext cx="1347252" cy="638457"/>
-            </a:xfrm>
-            <a:prstGeom prst="rect">
-              <a:avLst/>
-            </a:prstGeom>
+          <a:prstGeom prst="rect">
+            <a:avLst/>
+          </a:prstGeom>
+          <a:solidFill>
+            <a:srgbClr val="003E74"/>
+          </a:solidFill>
+          <a:ln>
             <a:solidFill>
               <a:srgbClr val="003E74"/>
             </a:solidFill>
-            <a:ln>
+          </a:ln>
+        </p:spPr>
+        <p:style>
+          <a:lnRef idx="2">
+            <a:schemeClr val="accent1">
+              <a:shade val="50000"/>
+            </a:schemeClr>
+          </a:lnRef>
+          <a:fillRef idx="1">
+            <a:schemeClr val="accent1"/>
+          </a:fillRef>
+          <a:effectRef idx="0">
+            <a:schemeClr val="accent1"/>
+          </a:effectRef>
+          <a:fontRef idx="minor">
+            <a:schemeClr val="lt1"/>
+          </a:fontRef>
+        </p:style>
+        <p:txBody>
+          <a:bodyPr rtlCol="0" anchor="ctr"/>
+          <a:lstStyle/>
+          <a:p>
+            <a:pPr algn="ctr"/>
+            <a:r>
+              <a:rPr lang="en-US" sz="2400" b="1" dirty="0">
+                <a:solidFill>
+                  <a:schemeClr val="bg1"/>
+                </a:solidFill>
+              </a:rPr>
+              <a:t>Learning Model</a:t>
+            </a:r>
+            <a:endParaRPr lang="en-GB" sz="2400" b="1" dirty="0">
+              <a:solidFill>
+                <a:schemeClr val="bg1"/>
+              </a:solidFill>
+            </a:endParaRPr>
+          </a:p>
+        </p:txBody>
+      </p:sp>
+      <p:sp>
+        <p:nvSpPr>
+          <p:cNvPr id="14" name="TextBox 13">
+            <a:extLst>
+              <a:ext uri="{FF2B5EF4-FFF2-40B4-BE49-F238E27FC236}">
+                <a16:creationId xmlns:a16="http://schemas.microsoft.com/office/drawing/2014/main" id="{AE829123-0421-CABB-20A8-E13BAF07FAFA}"/>
+              </a:ext>
+            </a:extLst>
+          </p:cNvPr>
+          <p:cNvSpPr txBox="1"/>
+          <p:nvPr/>
+        </p:nvSpPr>
+        <p:spPr>
+          <a:xfrm>
+            <a:off x="5126393" y="3779542"/>
+            <a:ext cx="1350434" cy="461665"/>
+          </a:xfrm>
+          <a:prstGeom prst="rect">
+            <a:avLst/>
+          </a:prstGeom>
+          <a:noFill/>
+        </p:spPr>
+        <p:txBody>
+          <a:bodyPr wrap="none" rtlCol="0">
+            <a:spAutoFit/>
+          </a:bodyPr>
+          <a:lstStyle/>
+          <a:p>
+            <a:r>
+              <a:rPr lang="en-US" sz="2400" dirty="0">
+                <a:solidFill>
+                  <a:srgbClr val="003E74"/>
+                </a:solidFill>
+              </a:rPr>
+              <a:t>&lt;inputs&gt;</a:t>
+            </a:r>
+            <a:endParaRPr lang="en-GB" sz="2400" dirty="0">
               <a:solidFill>
                 <a:srgbClr val="003E74"/>
               </a:solidFill>
-            </a:ln>
-          </p:spPr>
-          <p:style>
-            <a:lnRef idx="2">
-              <a:schemeClr val="accent1">
-                <a:shade val="50000"/>
-              </a:schemeClr>
-            </a:lnRef>
-            <a:fillRef idx="1">
-              <a:schemeClr val="accent1"/>
-            </a:fillRef>
-            <a:effectRef idx="0">
-              <a:schemeClr val="accent1"/>
-            </a:effectRef>
-            <a:fontRef idx="minor">
-              <a:schemeClr val="lt1"/>
-            </a:fontRef>
-          </p:style>
-          <p:txBody>
-            <a:bodyPr rtlCol="0" anchor="ctr"/>
-            <a:lstStyle/>
-            <a:p>
-              <a:pPr algn="ctr"/>
-              <a:r>
-                <a:rPr lang="en-US" sz="2400" b="1" dirty="0">
-                  <a:solidFill>
-                    <a:schemeClr val="bg1"/>
-                  </a:solidFill>
-                </a:rPr>
-                <a:t>Learning Model</a:t>
-              </a:r>
-              <a:endParaRPr lang="en-GB" sz="2400" b="1" dirty="0">
-                <a:solidFill>
-                  <a:schemeClr val="bg1"/>
-                </a:solidFill>
-              </a:endParaRPr>
-            </a:p>
-          </p:txBody>
-        </p:sp>
-        <p:sp>
-          <p:nvSpPr>
-            <p:cNvPr id="14" name="TextBox 13">
-              <a:extLst>
-                <a:ext uri="{FF2B5EF4-FFF2-40B4-BE49-F238E27FC236}">
-                  <a16:creationId xmlns:a16="http://schemas.microsoft.com/office/drawing/2014/main" id="{AE829123-0421-CABB-20A8-E13BAF07FAFA}"/>
-                </a:ext>
-              </a:extLst>
-            </p:cNvPr>
-            <p:cNvSpPr txBox="1"/>
-            <p:nvPr/>
-          </p:nvSpPr>
-          <p:spPr>
-            <a:xfrm>
-              <a:off x="3668648" y="3109067"/>
-              <a:ext cx="1189160" cy="262413"/>
-            </a:xfrm>
-            <a:prstGeom prst="rect">
-              <a:avLst/>
-            </a:prstGeom>
-            <a:noFill/>
-          </p:spPr>
-          <p:txBody>
-            <a:bodyPr wrap="none" rtlCol="0">
-              <a:spAutoFit/>
-            </a:bodyPr>
-            <a:lstStyle/>
-            <a:p>
-              <a:r>
-                <a:rPr lang="en-US" sz="2400" dirty="0">
-                  <a:solidFill>
-                    <a:srgbClr val="003E74"/>
-                  </a:solidFill>
-                </a:rPr>
-                <a:t>&lt;inputs&gt;</a:t>
-              </a:r>
-              <a:endParaRPr lang="en-GB" sz="2400" dirty="0">
+            </a:endParaRPr>
+          </a:p>
+        </p:txBody>
+      </p:sp>
+      <p:cxnSp>
+        <p:nvCxnSpPr>
+          <p:cNvPr id="15" name="Straight Arrow Connector 14">
+            <a:extLst>
+              <a:ext uri="{FF2B5EF4-FFF2-40B4-BE49-F238E27FC236}">
+                <a16:creationId xmlns:a16="http://schemas.microsoft.com/office/drawing/2014/main" id="{7AA7FA1E-0D8A-C065-A579-8413CFE2505E}"/>
+              </a:ext>
+            </a:extLst>
+          </p:cNvPr>
+          <p:cNvCxnSpPr>
+            <a:cxnSpLocks/>
+            <a:stCxn id="14" idx="3"/>
+            <a:endCxn id="12" idx="1"/>
+          </p:cNvCxnSpPr>
+          <p:nvPr/>
+        </p:nvCxnSpPr>
+        <p:spPr>
+          <a:xfrm>
+            <a:off x="6476827" y="4010376"/>
+            <a:ext cx="641133" cy="2"/>
+          </a:xfrm>
+          <a:prstGeom prst="straightConnector1">
+            <a:avLst/>
+          </a:prstGeom>
+          <a:ln w="19050">
+            <a:solidFill>
+              <a:srgbClr val="003E74"/>
+            </a:solidFill>
+            <a:tailEnd type="triangle"/>
+          </a:ln>
+        </p:spPr>
+        <p:style>
+          <a:lnRef idx="1">
+            <a:schemeClr val="accent1"/>
+          </a:lnRef>
+          <a:fillRef idx="0">
+            <a:schemeClr val="accent1"/>
+          </a:fillRef>
+          <a:effectRef idx="0">
+            <a:schemeClr val="accent1"/>
+          </a:effectRef>
+          <a:fontRef idx="minor">
+            <a:schemeClr val="tx1"/>
+          </a:fontRef>
+        </p:style>
+      </p:cxnSp>
+      <p:cxnSp>
+        <p:nvCxnSpPr>
+          <p:cNvPr id="16" name="Straight Arrow Connector 15">
+            <a:extLst>
+              <a:ext uri="{FF2B5EF4-FFF2-40B4-BE49-F238E27FC236}">
+                <a16:creationId xmlns:a16="http://schemas.microsoft.com/office/drawing/2014/main" id="{3D3804D2-3B79-600B-6505-69E101109EED}"/>
+              </a:ext>
+            </a:extLst>
+          </p:cNvPr>
+          <p:cNvCxnSpPr>
+            <a:cxnSpLocks/>
+            <a:stCxn id="12" idx="3"/>
+            <a:endCxn id="18" idx="1"/>
+          </p:cNvCxnSpPr>
+          <p:nvPr/>
+        </p:nvCxnSpPr>
+        <p:spPr>
+          <a:xfrm flipV="1">
+            <a:off x="8647928" y="4010374"/>
+            <a:ext cx="639745" cy="4"/>
+          </a:xfrm>
+          <a:prstGeom prst="straightConnector1">
+            <a:avLst/>
+          </a:prstGeom>
+          <a:ln w="19050">
+            <a:solidFill>
+              <a:srgbClr val="003E74"/>
+            </a:solidFill>
+            <a:tailEnd type="triangle"/>
+          </a:ln>
+        </p:spPr>
+        <p:style>
+          <a:lnRef idx="1">
+            <a:schemeClr val="accent1"/>
+          </a:lnRef>
+          <a:fillRef idx="0">
+            <a:schemeClr val="accent1"/>
+          </a:fillRef>
+          <a:effectRef idx="0">
+            <a:schemeClr val="accent1"/>
+          </a:effectRef>
+          <a:fontRef idx="minor">
+            <a:schemeClr val="tx1"/>
+          </a:fontRef>
+        </p:style>
+      </p:cxnSp>
+      <p:sp>
+        <p:nvSpPr>
+          <p:cNvPr id="18" name="TextBox 17">
+            <a:extLst>
+              <a:ext uri="{FF2B5EF4-FFF2-40B4-BE49-F238E27FC236}">
+                <a16:creationId xmlns:a16="http://schemas.microsoft.com/office/drawing/2014/main" id="{A145C3BB-26AC-5889-D3D6-9620751A367C}"/>
+              </a:ext>
+            </a:extLst>
+          </p:cNvPr>
+          <p:cNvSpPr txBox="1"/>
+          <p:nvPr/>
+        </p:nvSpPr>
+        <p:spPr>
+          <a:xfrm>
+            <a:off x="9287672" y="3779540"/>
+            <a:ext cx="1869999" cy="461665"/>
+          </a:xfrm>
+          <a:prstGeom prst="rect">
+            <a:avLst/>
+          </a:prstGeom>
+          <a:noFill/>
+        </p:spPr>
+        <p:txBody>
+          <a:bodyPr wrap="none" rtlCol="0">
+            <a:spAutoFit/>
+          </a:bodyPr>
+          <a:lstStyle/>
+          <a:p>
+            <a:r>
+              <a:rPr lang="en-US" sz="2400" dirty="0">
                 <a:solidFill>
                   <a:srgbClr val="003E74"/>
                 </a:solidFill>
-              </a:endParaRPr>
-            </a:p>
-          </p:txBody>
-        </p:sp>
-        <p:cxnSp>
-          <p:nvCxnSpPr>
-            <p:cNvPr id="15" name="Straight Arrow Connector 14">
-              <a:extLst>
-                <a:ext uri="{FF2B5EF4-FFF2-40B4-BE49-F238E27FC236}">
-                  <a16:creationId xmlns:a16="http://schemas.microsoft.com/office/drawing/2014/main" id="{7AA7FA1E-0D8A-C065-A579-8413CFE2505E}"/>
-                </a:ext>
-              </a:extLst>
-            </p:cNvPr>
-            <p:cNvCxnSpPr>
-              <a:cxnSpLocks/>
-              <a:stCxn id="14" idx="3"/>
-              <a:endCxn id="12" idx="1"/>
-            </p:cNvCxnSpPr>
-            <p:nvPr/>
-          </p:nvCxnSpPr>
-          <p:spPr>
-            <a:xfrm>
-              <a:off x="4857808" y="3240274"/>
-              <a:ext cx="564566" cy="1"/>
-            </a:xfrm>
-            <a:prstGeom prst="straightConnector1">
-              <a:avLst/>
-            </a:prstGeom>
-            <a:ln w="19050">
+              </a:rPr>
+              <a:t>&lt;prediction&gt;</a:t>
+            </a:r>
+            <a:endParaRPr lang="en-GB" sz="2400" dirty="0">
               <a:solidFill>
                 <a:srgbClr val="003E74"/>
               </a:solidFill>
-              <a:tailEnd type="triangle"/>
-            </a:ln>
-          </p:spPr>
-          <p:style>
-            <a:lnRef idx="1">
-              <a:schemeClr val="accent1"/>
-            </a:lnRef>
-            <a:fillRef idx="0">
-              <a:schemeClr val="accent1"/>
-            </a:fillRef>
-            <a:effectRef idx="0">
-              <a:schemeClr val="accent1"/>
-            </a:effectRef>
-            <a:fontRef idx="minor">
-              <a:schemeClr val="tx1"/>
-            </a:fontRef>
-          </p:style>
-        </p:cxnSp>
-        <p:cxnSp>
-          <p:nvCxnSpPr>
-            <p:cNvPr id="16" name="Straight Arrow Connector 15">
-              <a:extLst>
-                <a:ext uri="{FF2B5EF4-FFF2-40B4-BE49-F238E27FC236}">
-                  <a16:creationId xmlns:a16="http://schemas.microsoft.com/office/drawing/2014/main" id="{3D3804D2-3B79-600B-6505-69E101109EED}"/>
-                </a:ext>
-              </a:extLst>
-            </p:cNvPr>
-            <p:cNvCxnSpPr>
-              <a:cxnSpLocks/>
-              <a:stCxn id="12" idx="3"/>
-              <a:endCxn id="18" idx="1"/>
-            </p:cNvCxnSpPr>
-            <p:nvPr/>
-          </p:nvCxnSpPr>
-          <p:spPr>
-            <a:xfrm flipV="1">
-              <a:off x="6769627" y="3240273"/>
-              <a:ext cx="563344" cy="2"/>
-            </a:xfrm>
-            <a:prstGeom prst="straightConnector1">
-              <a:avLst/>
-            </a:prstGeom>
-            <a:ln w="19050">
-              <a:solidFill>
-                <a:srgbClr val="003E74"/>
-              </a:solidFill>
-              <a:tailEnd type="triangle"/>
-            </a:ln>
-          </p:spPr>
-          <p:style>
-            <a:lnRef idx="1">
-              <a:schemeClr val="accent1"/>
-            </a:lnRef>
-            <a:fillRef idx="0">
-              <a:schemeClr val="accent1"/>
-            </a:fillRef>
-            <a:effectRef idx="0">
-              <a:schemeClr val="accent1"/>
-            </a:effectRef>
-            <a:fontRef idx="minor">
-              <a:schemeClr val="tx1"/>
-            </a:fontRef>
-          </p:style>
-        </p:cxnSp>
-        <p:sp>
-          <p:nvSpPr>
-            <p:cNvPr id="18" name="TextBox 17">
-              <a:extLst>
-                <a:ext uri="{FF2B5EF4-FFF2-40B4-BE49-F238E27FC236}">
-                  <a16:creationId xmlns:a16="http://schemas.microsoft.com/office/drawing/2014/main" id="{A145C3BB-26AC-5889-D3D6-9620751A367C}"/>
-                </a:ext>
-              </a:extLst>
-            </p:cNvPr>
-            <p:cNvSpPr txBox="1"/>
-            <p:nvPr/>
-          </p:nvSpPr>
-          <p:spPr>
-            <a:xfrm>
-              <a:off x="7332971" y="3109066"/>
-              <a:ext cx="1646676" cy="262413"/>
-            </a:xfrm>
-            <a:prstGeom prst="rect">
-              <a:avLst/>
-            </a:prstGeom>
-            <a:noFill/>
-          </p:spPr>
-          <p:txBody>
-            <a:bodyPr wrap="none" rtlCol="0">
-              <a:spAutoFit/>
-            </a:bodyPr>
-            <a:lstStyle/>
-            <a:p>
-              <a:r>
-                <a:rPr lang="en-US" sz="2400" dirty="0">
-                  <a:solidFill>
-                    <a:srgbClr val="003E74"/>
-                  </a:solidFill>
-                </a:rPr>
-                <a:t>&lt;prediction&gt;</a:t>
-              </a:r>
-              <a:endParaRPr lang="en-GB" sz="2400" dirty="0">
-                <a:solidFill>
-                  <a:srgbClr val="003E74"/>
-                </a:solidFill>
-              </a:endParaRPr>
-            </a:p>
-          </p:txBody>
-        </p:sp>
-      </p:grpSp>
+            </a:endParaRPr>
+          </a:p>
+        </p:txBody>
+      </p:sp>
     </p:spTree>
     <p:extLst>
       <p:ext uri="{BB962C8B-B14F-4D97-AF65-F5344CB8AC3E}">

--- a/assets/slides/Engineering Data Science.pptx
+++ b/assets/slides/Engineering Data Science.pptx
@@ -239,7 +239,7 @@
           <a:p>
             <a:fld id="{D6F60BA2-1DFE-4286-AB71-68BFEBE24C91}" type="datetimeFigureOut">
               <a:rPr lang="en-GB" smtClean="0"/>
-              <a:t>21/05/2025</a:t>
+              <a:t>27/05/2025</a:t>
             </a:fld>
             <a:endParaRPr lang="en-GB"/>
           </a:p>
@@ -1904,7 +1904,7 @@
           <a:p>
             <a:fld id="{1A77EDC3-57CA-43CF-8E2C-C9B9AF002A04}" type="datetimeFigureOut">
               <a:rPr lang="en-GB" smtClean="0"/>
-              <a:t>21/05/2025</a:t>
+              <a:t>27/05/2025</a:t>
             </a:fld>
             <a:endParaRPr lang="en-GB"/>
           </a:p>
@@ -2104,7 +2104,7 @@
           <a:p>
             <a:fld id="{1A77EDC3-57CA-43CF-8E2C-C9B9AF002A04}" type="datetimeFigureOut">
               <a:rPr lang="en-GB" smtClean="0"/>
-              <a:t>21/05/2025</a:t>
+              <a:t>27/05/2025</a:t>
             </a:fld>
             <a:endParaRPr lang="en-GB"/>
           </a:p>
@@ -2314,7 +2314,7 @@
           <a:p>
             <a:fld id="{1A77EDC3-57CA-43CF-8E2C-C9B9AF002A04}" type="datetimeFigureOut">
               <a:rPr lang="en-GB" smtClean="0"/>
-              <a:t>21/05/2025</a:t>
+              <a:t>27/05/2025</a:t>
             </a:fld>
             <a:endParaRPr lang="en-GB"/>
           </a:p>
@@ -2514,7 +2514,7 @@
           <a:p>
             <a:fld id="{1A77EDC3-57CA-43CF-8E2C-C9B9AF002A04}" type="datetimeFigureOut">
               <a:rPr lang="en-GB" smtClean="0"/>
-              <a:t>21/05/2025</a:t>
+              <a:t>27/05/2025</a:t>
             </a:fld>
             <a:endParaRPr lang="en-GB"/>
           </a:p>
@@ -2790,7 +2790,7 @@
           <a:p>
             <a:fld id="{1A77EDC3-57CA-43CF-8E2C-C9B9AF002A04}" type="datetimeFigureOut">
               <a:rPr lang="en-GB" smtClean="0"/>
-              <a:t>21/05/2025</a:t>
+              <a:t>27/05/2025</a:t>
             </a:fld>
             <a:endParaRPr lang="en-GB"/>
           </a:p>
@@ -3058,7 +3058,7 @@
           <a:p>
             <a:fld id="{1A77EDC3-57CA-43CF-8E2C-C9B9AF002A04}" type="datetimeFigureOut">
               <a:rPr lang="en-GB" smtClean="0"/>
-              <a:t>21/05/2025</a:t>
+              <a:t>27/05/2025</a:t>
             </a:fld>
             <a:endParaRPr lang="en-GB"/>
           </a:p>
@@ -3473,7 +3473,7 @@
           <a:p>
             <a:fld id="{1A77EDC3-57CA-43CF-8E2C-C9B9AF002A04}" type="datetimeFigureOut">
               <a:rPr lang="en-GB" smtClean="0"/>
-              <a:t>21/05/2025</a:t>
+              <a:t>27/05/2025</a:t>
             </a:fld>
             <a:endParaRPr lang="en-GB"/>
           </a:p>
@@ -3615,7 +3615,7 @@
           <a:p>
             <a:fld id="{1A77EDC3-57CA-43CF-8E2C-C9B9AF002A04}" type="datetimeFigureOut">
               <a:rPr lang="en-GB" smtClean="0"/>
-              <a:t>21/05/2025</a:t>
+              <a:t>27/05/2025</a:t>
             </a:fld>
             <a:endParaRPr lang="en-GB"/>
           </a:p>
@@ -3728,7 +3728,7 @@
           <a:p>
             <a:fld id="{1A77EDC3-57CA-43CF-8E2C-C9B9AF002A04}" type="datetimeFigureOut">
               <a:rPr lang="en-GB" smtClean="0"/>
-              <a:t>21/05/2025</a:t>
+              <a:t>27/05/2025</a:t>
             </a:fld>
             <a:endParaRPr lang="en-GB"/>
           </a:p>
@@ -4041,7 +4041,7 @@
           <a:p>
             <a:fld id="{1A77EDC3-57CA-43CF-8E2C-C9B9AF002A04}" type="datetimeFigureOut">
               <a:rPr lang="en-GB" smtClean="0"/>
-              <a:t>21/05/2025</a:t>
+              <a:t>27/05/2025</a:t>
             </a:fld>
             <a:endParaRPr lang="en-GB"/>
           </a:p>
@@ -4330,7 +4330,7 @@
           <a:p>
             <a:fld id="{1A77EDC3-57CA-43CF-8E2C-C9B9AF002A04}" type="datetimeFigureOut">
               <a:rPr lang="en-GB" smtClean="0"/>
-              <a:t>21/05/2025</a:t>
+              <a:t>27/05/2025</a:t>
             </a:fld>
             <a:endParaRPr lang="en-GB"/>
           </a:p>
@@ -4573,7 +4573,7 @@
           <a:p>
             <a:fld id="{1A77EDC3-57CA-43CF-8E2C-C9B9AF002A04}" type="datetimeFigureOut">
               <a:rPr lang="en-GB" smtClean="0"/>
-              <a:t>21/05/2025</a:t>
+              <a:t>27/05/2025</a:t>
             </a:fld>
             <a:endParaRPr lang="en-GB"/>
           </a:p>
@@ -20585,6 +20585,60 @@
       </p:grpSpPr>
       <p:sp>
         <p:nvSpPr>
+          <p:cNvPr id="3" name="Rectangle 2">
+            <a:extLst>
+              <a:ext uri="{FF2B5EF4-FFF2-40B4-BE49-F238E27FC236}">
+                <a16:creationId xmlns:a16="http://schemas.microsoft.com/office/drawing/2014/main" id="{4DCA9595-E869-5E7F-2EF8-A7425D57DE28}"/>
+              </a:ext>
+            </a:extLst>
+          </p:cNvPr>
+          <p:cNvSpPr/>
+          <p:nvPr/>
+        </p:nvSpPr>
+        <p:spPr>
+          <a:xfrm>
+            <a:off x="3051110" y="2453951"/>
+            <a:ext cx="6074229" cy="3405673"/>
+          </a:xfrm>
+          <a:prstGeom prst="rect">
+            <a:avLst/>
+          </a:prstGeom>
+          <a:solidFill>
+            <a:schemeClr val="bg1"/>
+          </a:solidFill>
+          <a:ln>
+            <a:solidFill>
+              <a:schemeClr val="bg1"/>
+            </a:solidFill>
+          </a:ln>
+        </p:spPr>
+        <p:style>
+          <a:lnRef idx="2">
+            <a:schemeClr val="accent1">
+              <a:shade val="15000"/>
+            </a:schemeClr>
+          </a:lnRef>
+          <a:fillRef idx="1">
+            <a:schemeClr val="accent1"/>
+          </a:fillRef>
+          <a:effectRef idx="0">
+            <a:schemeClr val="accent1"/>
+          </a:effectRef>
+          <a:fontRef idx="minor">
+            <a:schemeClr val="lt1"/>
+          </a:fontRef>
+        </p:style>
+        <p:txBody>
+          <a:bodyPr rtlCol="0" anchor="ctr"/>
+          <a:lstStyle/>
+          <a:p>
+            <a:pPr algn="ctr"/>
+            <a:endParaRPr lang="en-GB"/>
+          </a:p>
+        </p:txBody>
+      </p:sp>
+      <p:sp>
+        <p:nvSpPr>
           <p:cNvPr id="5" name="Title 1">
             <a:extLst>
               <a:ext uri="{FF2B5EF4-FFF2-40B4-BE49-F238E27FC236}">
@@ -20865,6 +20919,60 @@
           <a:chExt cx="0" cy="0"/>
         </a:xfrm>
       </p:grpSpPr>
+      <p:sp>
+        <p:nvSpPr>
+          <p:cNvPr id="2" name="Rectangle 1">
+            <a:extLst>
+              <a:ext uri="{FF2B5EF4-FFF2-40B4-BE49-F238E27FC236}">
+                <a16:creationId xmlns:a16="http://schemas.microsoft.com/office/drawing/2014/main" id="{44F691A6-D397-A5C1-8D1F-9933E3A9544F}"/>
+              </a:ext>
+            </a:extLst>
+          </p:cNvPr>
+          <p:cNvSpPr/>
+          <p:nvPr/>
+        </p:nvSpPr>
+        <p:spPr>
+          <a:xfrm>
+            <a:off x="3051110" y="2453951"/>
+            <a:ext cx="6074229" cy="3405673"/>
+          </a:xfrm>
+          <a:prstGeom prst="rect">
+            <a:avLst/>
+          </a:prstGeom>
+          <a:solidFill>
+            <a:schemeClr val="bg1"/>
+          </a:solidFill>
+          <a:ln>
+            <a:solidFill>
+              <a:schemeClr val="bg1"/>
+            </a:solidFill>
+          </a:ln>
+        </p:spPr>
+        <p:style>
+          <a:lnRef idx="2">
+            <a:schemeClr val="accent1">
+              <a:shade val="15000"/>
+            </a:schemeClr>
+          </a:lnRef>
+          <a:fillRef idx="1">
+            <a:schemeClr val="accent1"/>
+          </a:fillRef>
+          <a:effectRef idx="0">
+            <a:schemeClr val="accent1"/>
+          </a:effectRef>
+          <a:fontRef idx="minor">
+            <a:schemeClr val="lt1"/>
+          </a:fontRef>
+        </p:style>
+        <p:txBody>
+          <a:bodyPr rtlCol="0" anchor="ctr"/>
+          <a:lstStyle/>
+          <a:p>
+            <a:pPr algn="ctr"/>
+            <a:endParaRPr lang="en-GB"/>
+          </a:p>
+        </p:txBody>
+      </p:sp>
       <p:sp>
         <p:nvSpPr>
           <p:cNvPr id="5" name="Title 1">
@@ -21283,6 +21391,60 @@
       </p:grpSpPr>
       <p:sp>
         <p:nvSpPr>
+          <p:cNvPr id="2" name="Rectangle 1">
+            <a:extLst>
+              <a:ext uri="{FF2B5EF4-FFF2-40B4-BE49-F238E27FC236}">
+                <a16:creationId xmlns:a16="http://schemas.microsoft.com/office/drawing/2014/main" id="{B8B66AB6-5DE9-55E8-0786-940DA7CEE3BF}"/>
+              </a:ext>
+            </a:extLst>
+          </p:cNvPr>
+          <p:cNvSpPr/>
+          <p:nvPr/>
+        </p:nvSpPr>
+        <p:spPr>
+          <a:xfrm>
+            <a:off x="3051110" y="2453951"/>
+            <a:ext cx="6074229" cy="3405673"/>
+          </a:xfrm>
+          <a:prstGeom prst="rect">
+            <a:avLst/>
+          </a:prstGeom>
+          <a:solidFill>
+            <a:schemeClr val="bg1"/>
+          </a:solidFill>
+          <a:ln>
+            <a:solidFill>
+              <a:schemeClr val="bg1"/>
+            </a:solidFill>
+          </a:ln>
+        </p:spPr>
+        <p:style>
+          <a:lnRef idx="2">
+            <a:schemeClr val="accent1">
+              <a:shade val="15000"/>
+            </a:schemeClr>
+          </a:lnRef>
+          <a:fillRef idx="1">
+            <a:schemeClr val="accent1"/>
+          </a:fillRef>
+          <a:effectRef idx="0">
+            <a:schemeClr val="accent1"/>
+          </a:effectRef>
+          <a:fontRef idx="minor">
+            <a:schemeClr val="lt1"/>
+          </a:fontRef>
+        </p:style>
+        <p:txBody>
+          <a:bodyPr rtlCol="0" anchor="ctr"/>
+          <a:lstStyle/>
+          <a:p>
+            <a:pPr algn="ctr"/>
+            <a:endParaRPr lang="en-GB"/>
+          </a:p>
+        </p:txBody>
+      </p:sp>
+      <p:sp>
+        <p:nvSpPr>
           <p:cNvPr id="5" name="Title 1">
             <a:extLst>
               <a:ext uri="{FF2B5EF4-FFF2-40B4-BE49-F238E27FC236}">
@@ -21726,7 +21888,7 @@
         <p:spPr>
           <a:xfrm>
             <a:off x="7563347" y="2568095"/>
-            <a:ext cx="1397947" cy="369332"/>
+            <a:ext cx="1255280" cy="369332"/>
           </a:xfrm>
           <a:prstGeom prst="rect">
             <a:avLst/>
@@ -21745,7 +21907,7 @@
                   <a:srgbClr val="003E74"/>
                 </a:solidFill>
               </a:rPr>
-              <a:t>ADS Library</a:t>
+              <a:t>DS Library</a:t>
             </a:r>
             <a:endParaRPr lang="en-GB" b="1" dirty="0">
               <a:solidFill>
